--- a/cours/Module TIC/Département Français/Master 1 - Langue et Culture/Cours_TIC_10_Services_Internet_FR.pptx
+++ b/cours/Module TIC/Département Français/Master 1 - Langue et Culture/Cours_TIC_10_Services_Internet_FR.pptx
@@ -4,9 +4,6 @@
   <p:sldMasterIdLst>
     <p:sldMasterId id="2147483648" r:id="rId1"/>
   </p:sldMasterIdLst>
-  <p:notesMasterIdLst>
-    <p:notesMasterId r:id="rId33"/>
-  </p:notesMasterIdLst>
   <p:sldIdLst>
     <p:sldId id="256" r:id="rId7"/>
     <p:sldId id="257" r:id="rId8"/>
@@ -18,6 +15,11 @@
     <p:sldId id="263" r:id="rId14"/>
     <p:sldId id="264" r:id="rId15"/>
     <p:sldId id="265" r:id="rId16"/>
+    <p:sldId id="266" r:id="rId17"/>
+    <p:sldId id="267" r:id="rId18"/>
+    <p:sldId id="268" r:id="rId19"/>
+    <p:sldId id="269" r:id="rId20"/>
+    <p:sldId id="270" r:id="rId21"/>
   </p:sldIdLst>
   <p:sldSz cx="9144000" cy="6858000" type="screen4x3"/>
   <p:notesSz cx="6858000" cy="9144000"/>
@@ -116,372 +118,7 @@
       </a:defRPr>
     </a:lvl9pPr>
   </p:defaultTextStyle>
-  <p:extLst>
-    <p:ext uri="{EFAFB233-063F-42B5-8137-9DF3F51BA10A}">
-      <p15:sldGuideLst xmlns:p15="http://schemas.microsoft.com/office/powerpoint/2012/main">
-        <p15:guide id="1" orient="horz" pos="2160">
-          <p15:clr>
-            <a:srgbClr val="A4A3A4"/>
-          </p15:clr>
-        </p15:guide>
-        <p15:guide id="2" pos="2880">
-          <p15:clr>
-            <a:srgbClr val="A4A3A4"/>
-          </p15:clr>
-        </p15:guide>
-      </p15:sldGuideLst>
-    </p:ext>
-  </p:extLst>
 </p:presentation>
-</file>
-
-<file path=ppt/notesMasters/notesMaster1.xml><?xml version="1.0" encoding="utf-8"?>
-<p:notesMaster xmlns:a="http://schemas.openxmlformats.org/drawingml/2006/main" xmlns:r="http://schemas.openxmlformats.org/officeDocument/2006/relationships" xmlns:p="http://schemas.openxmlformats.org/presentationml/2006/main">
-  <p:cSld>
-    <p:bg>
-      <p:bgRef idx="1001">
-        <a:schemeClr val="bg1"/>
-      </p:bgRef>
-    </p:bg>
-    <p:spTree>
-      <p:nvGrpSpPr>
-        <p:cNvPr id="1" name=""/>
-        <p:cNvGrpSpPr/>
-        <p:nvPr/>
-      </p:nvGrpSpPr>
-      <p:grpSpPr>
-        <a:xfrm>
-          <a:off x="0" y="0"/>
-          <a:ext cx="0" cy="0"/>
-          <a:chOff x="0" y="0"/>
-          <a:chExt cx="0" cy="0"/>
-        </a:xfrm>
-      </p:grpSpPr>
-      <p:sp>
-        <p:nvSpPr>
-          <p:cNvPr id="2" name="Espace réservé de l'en-tête 1"/>
-          <p:cNvSpPr>
-            <a:spLocks noGrp="1"/>
-          </p:cNvSpPr>
-          <p:nvPr>
-            <p:ph type="hdr" sz="quarter"/>
-          </p:nvPr>
-        </p:nvSpPr>
-        <p:spPr>
-          <a:xfrm>
-            <a:off x="0" y="0"/>
-            <a:ext cx="2971800" cy="458788"/>
-          </a:xfrm>
-          <a:prstGeom prst="rect">
-            <a:avLst/>
-          </a:prstGeom>
-        </p:spPr>
-        <p:txBody>
-          <a:bodyPr vert="horz" lIns="91440" tIns="45720" rIns="91440" bIns="45720" rtlCol="0"/>
-          <a:lstStyle>
-            <a:lvl1pPr algn="l">
-              <a:defRPr sz="1200"/>
-            </a:lvl1pPr>
-          </a:lstStyle>
-          <a:p>
-            <a:endParaRPr lang="fr-FR"/>
-          </a:p>
-        </p:txBody>
-      </p:sp>
-      <p:sp>
-        <p:nvSpPr>
-          <p:cNvPr id="3" name="Espace réservé de la date 2"/>
-          <p:cNvSpPr>
-            <a:spLocks noGrp="1"/>
-          </p:cNvSpPr>
-          <p:nvPr>
-            <p:ph type="dt" idx="1"/>
-          </p:nvPr>
-        </p:nvSpPr>
-        <p:spPr>
-          <a:xfrm>
-            <a:off x="3884613" y="0"/>
-            <a:ext cx="2971800" cy="458788"/>
-          </a:xfrm>
-          <a:prstGeom prst="rect">
-            <a:avLst/>
-          </a:prstGeom>
-        </p:spPr>
-        <p:txBody>
-          <a:bodyPr vert="horz" lIns="91440" tIns="45720" rIns="91440" bIns="45720" rtlCol="0"/>
-          <a:lstStyle>
-            <a:lvl1pPr algn="r">
-              <a:defRPr sz="1200"/>
-            </a:lvl1pPr>
-          </a:lstStyle>
-          <a:p>
-            <a:fld id="{B8F0B2C1-4194-45A7-9834-731A4F36BABD}" type="datetimeFigureOut">
-              <a:rPr lang="fr-FR" smtClean="0"/>
-              <a:t>16/05/2026</a:t>
-            </a:fld>
-            <a:endParaRPr lang="fr-FR"/>
-          </a:p>
-        </p:txBody>
-      </p:sp>
-      <p:sp>
-        <p:nvSpPr>
-          <p:cNvPr id="4" name="Espace réservé de l'image des diapositives 3"/>
-          <p:cNvSpPr>
-            <a:spLocks noGrp="1" noRot="1" noChangeAspect="1"/>
-          </p:cNvSpPr>
-          <p:nvPr>
-            <p:ph type="sldImg" idx="2"/>
-          </p:nvPr>
-        </p:nvSpPr>
-        <p:spPr>
-          <a:xfrm>
-            <a:off x="1371600" y="1143000"/>
-            <a:ext cx="4114800" cy="3086100"/>
-          </a:xfrm>
-          <a:prstGeom prst="rect">
-            <a:avLst/>
-          </a:prstGeom>
-          <a:noFill/>
-          <a:ln w="12700">
-            <a:solidFill>
-              <a:prstClr val="black"/>
-            </a:solidFill>
-          </a:ln>
-        </p:spPr>
-        <p:txBody>
-          <a:bodyPr vert="horz" lIns="91440" tIns="45720" rIns="91440" bIns="45720" rtlCol="0" anchor="ctr"/>
-          <a:lstStyle/>
-          <a:p>
-            <a:endParaRPr lang="fr-FR"/>
-          </a:p>
-        </p:txBody>
-      </p:sp>
-      <p:sp>
-        <p:nvSpPr>
-          <p:cNvPr id="5" name="Espace réservé des notes 4"/>
-          <p:cNvSpPr>
-            <a:spLocks noGrp="1"/>
-          </p:cNvSpPr>
-          <p:nvPr>
-            <p:ph type="body" sz="quarter" idx="3"/>
-          </p:nvPr>
-        </p:nvSpPr>
-        <p:spPr>
-          <a:xfrm>
-            <a:off x="685800" y="4400550"/>
-            <a:ext cx="5486400" cy="3600450"/>
-          </a:xfrm>
-          <a:prstGeom prst="rect">
-            <a:avLst/>
-          </a:prstGeom>
-        </p:spPr>
-        <p:txBody>
-          <a:bodyPr vert="horz" lIns="91440" tIns="45720" rIns="91440" bIns="45720" rtlCol="0"/>
-          <a:lstStyle/>
-          <a:p>
-            <a:pPr lvl="0"/>
-            <a:r>
-              <a:rPr lang="fr-FR"/>
-              <a:t>Cliquez pour modifier les styles du texte du masque</a:t>
-            </a:r>
-          </a:p>
-          <a:p>
-            <a:pPr lvl="1"/>
-            <a:r>
-              <a:rPr lang="fr-FR"/>
-              <a:t>Deuxième niveau</a:t>
-            </a:r>
-          </a:p>
-          <a:p>
-            <a:pPr lvl="2"/>
-            <a:r>
-              <a:rPr lang="fr-FR"/>
-              <a:t>Troisième niveau</a:t>
-            </a:r>
-          </a:p>
-          <a:p>
-            <a:pPr lvl="3"/>
-            <a:r>
-              <a:rPr lang="fr-FR"/>
-              <a:t>Quatrième niveau</a:t>
-            </a:r>
-          </a:p>
-          <a:p>
-            <a:pPr lvl="4"/>
-            <a:r>
-              <a:rPr lang="fr-FR"/>
-              <a:t>Cinquième niveau</a:t>
-            </a:r>
-          </a:p>
-        </p:txBody>
-      </p:sp>
-      <p:sp>
-        <p:nvSpPr>
-          <p:cNvPr id="6" name="Espace réservé du pied de page 5"/>
-          <p:cNvSpPr>
-            <a:spLocks noGrp="1"/>
-          </p:cNvSpPr>
-          <p:nvPr>
-            <p:ph type="ftr" sz="quarter" idx="4"/>
-          </p:nvPr>
-        </p:nvSpPr>
-        <p:spPr>
-          <a:xfrm>
-            <a:off x="0" y="8685213"/>
-            <a:ext cx="2971800" cy="458787"/>
-          </a:xfrm>
-          <a:prstGeom prst="rect">
-            <a:avLst/>
-          </a:prstGeom>
-        </p:spPr>
-        <p:txBody>
-          <a:bodyPr vert="horz" lIns="91440" tIns="45720" rIns="91440" bIns="45720" rtlCol="0" anchor="b"/>
-          <a:lstStyle>
-            <a:lvl1pPr algn="l">
-              <a:defRPr sz="1200"/>
-            </a:lvl1pPr>
-          </a:lstStyle>
-          <a:p>
-            <a:endParaRPr lang="fr-FR"/>
-          </a:p>
-        </p:txBody>
-      </p:sp>
-      <p:sp>
-        <p:nvSpPr>
-          <p:cNvPr id="7" name="Espace réservé du numéro de diapositive 6"/>
-          <p:cNvSpPr>
-            <a:spLocks noGrp="1"/>
-          </p:cNvSpPr>
-          <p:nvPr>
-            <p:ph type="sldNum" sz="quarter" idx="5"/>
-          </p:nvPr>
-        </p:nvSpPr>
-        <p:spPr>
-          <a:xfrm>
-            <a:off x="3884613" y="8685213"/>
-            <a:ext cx="2971800" cy="458787"/>
-          </a:xfrm>
-          <a:prstGeom prst="rect">
-            <a:avLst/>
-          </a:prstGeom>
-        </p:spPr>
-        <p:txBody>
-          <a:bodyPr vert="horz" lIns="91440" tIns="45720" rIns="91440" bIns="45720" rtlCol="0" anchor="b"/>
-          <a:lstStyle>
-            <a:lvl1pPr algn="r">
-              <a:defRPr sz="1200"/>
-            </a:lvl1pPr>
-          </a:lstStyle>
-          <a:p>
-            <a:fld id="{EDB5666F-E79B-4A29-9A64-FA4855FAABBD}" type="slidenum">
-              <a:rPr lang="fr-FR" smtClean="0"/>
-              <a:t>‹N°›</a:t>
-            </a:fld>
-            <a:endParaRPr lang="fr-FR"/>
-          </a:p>
-        </p:txBody>
-      </p:sp>
-    </p:spTree>
-    <p:extLst>
-      <p:ext uri="{BB962C8B-B14F-4D97-AF65-F5344CB8AC3E}">
-        <p14:creationId xmlns:p14="http://schemas.microsoft.com/office/powerpoint/2010/main" val="4057233482"/>
-      </p:ext>
-    </p:extLst>
-  </p:cSld>
-  <p:clrMap bg1="lt1" tx1="dk1" bg2="lt2" tx2="dk2" accent1="accent1" accent2="accent2" accent3="accent3" accent4="accent4" accent5="accent5" accent6="accent6" hlink="hlink" folHlink="folHlink"/>
-  <p:notesStyle>
-    <a:lvl1pPr marL="0" algn="l" defTabSz="914400" rtl="0" eaLnBrk="1" latinLnBrk="0" hangingPunct="1">
-      <a:defRPr sz="1200" kern="1200">
-        <a:solidFill>
-          <a:schemeClr val="tx1"/>
-        </a:solidFill>
-        <a:latin typeface="+mn-lt"/>
-        <a:ea typeface="+mn-ea"/>
-        <a:cs typeface="+mn-cs"/>
-      </a:defRPr>
-    </a:lvl1pPr>
-    <a:lvl2pPr marL="457200" algn="l" defTabSz="914400" rtl="0" eaLnBrk="1" latinLnBrk="0" hangingPunct="1">
-      <a:defRPr sz="1200" kern="1200">
-        <a:solidFill>
-          <a:schemeClr val="tx1"/>
-        </a:solidFill>
-        <a:latin typeface="+mn-lt"/>
-        <a:ea typeface="+mn-ea"/>
-        <a:cs typeface="+mn-cs"/>
-      </a:defRPr>
-    </a:lvl2pPr>
-    <a:lvl3pPr marL="914400" algn="l" defTabSz="914400" rtl="0" eaLnBrk="1" latinLnBrk="0" hangingPunct="1">
-      <a:defRPr sz="1200" kern="1200">
-        <a:solidFill>
-          <a:schemeClr val="tx1"/>
-        </a:solidFill>
-        <a:latin typeface="+mn-lt"/>
-        <a:ea typeface="+mn-ea"/>
-        <a:cs typeface="+mn-cs"/>
-      </a:defRPr>
-    </a:lvl3pPr>
-    <a:lvl4pPr marL="1371600" algn="l" defTabSz="914400" rtl="0" eaLnBrk="1" latinLnBrk="0" hangingPunct="1">
-      <a:defRPr sz="1200" kern="1200">
-        <a:solidFill>
-          <a:schemeClr val="tx1"/>
-        </a:solidFill>
-        <a:latin typeface="+mn-lt"/>
-        <a:ea typeface="+mn-ea"/>
-        <a:cs typeface="+mn-cs"/>
-      </a:defRPr>
-    </a:lvl4pPr>
-    <a:lvl5pPr marL="1828800" algn="l" defTabSz="914400" rtl="0" eaLnBrk="1" latinLnBrk="0" hangingPunct="1">
-      <a:defRPr sz="1200" kern="1200">
-        <a:solidFill>
-          <a:schemeClr val="tx1"/>
-        </a:solidFill>
-        <a:latin typeface="+mn-lt"/>
-        <a:ea typeface="+mn-ea"/>
-        <a:cs typeface="+mn-cs"/>
-      </a:defRPr>
-    </a:lvl5pPr>
-    <a:lvl6pPr marL="2286000" algn="l" defTabSz="914400" rtl="0" eaLnBrk="1" latinLnBrk="0" hangingPunct="1">
-      <a:defRPr sz="1200" kern="1200">
-        <a:solidFill>
-          <a:schemeClr val="tx1"/>
-        </a:solidFill>
-        <a:latin typeface="+mn-lt"/>
-        <a:ea typeface="+mn-ea"/>
-        <a:cs typeface="+mn-cs"/>
-      </a:defRPr>
-    </a:lvl6pPr>
-    <a:lvl7pPr marL="2743200" algn="l" defTabSz="914400" rtl="0" eaLnBrk="1" latinLnBrk="0" hangingPunct="1">
-      <a:defRPr sz="1200" kern="1200">
-        <a:solidFill>
-          <a:schemeClr val="tx1"/>
-        </a:solidFill>
-        <a:latin typeface="+mn-lt"/>
-        <a:ea typeface="+mn-ea"/>
-        <a:cs typeface="+mn-cs"/>
-      </a:defRPr>
-    </a:lvl7pPr>
-    <a:lvl8pPr marL="3200400" algn="l" defTabSz="914400" rtl="0" eaLnBrk="1" latinLnBrk="0" hangingPunct="1">
-      <a:defRPr sz="1200" kern="1200">
-        <a:solidFill>
-          <a:schemeClr val="tx1"/>
-        </a:solidFill>
-        <a:latin typeface="+mn-lt"/>
-        <a:ea typeface="+mn-ea"/>
-        <a:cs typeface="+mn-cs"/>
-      </a:defRPr>
-    </a:lvl8pPr>
-    <a:lvl9pPr marL="3657600" algn="l" defTabSz="914400" rtl="0" eaLnBrk="1" latinLnBrk="0" hangingPunct="1">
-      <a:defRPr sz="1200" kern="1200">
-        <a:solidFill>
-          <a:schemeClr val="tx1"/>
-        </a:solidFill>
-        <a:latin typeface="+mn-lt"/>
-        <a:ea typeface="+mn-ea"/>
-        <a:cs typeface="+mn-cs"/>
-      </a:defRPr>
-    </a:lvl9pPr>
-  </p:notesStyle>
-</p:notesMaster>
 </file>
 
 <file path=ppt/slideLayouts/slideLayout1.xml><?xml version="1.0" encoding="utf-8"?>
@@ -522,9 +159,10 @@
           <a:lstStyle/>
           <a:p>
             <a:r>
-              <a:rPr lang="en-US"/>
+              <a:rPr lang="en-US" smtClean="0"/>
               <a:t>Click to edit Master title style</a:t>
             </a:r>
+            <a:endParaRPr lang="en-US"/>
           </a:p>
         </p:txBody>
       </p:sp>
@@ -640,9 +278,10 @@
           </a:lstStyle>
           <a:p>
             <a:r>
-              <a:rPr lang="en-US"/>
+              <a:rPr lang="en-US" smtClean="0"/>
               <a:t>Click to edit Master subtitle style</a:t>
             </a:r>
+            <a:endParaRPr lang="en-US"/>
           </a:p>
         </p:txBody>
       </p:sp>
@@ -663,7 +302,7 @@
           <a:p>
             <a:fld id="{5BCAD085-E8A6-8845-BD4E-CB4CCA059FC4}" type="datetimeFigureOut">
               <a:rPr lang="en-US" smtClean="0"/>
-              <a:t>5/16/2026</a:t>
+              <a:t>1/27/13</a:t>
             </a:fld>
             <a:endParaRPr lang="en-US"/>
           </a:p>
@@ -705,7 +344,7 @@
           <a:p>
             <a:fld id="{C1FF6DA9-008F-8B48-92A6-B652298478BF}" type="slidenum">
               <a:rPr lang="en-US" smtClean="0"/>
-              <a:t>‹N°›</a:t>
+              <a:t>‹#›</a:t>
             </a:fld>
             <a:endParaRPr lang="en-US"/>
           </a:p>
@@ -757,9 +396,10 @@
           <a:lstStyle/>
           <a:p>
             <a:r>
-              <a:rPr lang="en-US"/>
+              <a:rPr lang="en-US" smtClean="0"/>
               <a:t>Click to edit Master title style</a:t>
             </a:r>
+            <a:endParaRPr lang="en-US"/>
           </a:p>
         </p:txBody>
       </p:sp>
@@ -780,37 +420,38 @@
           <a:p>
             <a:pPr lvl="0"/>
             <a:r>
-              <a:rPr lang="en-US"/>
+              <a:rPr lang="en-US" smtClean="0"/>
               <a:t>Click to edit Master text styles</a:t>
             </a:r>
           </a:p>
           <a:p>
             <a:pPr lvl="1"/>
             <a:r>
-              <a:rPr lang="en-US"/>
+              <a:rPr lang="en-US" smtClean="0"/>
               <a:t>Second level</a:t>
             </a:r>
           </a:p>
           <a:p>
             <a:pPr lvl="2"/>
             <a:r>
-              <a:rPr lang="en-US"/>
+              <a:rPr lang="en-US" smtClean="0"/>
               <a:t>Third level</a:t>
             </a:r>
           </a:p>
           <a:p>
             <a:pPr lvl="3"/>
             <a:r>
-              <a:rPr lang="en-US"/>
+              <a:rPr lang="en-US" smtClean="0"/>
               <a:t>Fourth level</a:t>
             </a:r>
           </a:p>
           <a:p>
             <a:pPr lvl="4"/>
             <a:r>
-              <a:rPr lang="en-US"/>
+              <a:rPr lang="en-US" smtClean="0"/>
               <a:t>Fifth level</a:t>
             </a:r>
+            <a:endParaRPr lang="en-US"/>
           </a:p>
         </p:txBody>
       </p:sp>
@@ -831,7 +472,7 @@
           <a:p>
             <a:fld id="{5BCAD085-E8A6-8845-BD4E-CB4CCA059FC4}" type="datetimeFigureOut">
               <a:rPr lang="en-US" smtClean="0"/>
-              <a:t>5/16/2026</a:t>
+              <a:t>1/27/13</a:t>
             </a:fld>
             <a:endParaRPr lang="en-US"/>
           </a:p>
@@ -873,7 +514,7 @@
           <a:p>
             <a:fld id="{C1FF6DA9-008F-8B48-92A6-B652298478BF}" type="slidenum">
               <a:rPr lang="en-US" smtClean="0"/>
-              <a:t>‹N°›</a:t>
+              <a:t>‹#›</a:t>
             </a:fld>
             <a:endParaRPr lang="en-US"/>
           </a:p>
@@ -930,9 +571,10 @@
           <a:lstStyle/>
           <a:p>
             <a:r>
-              <a:rPr lang="en-US"/>
+              <a:rPr lang="en-US" smtClean="0"/>
               <a:t>Click to edit Master title style</a:t>
             </a:r>
+            <a:endParaRPr lang="en-US"/>
           </a:p>
         </p:txBody>
       </p:sp>
@@ -958,37 +600,38 @@
           <a:p>
             <a:pPr lvl="0"/>
             <a:r>
-              <a:rPr lang="en-US"/>
+              <a:rPr lang="en-US" smtClean="0"/>
               <a:t>Click to edit Master text styles</a:t>
             </a:r>
           </a:p>
           <a:p>
             <a:pPr lvl="1"/>
             <a:r>
-              <a:rPr lang="en-US"/>
+              <a:rPr lang="en-US" smtClean="0"/>
               <a:t>Second level</a:t>
             </a:r>
           </a:p>
           <a:p>
             <a:pPr lvl="2"/>
             <a:r>
-              <a:rPr lang="en-US"/>
+              <a:rPr lang="en-US" smtClean="0"/>
               <a:t>Third level</a:t>
             </a:r>
           </a:p>
           <a:p>
             <a:pPr lvl="3"/>
             <a:r>
-              <a:rPr lang="en-US"/>
+              <a:rPr lang="en-US" smtClean="0"/>
               <a:t>Fourth level</a:t>
             </a:r>
           </a:p>
           <a:p>
             <a:pPr lvl="4"/>
             <a:r>
-              <a:rPr lang="en-US"/>
+              <a:rPr lang="en-US" smtClean="0"/>
               <a:t>Fifth level</a:t>
             </a:r>
+            <a:endParaRPr lang="en-US"/>
           </a:p>
         </p:txBody>
       </p:sp>
@@ -1009,7 +652,7 @@
           <a:p>
             <a:fld id="{5BCAD085-E8A6-8845-BD4E-CB4CCA059FC4}" type="datetimeFigureOut">
               <a:rPr lang="en-US" smtClean="0"/>
-              <a:t>5/16/2026</a:t>
+              <a:t>1/27/13</a:t>
             </a:fld>
             <a:endParaRPr lang="en-US"/>
           </a:p>
@@ -1051,7 +694,7 @@
           <a:p>
             <a:fld id="{C1FF6DA9-008F-8B48-92A6-B652298478BF}" type="slidenum">
               <a:rPr lang="en-US" smtClean="0"/>
-              <a:t>‹N°›</a:t>
+              <a:t>‹#›</a:t>
             </a:fld>
             <a:endParaRPr lang="en-US"/>
           </a:p>
@@ -1103,9 +746,10 @@
           <a:lstStyle/>
           <a:p>
             <a:r>
-              <a:rPr lang="en-US"/>
+              <a:rPr lang="en-US" smtClean="0"/>
               <a:t>Click to edit Master title style</a:t>
             </a:r>
+            <a:endParaRPr lang="en-US"/>
           </a:p>
         </p:txBody>
       </p:sp>
@@ -1126,37 +770,38 @@
           <a:p>
             <a:pPr lvl="0"/>
             <a:r>
-              <a:rPr lang="en-US"/>
+              <a:rPr lang="en-US" smtClean="0"/>
               <a:t>Click to edit Master text styles</a:t>
             </a:r>
           </a:p>
           <a:p>
             <a:pPr lvl="1"/>
             <a:r>
-              <a:rPr lang="en-US"/>
+              <a:rPr lang="en-US" smtClean="0"/>
               <a:t>Second level</a:t>
             </a:r>
           </a:p>
           <a:p>
             <a:pPr lvl="2"/>
             <a:r>
-              <a:rPr lang="en-US"/>
+              <a:rPr lang="en-US" smtClean="0"/>
               <a:t>Third level</a:t>
             </a:r>
           </a:p>
           <a:p>
             <a:pPr lvl="3"/>
             <a:r>
-              <a:rPr lang="en-US"/>
+              <a:rPr lang="en-US" smtClean="0"/>
               <a:t>Fourth level</a:t>
             </a:r>
           </a:p>
           <a:p>
             <a:pPr lvl="4"/>
             <a:r>
-              <a:rPr lang="en-US"/>
+              <a:rPr lang="en-US" smtClean="0"/>
               <a:t>Fifth level</a:t>
             </a:r>
+            <a:endParaRPr lang="en-US"/>
           </a:p>
         </p:txBody>
       </p:sp>
@@ -1177,7 +822,7 @@
           <a:p>
             <a:fld id="{5BCAD085-E8A6-8845-BD4E-CB4CCA059FC4}" type="datetimeFigureOut">
               <a:rPr lang="en-US" smtClean="0"/>
-              <a:t>5/16/2026</a:t>
+              <a:t>1/27/13</a:t>
             </a:fld>
             <a:endParaRPr lang="en-US"/>
           </a:p>
@@ -1219,7 +864,7 @@
           <a:p>
             <a:fld id="{C1FF6DA9-008F-8B48-92A6-B652298478BF}" type="slidenum">
               <a:rPr lang="en-US" smtClean="0"/>
-              <a:t>‹N°›</a:t>
+              <a:t>‹#›</a:t>
             </a:fld>
             <a:endParaRPr lang="en-US"/>
           </a:p>
@@ -1280,9 +925,10 @@
           </a:lstStyle>
           <a:p>
             <a:r>
-              <a:rPr lang="en-US"/>
+              <a:rPr lang="en-US" smtClean="0"/>
               <a:t>Click to edit Master title style</a:t>
             </a:r>
+            <a:endParaRPr lang="en-US"/>
           </a:p>
         </p:txBody>
       </p:sp>
@@ -1399,7 +1045,7 @@
           <a:p>
             <a:pPr lvl="0"/>
             <a:r>
-              <a:rPr lang="en-US"/>
+              <a:rPr lang="en-US" smtClean="0"/>
               <a:t>Click to edit Master text styles</a:t>
             </a:r>
           </a:p>
@@ -1422,7 +1068,7 @@
           <a:p>
             <a:fld id="{5BCAD085-E8A6-8845-BD4E-CB4CCA059FC4}" type="datetimeFigureOut">
               <a:rPr lang="en-US" smtClean="0"/>
-              <a:t>5/16/2026</a:t>
+              <a:t>1/27/13</a:t>
             </a:fld>
             <a:endParaRPr lang="en-US"/>
           </a:p>
@@ -1464,7 +1110,7 @@
           <a:p>
             <a:fld id="{C1FF6DA9-008F-8B48-92A6-B652298478BF}" type="slidenum">
               <a:rPr lang="en-US" smtClean="0"/>
-              <a:t>‹N°›</a:t>
+              <a:t>‹#›</a:t>
             </a:fld>
             <a:endParaRPr lang="en-US"/>
           </a:p>
@@ -1516,9 +1162,10 @@
           <a:lstStyle/>
           <a:p>
             <a:r>
-              <a:rPr lang="en-US"/>
+              <a:rPr lang="en-US" smtClean="0"/>
               <a:t>Click to edit Master title style</a:t>
             </a:r>
+            <a:endParaRPr lang="en-US"/>
           </a:p>
         </p:txBody>
       </p:sp>
@@ -1572,37 +1219,38 @@
           <a:p>
             <a:pPr lvl="0"/>
             <a:r>
-              <a:rPr lang="en-US"/>
+              <a:rPr lang="en-US" smtClean="0"/>
               <a:t>Click to edit Master text styles</a:t>
             </a:r>
           </a:p>
           <a:p>
             <a:pPr lvl="1"/>
             <a:r>
-              <a:rPr lang="en-US"/>
+              <a:rPr lang="en-US" smtClean="0"/>
               <a:t>Second level</a:t>
             </a:r>
           </a:p>
           <a:p>
             <a:pPr lvl="2"/>
             <a:r>
-              <a:rPr lang="en-US"/>
+              <a:rPr lang="en-US" smtClean="0"/>
               <a:t>Third level</a:t>
             </a:r>
           </a:p>
           <a:p>
             <a:pPr lvl="3"/>
             <a:r>
-              <a:rPr lang="en-US"/>
+              <a:rPr lang="en-US" smtClean="0"/>
               <a:t>Fourth level</a:t>
             </a:r>
           </a:p>
           <a:p>
             <a:pPr lvl="4"/>
             <a:r>
-              <a:rPr lang="en-US"/>
+              <a:rPr lang="en-US" smtClean="0"/>
               <a:t>Fifth level</a:t>
             </a:r>
+            <a:endParaRPr lang="en-US"/>
           </a:p>
         </p:txBody>
       </p:sp>
@@ -1656,37 +1304,38 @@
           <a:p>
             <a:pPr lvl="0"/>
             <a:r>
-              <a:rPr lang="en-US"/>
+              <a:rPr lang="en-US" smtClean="0"/>
               <a:t>Click to edit Master text styles</a:t>
             </a:r>
           </a:p>
           <a:p>
             <a:pPr lvl="1"/>
             <a:r>
-              <a:rPr lang="en-US"/>
+              <a:rPr lang="en-US" smtClean="0"/>
               <a:t>Second level</a:t>
             </a:r>
           </a:p>
           <a:p>
             <a:pPr lvl="2"/>
             <a:r>
-              <a:rPr lang="en-US"/>
+              <a:rPr lang="en-US" smtClean="0"/>
               <a:t>Third level</a:t>
             </a:r>
           </a:p>
           <a:p>
             <a:pPr lvl="3"/>
             <a:r>
-              <a:rPr lang="en-US"/>
+              <a:rPr lang="en-US" smtClean="0"/>
               <a:t>Fourth level</a:t>
             </a:r>
           </a:p>
           <a:p>
             <a:pPr lvl="4"/>
             <a:r>
-              <a:rPr lang="en-US"/>
+              <a:rPr lang="en-US" smtClean="0"/>
               <a:t>Fifth level</a:t>
             </a:r>
+            <a:endParaRPr lang="en-US"/>
           </a:p>
         </p:txBody>
       </p:sp>
@@ -1707,7 +1356,7 @@
           <a:p>
             <a:fld id="{5BCAD085-E8A6-8845-BD4E-CB4CCA059FC4}" type="datetimeFigureOut">
               <a:rPr lang="en-US" smtClean="0"/>
-              <a:t>5/16/2026</a:t>
+              <a:t>1/27/13</a:t>
             </a:fld>
             <a:endParaRPr lang="en-US"/>
           </a:p>
@@ -1749,7 +1398,7 @@
           <a:p>
             <a:fld id="{C1FF6DA9-008F-8B48-92A6-B652298478BF}" type="slidenum">
               <a:rPr lang="en-US" smtClean="0"/>
-              <a:t>‹N°›</a:t>
+              <a:t>‹#›</a:t>
             </a:fld>
             <a:endParaRPr lang="en-US"/>
           </a:p>
@@ -1805,9 +1454,10 @@
           </a:lstStyle>
           <a:p>
             <a:r>
-              <a:rPr lang="en-US"/>
+              <a:rPr lang="en-US" smtClean="0"/>
               <a:t>Click to edit Master title style</a:t>
             </a:r>
+            <a:endParaRPr lang="en-US"/>
           </a:p>
         </p:txBody>
       </p:sp>
@@ -1870,7 +1520,7 @@
           <a:p>
             <a:pPr lvl="0"/>
             <a:r>
-              <a:rPr lang="en-US"/>
+              <a:rPr lang="en-US" smtClean="0"/>
               <a:t>Click to edit Master text styles</a:t>
             </a:r>
           </a:p>
@@ -1926,37 +1576,38 @@
           <a:p>
             <a:pPr lvl="0"/>
             <a:r>
-              <a:rPr lang="en-US"/>
+              <a:rPr lang="en-US" smtClean="0"/>
               <a:t>Click to edit Master text styles</a:t>
             </a:r>
           </a:p>
           <a:p>
             <a:pPr lvl="1"/>
             <a:r>
-              <a:rPr lang="en-US"/>
+              <a:rPr lang="en-US" smtClean="0"/>
               <a:t>Second level</a:t>
             </a:r>
           </a:p>
           <a:p>
             <a:pPr lvl="2"/>
             <a:r>
-              <a:rPr lang="en-US"/>
+              <a:rPr lang="en-US" smtClean="0"/>
               <a:t>Third level</a:t>
             </a:r>
           </a:p>
           <a:p>
             <a:pPr lvl="3"/>
             <a:r>
-              <a:rPr lang="en-US"/>
+              <a:rPr lang="en-US" smtClean="0"/>
               <a:t>Fourth level</a:t>
             </a:r>
           </a:p>
           <a:p>
             <a:pPr lvl="4"/>
             <a:r>
-              <a:rPr lang="en-US"/>
+              <a:rPr lang="en-US" smtClean="0"/>
               <a:t>Fifth level</a:t>
             </a:r>
+            <a:endParaRPr lang="en-US"/>
           </a:p>
         </p:txBody>
       </p:sp>
@@ -2019,7 +1670,7 @@
           <a:p>
             <a:pPr lvl="0"/>
             <a:r>
-              <a:rPr lang="en-US"/>
+              <a:rPr lang="en-US" smtClean="0"/>
               <a:t>Click to edit Master text styles</a:t>
             </a:r>
           </a:p>
@@ -2075,37 +1726,38 @@
           <a:p>
             <a:pPr lvl="0"/>
             <a:r>
-              <a:rPr lang="en-US"/>
+              <a:rPr lang="en-US" smtClean="0"/>
               <a:t>Click to edit Master text styles</a:t>
             </a:r>
           </a:p>
           <a:p>
             <a:pPr lvl="1"/>
             <a:r>
-              <a:rPr lang="en-US"/>
+              <a:rPr lang="en-US" smtClean="0"/>
               <a:t>Second level</a:t>
             </a:r>
           </a:p>
           <a:p>
             <a:pPr lvl="2"/>
             <a:r>
-              <a:rPr lang="en-US"/>
+              <a:rPr lang="en-US" smtClean="0"/>
               <a:t>Third level</a:t>
             </a:r>
           </a:p>
           <a:p>
             <a:pPr lvl="3"/>
             <a:r>
-              <a:rPr lang="en-US"/>
+              <a:rPr lang="en-US" smtClean="0"/>
               <a:t>Fourth level</a:t>
             </a:r>
           </a:p>
           <a:p>
             <a:pPr lvl="4"/>
             <a:r>
-              <a:rPr lang="en-US"/>
+              <a:rPr lang="en-US" smtClean="0"/>
               <a:t>Fifth level</a:t>
             </a:r>
+            <a:endParaRPr lang="en-US"/>
           </a:p>
         </p:txBody>
       </p:sp>
@@ -2126,7 +1778,7 @@
           <a:p>
             <a:fld id="{5BCAD085-E8A6-8845-BD4E-CB4CCA059FC4}" type="datetimeFigureOut">
               <a:rPr lang="en-US" smtClean="0"/>
-              <a:t>5/16/2026</a:t>
+              <a:t>1/27/13</a:t>
             </a:fld>
             <a:endParaRPr lang="en-US"/>
           </a:p>
@@ -2168,7 +1820,7 @@
           <a:p>
             <a:fld id="{C1FF6DA9-008F-8B48-92A6-B652298478BF}" type="slidenum">
               <a:rPr lang="en-US" smtClean="0"/>
-              <a:t>‹N°›</a:t>
+              <a:t>‹#›</a:t>
             </a:fld>
             <a:endParaRPr lang="en-US"/>
           </a:p>
@@ -2220,9 +1872,10 @@
           <a:lstStyle/>
           <a:p>
             <a:r>
-              <a:rPr lang="en-US"/>
+              <a:rPr lang="en-US" smtClean="0"/>
               <a:t>Click to edit Master title style</a:t>
             </a:r>
+            <a:endParaRPr lang="en-US"/>
           </a:p>
         </p:txBody>
       </p:sp>
@@ -2243,7 +1896,7 @@
           <a:p>
             <a:fld id="{5BCAD085-E8A6-8845-BD4E-CB4CCA059FC4}" type="datetimeFigureOut">
               <a:rPr lang="en-US" smtClean="0"/>
-              <a:t>5/16/2026</a:t>
+              <a:t>1/27/13</a:t>
             </a:fld>
             <a:endParaRPr lang="en-US"/>
           </a:p>
@@ -2285,7 +1938,7 @@
           <a:p>
             <a:fld id="{C1FF6DA9-008F-8B48-92A6-B652298478BF}" type="slidenum">
               <a:rPr lang="en-US" smtClean="0"/>
-              <a:t>‹N°›</a:t>
+              <a:t>‹#›</a:t>
             </a:fld>
             <a:endParaRPr lang="en-US"/>
           </a:p>
@@ -2338,7 +1991,7 @@
           <a:p>
             <a:fld id="{5BCAD085-E8A6-8845-BD4E-CB4CCA059FC4}" type="datetimeFigureOut">
               <a:rPr lang="en-US" smtClean="0"/>
-              <a:t>5/16/2026</a:t>
+              <a:t>1/27/13</a:t>
             </a:fld>
             <a:endParaRPr lang="en-US"/>
           </a:p>
@@ -2380,7 +2033,7 @@
           <a:p>
             <a:fld id="{C1FF6DA9-008F-8B48-92A6-B652298478BF}" type="slidenum">
               <a:rPr lang="en-US" smtClean="0"/>
-              <a:t>‹N°›</a:t>
+              <a:t>‹#›</a:t>
             </a:fld>
             <a:endParaRPr lang="en-US"/>
           </a:p>
@@ -2441,9 +2094,10 @@
           </a:lstStyle>
           <a:p>
             <a:r>
-              <a:rPr lang="en-US"/>
+              <a:rPr lang="en-US" smtClean="0"/>
               <a:t>Click to edit Master title style</a:t>
             </a:r>
+            <a:endParaRPr lang="en-US"/>
           </a:p>
         </p:txBody>
       </p:sp>
@@ -2497,37 +2151,38 @@
           <a:p>
             <a:pPr lvl="0"/>
             <a:r>
-              <a:rPr lang="en-US"/>
+              <a:rPr lang="en-US" smtClean="0"/>
               <a:t>Click to edit Master text styles</a:t>
             </a:r>
           </a:p>
           <a:p>
             <a:pPr lvl="1"/>
             <a:r>
-              <a:rPr lang="en-US"/>
+              <a:rPr lang="en-US" smtClean="0"/>
               <a:t>Second level</a:t>
             </a:r>
           </a:p>
           <a:p>
             <a:pPr lvl="2"/>
             <a:r>
-              <a:rPr lang="en-US"/>
+              <a:rPr lang="en-US" smtClean="0"/>
               <a:t>Third level</a:t>
             </a:r>
           </a:p>
           <a:p>
             <a:pPr lvl="3"/>
             <a:r>
-              <a:rPr lang="en-US"/>
+              <a:rPr lang="en-US" smtClean="0"/>
               <a:t>Fourth level</a:t>
             </a:r>
           </a:p>
           <a:p>
             <a:pPr lvl="4"/>
             <a:r>
-              <a:rPr lang="en-US"/>
+              <a:rPr lang="en-US" smtClean="0"/>
               <a:t>Fifth level</a:t>
             </a:r>
+            <a:endParaRPr lang="en-US"/>
           </a:p>
         </p:txBody>
       </p:sp>
@@ -2590,7 +2245,7 @@
           <a:p>
             <a:pPr lvl="0"/>
             <a:r>
-              <a:rPr lang="en-US"/>
+              <a:rPr lang="en-US" smtClean="0"/>
               <a:t>Click to edit Master text styles</a:t>
             </a:r>
           </a:p>
@@ -2613,7 +2268,7 @@
           <a:p>
             <a:fld id="{5BCAD085-E8A6-8845-BD4E-CB4CCA059FC4}" type="datetimeFigureOut">
               <a:rPr lang="en-US" smtClean="0"/>
-              <a:t>5/16/2026</a:t>
+              <a:t>1/27/13</a:t>
             </a:fld>
             <a:endParaRPr lang="en-US"/>
           </a:p>
@@ -2655,7 +2310,7 @@
           <a:p>
             <a:fld id="{C1FF6DA9-008F-8B48-92A6-B652298478BF}" type="slidenum">
               <a:rPr lang="en-US" smtClean="0"/>
-              <a:t>‹N°›</a:t>
+              <a:t>‹#›</a:t>
             </a:fld>
             <a:endParaRPr lang="en-US"/>
           </a:p>
@@ -2716,9 +2371,10 @@
           </a:lstStyle>
           <a:p>
             <a:r>
-              <a:rPr lang="en-US"/>
+              <a:rPr lang="en-US" smtClean="0"/>
               <a:t>Click to edit Master title style</a:t>
             </a:r>
+            <a:endParaRPr lang="en-US"/>
           </a:p>
         </p:txBody>
       </p:sp>
@@ -2842,7 +2498,7 @@
           <a:p>
             <a:pPr lvl="0"/>
             <a:r>
-              <a:rPr lang="en-US"/>
+              <a:rPr lang="en-US" smtClean="0"/>
               <a:t>Click to edit Master text styles</a:t>
             </a:r>
           </a:p>
@@ -2865,7 +2521,7 @@
           <a:p>
             <a:fld id="{5BCAD085-E8A6-8845-BD4E-CB4CCA059FC4}" type="datetimeFigureOut">
               <a:rPr lang="en-US" smtClean="0"/>
-              <a:t>5/16/2026</a:t>
+              <a:t>1/27/13</a:t>
             </a:fld>
             <a:endParaRPr lang="en-US"/>
           </a:p>
@@ -2907,7 +2563,7 @@
           <a:p>
             <a:fld id="{C1FF6DA9-008F-8B48-92A6-B652298478BF}" type="slidenum">
               <a:rPr lang="en-US" smtClean="0"/>
-              <a:t>‹N°›</a:t>
+              <a:t>‹#›</a:t>
             </a:fld>
             <a:endParaRPr lang="en-US"/>
           </a:p>
@@ -2974,9 +2630,10 @@
           <a:lstStyle/>
           <a:p>
             <a:r>
-              <a:rPr lang="en-US"/>
+              <a:rPr lang="en-US" smtClean="0"/>
               <a:t>Click to edit Master title style</a:t>
             </a:r>
+            <a:endParaRPr lang="en-US"/>
           </a:p>
         </p:txBody>
       </p:sp>
@@ -3007,37 +2664,38 @@
           <a:p>
             <a:pPr lvl="0"/>
             <a:r>
-              <a:rPr lang="en-US"/>
+              <a:rPr lang="en-US" smtClean="0"/>
               <a:t>Click to edit Master text styles</a:t>
             </a:r>
           </a:p>
           <a:p>
             <a:pPr lvl="1"/>
             <a:r>
-              <a:rPr lang="en-US"/>
+              <a:rPr lang="en-US" smtClean="0"/>
               <a:t>Second level</a:t>
             </a:r>
           </a:p>
           <a:p>
             <a:pPr lvl="2"/>
             <a:r>
-              <a:rPr lang="en-US"/>
+              <a:rPr lang="en-US" smtClean="0"/>
               <a:t>Third level</a:t>
             </a:r>
           </a:p>
           <a:p>
             <a:pPr lvl="3"/>
             <a:r>
-              <a:rPr lang="en-US"/>
+              <a:rPr lang="en-US" smtClean="0"/>
               <a:t>Fourth level</a:t>
             </a:r>
           </a:p>
           <a:p>
             <a:pPr lvl="4"/>
             <a:r>
-              <a:rPr lang="en-US"/>
+              <a:rPr lang="en-US" smtClean="0"/>
               <a:t>Fifth level</a:t>
             </a:r>
+            <a:endParaRPr lang="en-US"/>
           </a:p>
         </p:txBody>
       </p:sp>
@@ -3076,7 +2734,7 @@
           <a:p>
             <a:fld id="{5BCAD085-E8A6-8845-BD4E-CB4CCA059FC4}" type="datetimeFigureOut">
               <a:rPr lang="en-US" smtClean="0"/>
-              <a:t>5/16/2026</a:t>
+              <a:t>1/27/13</a:t>
             </a:fld>
             <a:endParaRPr lang="en-US"/>
           </a:p>
@@ -3154,7 +2812,7 @@
           <a:p>
             <a:fld id="{C1FF6DA9-008F-8B48-92A6-B652298478BF}" type="slidenum">
               <a:rPr lang="en-US" smtClean="0"/>
-              <a:t>‹N°›</a:t>
+              <a:t>‹#›</a:t>
             </a:fld>
             <a:endParaRPr lang="en-US"/>
           </a:p>
@@ -3437,6 +3095,14 @@
 <file path=ppt/slides/slide1.xml><?xml version="1.0" encoding="utf-8"?>
 <p:sld xmlns:a="http://schemas.openxmlformats.org/drawingml/2006/main" xmlns:p="http://schemas.openxmlformats.org/presentationml/2006/main" xmlns:r="http://schemas.openxmlformats.org/officeDocument/2006/relationships">
   <p:cSld>
+    <p:bg>
+      <p:bgPr>
+        <a:solidFill>
+          <a:srgbClr val="1A5C33"/>
+        </a:solidFill>
+        <a:effectLst/>
+      </p:bgPr>
+    </p:bg>
     <p:spTree>
       <p:nvGrpSpPr>
         <p:cNvPr id="1" name=""/>
@@ -3446,56 +3112,14 @@
       <p:grpSpPr/>
       <p:sp>
         <p:nvSpPr>
-          <p:cNvPr id="2" name="Title 1"/>
-          <p:cNvSpPr>
-            <a:spLocks noGrp="1"/>
-          </p:cNvSpPr>
-          <p:nvPr>
-            <p:ph type="ctrTitle"/>
-          </p:nvPr>
-        </p:nvSpPr>
-        <p:spPr/>
-        <p:txBody>
-          <a:bodyPr/>
-          <a:lstStyle/>
-          <a:p>
-            <a:r>
-              <a:t>Services Internet</a:t>
-            </a:r>
-          </a:p>
-        </p:txBody>
-      </p:sp>
-      <p:sp>
-        <p:nvSpPr>
-          <p:cNvPr id="3" name="Subtitle 2"/>
-          <p:cNvSpPr>
-            <a:spLocks noGrp="1"/>
-          </p:cNvSpPr>
-          <p:nvPr>
-            <p:ph type="subTitle" idx="1"/>
-          </p:nvPr>
-        </p:nvSpPr>
-        <p:spPr/>
-        <p:txBody>
-          <a:bodyPr/>
-          <a:lstStyle/>
-          <a:p>
-            <a:r>
-              <a:t>Cours TIC 10 | 1h30 (90 min) | BELACEL Madani</a:t>
-            </a:r>
-          </a:p>
-        </p:txBody>
-      </p:sp>
-      <p:sp>
-        <p:nvSpPr>
-          <p:cNvPr id="4" name="TextBox 3"/>
+          <p:cNvPr id="2" name="TextBox 1"/>
           <p:cNvSpPr txBox="1"/>
           <p:nvPr/>
         </p:nvSpPr>
         <p:spPr>
           <a:xfrm>
-            <a:off x="365760" y="6446520"/>
-            <a:ext cx="8412480" cy="320040"/>
+            <a:off x="731520" y="1371600"/>
+            <a:ext cx="7680960" cy="1371600"/>
           </a:xfrm>
           <a:prstGeom prst="rect">
             <a:avLst/>
@@ -3503,20 +3127,90 @@
           <a:noFill/>
         </p:spPr>
         <p:txBody>
-          <a:bodyPr wrap="none">
+          <a:bodyPr wrap="square">
             <a:spAutoFit/>
           </a:bodyPr>
           <a:lstStyle/>
           <a:p>
             <a:pPr algn="ctr">
-              <a:defRPr sz="900">
-                <a:solidFill>
-                  <a:srgbClr val="404040"/>
-                </a:solidFill>
-              </a:defRPr>
-            </a:pPr>
-            <a:r>
-              <a:t>Cours TIC 10  •  Diapositive 1/10</a:t>
+              <a:defRPr sz="3200" b="1">
+                <a:solidFill>
+                  <a:srgbClr val="FFFFFF"/>
+                </a:solidFill>
+              </a:defRPr>
+            </a:pPr>
+            <a:r>
+              <a:t>Cours TIC 10 — Services Internet</a:t>
+            </a:r>
+          </a:p>
+        </p:txBody>
+      </p:sp>
+      <p:sp>
+        <p:nvSpPr>
+          <p:cNvPr id="3" name="TextBox 2"/>
+          <p:cNvSpPr txBox="1"/>
+          <p:nvPr/>
+        </p:nvSpPr>
+        <p:spPr>
+          <a:xfrm>
+            <a:off x="731520" y="2926080"/>
+            <a:ext cx="7680960" cy="548640"/>
+          </a:xfrm>
+          <a:prstGeom prst="rect">
+            <a:avLst/>
+          </a:prstGeom>
+          <a:noFill/>
+        </p:spPr>
+        <p:txBody>
+          <a:bodyPr wrap="square">
+            <a:spAutoFit/>
+          </a:bodyPr>
+          <a:lstStyle/>
+          <a:p>
+            <a:pPr algn="ctr">
+              <a:defRPr sz="2000" b="0">
+                <a:solidFill>
+                  <a:srgbClr val="C5D9C7"/>
+                </a:solidFill>
+              </a:defRPr>
+            </a:pPr>
+            <a:r>
+              <a:t>Module TIC — Dr. BELACEL Madani</a:t>
+            </a:r>
+          </a:p>
+        </p:txBody>
+      </p:sp>
+      <p:sp>
+        <p:nvSpPr>
+          <p:cNvPr id="4" name="TextBox 3"/>
+          <p:cNvSpPr txBox="1"/>
+          <p:nvPr/>
+        </p:nvSpPr>
+        <p:spPr>
+          <a:xfrm>
+            <a:off x="731520" y="3657600"/>
+            <a:ext cx="7680960" cy="457200"/>
+          </a:xfrm>
+          <a:prstGeom prst="rect">
+            <a:avLst/>
+          </a:prstGeom>
+          <a:noFill/>
+        </p:spPr>
+        <p:txBody>
+          <a:bodyPr wrap="square">
+            <a:spAutoFit/>
+          </a:bodyPr>
+          <a:lstStyle/>
+          <a:p>
+            <a:pPr algn="ctr">
+              <a:defRPr sz="1600" b="0">
+                <a:solidFill>
+                  <a:srgbClr val="A0CFA0"/>
+                </a:solidFill>
+              </a:defRPr>
+            </a:pPr>
+            <a:r>
+              <a:t>Université de Mostaganem — MCB</a:t>
             </a:r>
           </a:p>
         </p:txBody>
@@ -3526,15 +3220,20 @@
   <p:clrMapOvr>
     <a:masterClrMapping/>
   </p:clrMapOvr>
-  <p:transition spd="med">
-    <p:fade/>
-  </p:transition>
 </p:sld>
 </file>
 
 <file path=ppt/slides/slide10.xml><?xml version="1.0" encoding="utf-8"?>
 <p:sld xmlns:a="http://schemas.openxmlformats.org/drawingml/2006/main" xmlns:p="http://schemas.openxmlformats.org/presentationml/2006/main" xmlns:r="http://schemas.openxmlformats.org/officeDocument/2006/relationships">
   <p:cSld>
+    <p:bg>
+      <p:bgPr>
+        <a:solidFill>
+          <a:srgbClr val="FFFFFF"/>
+        </a:solidFill>
+        <a:effectLst/>
+      </p:bgPr>
+    </p:bg>
     <p:spTree>
       <p:nvGrpSpPr>
         <p:cNvPr id="1" name=""/>
@@ -3544,83 +3243,57 @@
       <p:grpSpPr/>
       <p:sp>
         <p:nvSpPr>
-          <p:cNvPr id="2" name="Title 1"/>
-          <p:cNvSpPr>
-            <a:spLocks noGrp="1"/>
-          </p:cNvSpPr>
-          <p:nvPr>
-            <p:ph type="title"/>
-          </p:nvPr>
-        </p:nvSpPr>
-        <p:spPr/>
-        <p:txBody>
-          <a:bodyPr/>
-          <a:lstStyle/>
-          <a:p>
-            <a:r>
-              <a:t>Conclusion</a:t>
-            </a:r>
-          </a:p>
-        </p:txBody>
-      </p:sp>
-      <p:sp>
-        <p:nvSpPr>
-          <p:cNvPr id="3" name="Content Placeholder 2"/>
-          <p:cNvSpPr>
-            <a:spLocks noGrp="1"/>
-          </p:cNvSpPr>
-          <p:nvPr>
-            <p:ph idx="1"/>
-          </p:nvPr>
-        </p:nvSpPr>
-        <p:spPr/>
-        <p:txBody>
-          <a:bodyPr/>
-          <a:lstStyle/>
-          <a:p>
-            <a:pPr>
-              <a:defRPr sz="2000"/>
-            </a:pPr>
-            <a:r>
-              <a:t>✅ Synthèse du module TIC complet — Fin du module — culture numérique</a:t>
-            </a:r>
-          </a:p>
-          <a:p>
-            <a:pPr>
-              <a:defRPr sz="2000"/>
-            </a:pPr>
-            <a:r>
-              <a:t>✅ TD 10 — 1h30</a:t>
-            </a:r>
-          </a:p>
-          <a:p>
-            <a:pPr>
-              <a:defRPr sz="2000"/>
-            </a:pPr>
-            <a:r>
-              <a:t>✅ Séance suivante</a:t>
-            </a:r>
-          </a:p>
-          <a:p>
-            <a:pPr>
-              <a:defRPr sz="2000"/>
-            </a:pPr>
-            <a:r>
-              <a:t>✅ Questions ?</a:t>
-            </a:r>
-          </a:p>
-        </p:txBody>
-      </p:sp>
-      <p:sp>
-        <p:nvSpPr>
-          <p:cNvPr id="4" name="TextBox 3"/>
+          <p:cNvPr id="2" name="Rectangle 1"/>
+          <p:cNvSpPr/>
+          <p:nvPr/>
+        </p:nvSpPr>
+        <p:spPr>
+          <a:xfrm>
+            <a:off x="0" y="0"/>
+            <a:ext cx="109728" cy="6858000"/>
+          </a:xfrm>
+          <a:prstGeom prst="rect">
+            <a:avLst/>
+          </a:prstGeom>
+          <a:solidFill>
+            <a:srgbClr val="2C6E49"/>
+          </a:solidFill>
+          <a:ln>
+            <a:noFill/>
+          </a:ln>
+        </p:spPr>
+        <p:style>
+          <a:lnRef idx="1">
+            <a:schemeClr val="accent1"/>
+          </a:lnRef>
+          <a:fillRef idx="3">
+            <a:schemeClr val="accent1"/>
+          </a:fillRef>
+          <a:effectRef idx="2">
+            <a:schemeClr val="accent1"/>
+          </a:effectRef>
+          <a:fontRef idx="minor">
+            <a:schemeClr val="lt1"/>
+          </a:fontRef>
+        </p:style>
+        <p:txBody>
+          <a:bodyPr rtlCol="0" anchor="ctr"/>
+          <a:lstStyle/>
+          <a:p>
+            <a:pPr algn="ctr"/>
+          </a:p>
+        </p:txBody>
+      </p:sp>
+      <p:sp>
+        <p:nvSpPr>
+          <p:cNvPr id="3" name="TextBox 2"/>
           <p:cNvSpPr txBox="1"/>
           <p:nvPr/>
         </p:nvSpPr>
         <p:spPr>
           <a:xfrm>
-            <a:off x="365760" y="6446520"/>
-            <a:ext cx="8412480" cy="320040"/>
+            <a:off x="457200" y="365760"/>
+            <a:ext cx="8229600" cy="640080"/>
           </a:xfrm>
           <a:prstGeom prst="rect">
             <a:avLst/>
@@ -3628,20 +3301,193 @@
           <a:noFill/>
         </p:spPr>
         <p:txBody>
-          <a:bodyPr wrap="none">
+          <a:bodyPr wrap="square">
             <a:spAutoFit/>
           </a:bodyPr>
           <a:lstStyle/>
           <a:p>
-            <a:pPr algn="ctr">
-              <a:defRPr sz="900">
-                <a:solidFill>
-                  <a:srgbClr val="404040"/>
-                </a:solidFill>
-              </a:defRPr>
-            </a:pPr>
-            <a:r>
-              <a:t>Cours TIC 10  •  Diapositive 10/10</a:t>
+            <a:pPr algn="l">
+              <a:defRPr sz="2200" b="1">
+                <a:solidFill>
+                  <a:srgbClr val="1A5C33"/>
+                </a:solidFill>
+              </a:defRPr>
+            </a:pPr>
+            <a:r>
+              <a:t>Plan du cours</a:t>
+            </a:r>
+          </a:p>
+        </p:txBody>
+      </p:sp>
+      <p:sp>
+        <p:nvSpPr>
+          <p:cNvPr id="4" name="TextBox 3"/>
+          <p:cNvSpPr txBox="1"/>
+          <p:nvPr/>
+        </p:nvSpPr>
+        <p:spPr>
+          <a:xfrm>
+            <a:off x="457200" y="1371600"/>
+            <a:ext cx="7772400" cy="4572000"/>
+          </a:xfrm>
+          <a:prstGeom prst="rect">
+            <a:avLst/>
+          </a:prstGeom>
+          <a:noFill/>
+        </p:spPr>
+        <p:txBody>
+          <a:bodyPr wrap="square">
+            <a:spAutoFit/>
+          </a:bodyPr>
+          <a:lstStyle/>
+          <a:p>
+            <a:pPr>
+              <a:spcAft>
+                <a:spcPts val="600"/>
+              </a:spcAft>
+              <a:defRPr sz="1400">
+                <a:solidFill>
+                  <a:srgbClr val="222222"/>
+                </a:solidFill>
+              </a:defRPr>
+            </a:pPr>
+            <a:r>
+              <a:t>• Introduction — Panorama des services Internet pour la recherche</a:t>
+            </a:r>
+          </a:p>
+          <a:p>
+            <a:pPr>
+              <a:spcAft>
+                <a:spcPts val="600"/>
+              </a:spcAft>
+              <a:defRPr sz="1400">
+                <a:solidFill>
+                  <a:srgbClr val="222222"/>
+                </a:solidFill>
+              </a:defRPr>
+            </a:pPr>
+            <a:r>
+              <a:t>• Identité numérique du chercheur : ORCID, IdHAL</a:t>
+            </a:r>
+          </a:p>
+          <a:p>
+            <a:pPr>
+              <a:spcAft>
+                <a:spcPts val="600"/>
+              </a:spcAft>
+              <a:defRPr sz="1400">
+                <a:solidFill>
+                  <a:srgbClr val="222222"/>
+                </a:solidFill>
+              </a:defRPr>
+            </a:pPr>
+            <a:r>
+              <a:t>• Google Scholar avancé et Google Alerts</a:t>
+            </a:r>
+          </a:p>
+          <a:p>
+            <a:pPr>
+              <a:spcAft>
+                <a:spcPts val="600"/>
+              </a:spcAft>
+              <a:defRPr sz="1400">
+                <a:solidFill>
+                  <a:srgbClr val="222222"/>
+                </a:solidFill>
+              </a:defRPr>
+            </a:pPr>
+            <a:r>
+              <a:t>• HAL : dépôt et consultation</a:t>
+            </a:r>
+          </a:p>
+          <a:p>
+            <a:pPr>
+              <a:spcAft>
+                <a:spcPts val="600"/>
+              </a:spcAft>
+              <a:defRPr sz="1400">
+                <a:solidFill>
+                  <a:srgbClr val="222222"/>
+                </a:solidFill>
+              </a:defRPr>
+            </a:pPr>
+            <a:r>
+              <a:t>• Zotero : gestion bibliographique collaborative</a:t>
+            </a:r>
+          </a:p>
+          <a:p>
+            <a:pPr>
+              <a:spcAft>
+                <a:spcPts val="600"/>
+              </a:spcAft>
+              <a:defRPr sz="1400">
+                <a:solidFill>
+                  <a:srgbClr val="222222"/>
+                </a:solidFill>
+              </a:defRPr>
+            </a:pPr>
+            <a:r>
+              <a:t>• Overleaf et rédaction académique collaborative</a:t>
+            </a:r>
+          </a:p>
+          <a:p>
+            <a:pPr>
+              <a:spcAft>
+                <a:spcPts val="600"/>
+              </a:spcAft>
+              <a:defRPr sz="1400">
+                <a:solidFill>
+                  <a:srgbClr val="222222"/>
+                </a:solidFill>
+              </a:defRPr>
+            </a:pPr>
+            <a:r>
+              <a:t>• Research Data Management (RDM)</a:t>
+            </a:r>
+          </a:p>
+          <a:p>
+            <a:pPr>
+              <a:spcAft>
+                <a:spcPts val="600"/>
+              </a:spcAft>
+              <a:defRPr sz="1400">
+                <a:solidFill>
+                  <a:srgbClr val="222222"/>
+                </a:solidFill>
+              </a:defRPr>
+            </a:pPr>
+            <a:r>
+              <a:t>• Open Science et Science Ouverte</a:t>
+            </a:r>
+          </a:p>
+          <a:p>
+            <a:pPr>
+              <a:spcAft>
+                <a:spcPts val="600"/>
+              </a:spcAft>
+              <a:defRPr sz="1400">
+                <a:solidFill>
+                  <a:srgbClr val="222222"/>
+                </a:solidFill>
+              </a:defRPr>
+            </a:pPr>
+            <a:r>
+              <a:t>• Veille et flux RSS académiques</a:t>
+            </a:r>
+          </a:p>
+          <a:p>
+            <a:pPr>
+              <a:spcAft>
+                <a:spcPts val="600"/>
+              </a:spcAft>
+              <a:defRPr sz="1400">
+                <a:solidFill>
+                  <a:srgbClr val="222222"/>
+                </a:solidFill>
+              </a:defRPr>
+            </a:pPr>
+            <a:r>
+              <a:t>• Synthèse module TIC 01–10</a:t>
             </a:r>
           </a:p>
         </p:txBody>
@@ -3651,15 +3497,20 @@
   <p:clrMapOvr>
     <a:masterClrMapping/>
   </p:clrMapOvr>
-  <p:transition spd="med">
-    <p:fade/>
-  </p:transition>
 </p:sld>
 </file>
 
-<file path=ppt/slides/slide2.xml><?xml version="1.0" encoding="utf-8"?>
+<file path=ppt/slides/slide11.xml><?xml version="1.0" encoding="utf-8"?>
 <p:sld xmlns:a="http://schemas.openxmlformats.org/drawingml/2006/main" xmlns:p="http://schemas.openxmlformats.org/presentationml/2006/main" xmlns:r="http://schemas.openxmlformats.org/officeDocument/2006/relationships">
   <p:cSld>
+    <p:bg>
+      <p:bgPr>
+        <a:solidFill>
+          <a:srgbClr val="FFFFFF"/>
+        </a:solidFill>
+        <a:effectLst/>
+      </p:bgPr>
+    </p:bg>
     <p:spTree>
       <p:nvGrpSpPr>
         <p:cNvPr id="1" name=""/>
@@ -3669,83 +3520,57 @@
       <p:grpSpPr/>
       <p:sp>
         <p:nvSpPr>
-          <p:cNvPr id="2" name="Title 1"/>
-          <p:cNvSpPr>
-            <a:spLocks noGrp="1"/>
-          </p:cNvSpPr>
-          <p:nvPr>
-            <p:ph type="title"/>
-          </p:nvPr>
-        </p:nvSpPr>
-        <p:spPr/>
-        <p:txBody>
-          <a:bodyPr/>
-          <a:lstStyle/>
-          <a:p>
-            <a:r>
-              <a:t>Objectifs pédagogiques</a:t>
-            </a:r>
-          </a:p>
-        </p:txBody>
-      </p:sp>
-      <p:sp>
-        <p:nvSpPr>
-          <p:cNvPr id="3" name="Content Placeholder 2"/>
-          <p:cNvSpPr>
-            <a:spLocks noGrp="1"/>
-          </p:cNvSpPr>
-          <p:nvPr>
-            <p:ph idx="1"/>
-          </p:nvPr>
-        </p:nvSpPr>
-        <p:spPr/>
-        <p:txBody>
-          <a:bodyPr/>
-          <a:lstStyle/>
-          <a:p>
-            <a:pPr>
-              <a:defRPr sz="2000"/>
-            </a:pPr>
-            <a:r>
-              <a:t>🎯 Maîtriser les notions du chapitre</a:t>
-            </a:r>
-          </a:p>
-          <a:p>
-            <a:pPr>
-              <a:defRPr sz="2000"/>
-            </a:pPr>
-            <a:r>
-              <a:t>🎯 Atelier poste informatique</a:t>
-            </a:r>
-          </a:p>
-          <a:p>
-            <a:pPr>
-              <a:defRPr sz="2000"/>
-            </a:pPr>
-            <a:r>
-              <a:t>🎯 Préparation TD et évaluation</a:t>
-            </a:r>
-          </a:p>
-          <a:p>
-            <a:pPr>
-              <a:defRPr sz="2000"/>
-            </a:pPr>
-            <a:r>
-              <a:t>🎯 Contexte Licence Langues</a:t>
-            </a:r>
-          </a:p>
-        </p:txBody>
-      </p:sp>
-      <p:sp>
-        <p:nvSpPr>
-          <p:cNvPr id="4" name="TextBox 3"/>
+          <p:cNvPr id="2" name="Rectangle 1"/>
+          <p:cNvSpPr/>
+          <p:nvPr/>
+        </p:nvSpPr>
+        <p:spPr>
+          <a:xfrm>
+            <a:off x="0" y="0"/>
+            <a:ext cx="109728" cy="6858000"/>
+          </a:xfrm>
+          <a:prstGeom prst="rect">
+            <a:avLst/>
+          </a:prstGeom>
+          <a:solidFill>
+            <a:srgbClr val="2C6E49"/>
+          </a:solidFill>
+          <a:ln>
+            <a:noFill/>
+          </a:ln>
+        </p:spPr>
+        <p:style>
+          <a:lnRef idx="1">
+            <a:schemeClr val="accent1"/>
+          </a:lnRef>
+          <a:fillRef idx="3">
+            <a:schemeClr val="accent1"/>
+          </a:fillRef>
+          <a:effectRef idx="2">
+            <a:schemeClr val="accent1"/>
+          </a:effectRef>
+          <a:fontRef idx="minor">
+            <a:schemeClr val="lt1"/>
+          </a:fontRef>
+        </p:style>
+        <p:txBody>
+          <a:bodyPr rtlCol="0" anchor="ctr"/>
+          <a:lstStyle/>
+          <a:p>
+            <a:pPr algn="ctr"/>
+          </a:p>
+        </p:txBody>
+      </p:sp>
+      <p:sp>
+        <p:nvSpPr>
+          <p:cNvPr id="3" name="TextBox 2"/>
           <p:cNvSpPr txBox="1"/>
           <p:nvPr/>
         </p:nvSpPr>
         <p:spPr>
           <a:xfrm>
-            <a:off x="365760" y="6446520"/>
-            <a:ext cx="8412480" cy="320040"/>
+            <a:off x="457200" y="365760"/>
+            <a:ext cx="8229600" cy="640080"/>
           </a:xfrm>
           <a:prstGeom prst="rect">
             <a:avLst/>
@@ -3753,20 +3578,96 @@
           <a:noFill/>
         </p:spPr>
         <p:txBody>
-          <a:bodyPr wrap="none">
+          <a:bodyPr wrap="square">
             <a:spAutoFit/>
           </a:bodyPr>
           <a:lstStyle/>
           <a:p>
-            <a:pPr algn="ctr">
-              <a:defRPr sz="900">
-                <a:solidFill>
-                  <a:srgbClr val="404040"/>
-                </a:solidFill>
-              </a:defRPr>
-            </a:pPr>
-            <a:r>
-              <a:t>Cours TIC 10  •  Diapositive 2/10</a:t>
+            <a:pPr algn="l">
+              <a:defRPr sz="2200" b="1">
+                <a:solidFill>
+                  <a:srgbClr val="1A5C33"/>
+                </a:solidFill>
+              </a:defRPr>
+            </a:pPr>
+            <a:r>
+              <a:t>Introduction — Panorama des services Internet pour la recherche(10 min)</a:t>
+            </a:r>
+          </a:p>
+        </p:txBody>
+      </p:sp>
+      <p:sp>
+        <p:nvSpPr>
+          <p:cNvPr id="4" name="TextBox 3"/>
+          <p:cNvSpPr txBox="1"/>
+          <p:nvPr/>
+        </p:nvSpPr>
+        <p:spPr>
+          <a:xfrm>
+            <a:off x="457200" y="1371600"/>
+            <a:ext cx="7772400" cy="4572000"/>
+          </a:xfrm>
+          <a:prstGeom prst="rect">
+            <a:avLst/>
+          </a:prstGeom>
+          <a:noFill/>
+        </p:spPr>
+        <p:txBody>
+          <a:bodyPr wrap="square">
+            <a:spAutoFit/>
+          </a:bodyPr>
+          <a:lstStyle/>
+          <a:p>
+            <a:pPr>
+              <a:spcAft>
+                <a:spcPts val="600"/>
+              </a:spcAft>
+              <a:defRPr sz="1400">
+                <a:solidFill>
+                  <a:srgbClr val="222222"/>
+                </a:solidFill>
+              </a:defRPr>
+            </a:pPr>
+            <a:r>
+              <a:t>• Ce dernier cours du module TIC synthétise l'ensemble des apprentissages en les orientant vers lespratiques concrètes de recherche en Master. Les services Internet ne sont plus seulement des outils quotidiens (courriel, stockage) : ils deviennent desinstruments de production scientifique.</a:t>
+            </a:r>
+          </a:p>
+          <a:p>
+            <a:pPr>
+              <a:spcAft>
+                <a:spcPts val="600"/>
+              </a:spcAft>
+              <a:defRPr sz="1400">
+                <a:solidFill>
+                  <a:srgbClr val="222222"/>
+                </a:solidFill>
+              </a:defRPr>
+            </a:pPr>
+            <a:r>
+              <a:t>• Les trois piliers du chercheur numérique :1.Identité: qui êtes-vous scientifiquement ? (ORCID, Google Scholar, HAL)</a:t>
+            </a:r>
+            <a:br/>
+            <a:r>
+              <a:t>2.Instruments: quels outils pour lire, écrire, publier ? (Zotero, Overleaf, HAL)</a:t>
+            </a:r>
+            <a:br/>
+            <a:r>
+              <a:t>3.Impact: comment diffuser et mesurer votre recherche ? (Open Access, citations, altmetrics)</a:t>
+            </a:r>
+          </a:p>
+          <a:p>
+            <a:pPr>
+              <a:spcAft>
+                <a:spcPts val="600"/>
+              </a:spcAft>
+              <a:defRPr sz="1400">
+                <a:solidFill>
+                  <a:srgbClr val="222222"/>
+                </a:solidFill>
+              </a:defRPr>
+            </a:pPr>
+            <a:r>
+              <a:t>• Contexte algérien: la généralisation des plateformes académiques (HAL Mostaganem, SJD) et l'obligation de dépôt des mémoires de Master dans les bibliothèques numériques institutionnelles imposent une maîtrise minimale de ces outils.</a:t>
             </a:r>
           </a:p>
         </p:txBody>
@@ -3776,15 +3677,20 @@
   <p:clrMapOvr>
     <a:masterClrMapping/>
   </p:clrMapOvr>
-  <p:transition spd="med">
-    <p:fade/>
-  </p:transition>
 </p:sld>
 </file>
 
-<file path=ppt/slides/slide3.xml><?xml version="1.0" encoding="utf-8"?>
+<file path=ppt/slides/slide12.xml><?xml version="1.0" encoding="utf-8"?>
 <p:sld xmlns:a="http://schemas.openxmlformats.org/drawingml/2006/main" xmlns:p="http://schemas.openxmlformats.org/presentationml/2006/main" xmlns:r="http://schemas.openxmlformats.org/officeDocument/2006/relationships">
   <p:cSld>
+    <p:bg>
+      <p:bgPr>
+        <a:solidFill>
+          <a:srgbClr val="FFFFFF"/>
+        </a:solidFill>
+        <a:effectLst/>
+      </p:bgPr>
+    </p:bg>
     <p:spTree>
       <p:nvGrpSpPr>
         <p:cNvPr id="1" name=""/>
@@ -3794,83 +3700,57 @@
       <p:grpSpPr/>
       <p:sp>
         <p:nvSpPr>
-          <p:cNvPr id="2" name="Title 1"/>
-          <p:cNvSpPr>
-            <a:spLocks noGrp="1"/>
-          </p:cNvSpPr>
-          <p:nvPr>
-            <p:ph type="title"/>
-          </p:nvPr>
-        </p:nvSpPr>
-        <p:spPr/>
-        <p:txBody>
-          <a:bodyPr/>
-          <a:lstStyle/>
-          <a:p>
-            <a:r>
-              <a:t>Plan du cours (1h30)</a:t>
-            </a:r>
-          </a:p>
-        </p:txBody>
-      </p:sp>
-      <p:sp>
-        <p:nvSpPr>
-          <p:cNvPr id="3" name="Content Placeholder 2"/>
-          <p:cNvSpPr>
-            <a:spLocks noGrp="1"/>
-          </p:cNvSpPr>
-          <p:nvPr>
-            <p:ph idx="1"/>
-          </p:nvPr>
-        </p:nvSpPr>
-        <p:spPr/>
-        <p:txBody>
-          <a:bodyPr/>
-          <a:lstStyle/>
-          <a:p>
-            <a:pPr>
-              <a:defRPr sz="2000"/>
-            </a:pPr>
-            <a:r>
-              <a:t>📋 8 parties — 90 min</a:t>
-            </a:r>
-          </a:p>
-          <a:p>
-            <a:pPr>
-              <a:defRPr sz="2000"/>
-            </a:pPr>
-            <a:r>
-              <a:t>📋 Panorama des services Internet</a:t>
-            </a:r>
-          </a:p>
-          <a:p>
-            <a:pPr>
-              <a:defRPr sz="2000"/>
-            </a:pPr>
-            <a:r>
-              <a:t>📋 Moteurs et métamoteurs de recherche</a:t>
-            </a:r>
-          </a:p>
-          <a:p>
-            <a:pPr>
-              <a:defRPr sz="2000"/>
-            </a:pPr>
-            <a:r>
-              <a:t>📋 Messagerie électronique (SMTP, POP, IMAP)</a:t>
-            </a:r>
-          </a:p>
-        </p:txBody>
-      </p:sp>
-      <p:sp>
-        <p:nvSpPr>
-          <p:cNvPr id="4" name="TextBox 3"/>
+          <p:cNvPr id="2" name="Rectangle 1"/>
+          <p:cNvSpPr/>
+          <p:nvPr/>
+        </p:nvSpPr>
+        <p:spPr>
+          <a:xfrm>
+            <a:off x="0" y="0"/>
+            <a:ext cx="109728" cy="6858000"/>
+          </a:xfrm>
+          <a:prstGeom prst="rect">
+            <a:avLst/>
+          </a:prstGeom>
+          <a:solidFill>
+            <a:srgbClr val="2C6E49"/>
+          </a:solidFill>
+          <a:ln>
+            <a:noFill/>
+          </a:ln>
+        </p:spPr>
+        <p:style>
+          <a:lnRef idx="1">
+            <a:schemeClr val="accent1"/>
+          </a:lnRef>
+          <a:fillRef idx="3">
+            <a:schemeClr val="accent1"/>
+          </a:fillRef>
+          <a:effectRef idx="2">
+            <a:schemeClr val="accent1"/>
+          </a:effectRef>
+          <a:fontRef idx="minor">
+            <a:schemeClr val="lt1"/>
+          </a:fontRef>
+        </p:style>
+        <p:txBody>
+          <a:bodyPr rtlCol="0" anchor="ctr"/>
+          <a:lstStyle/>
+          <a:p>
+            <a:pPr algn="ctr"/>
+          </a:p>
+        </p:txBody>
+      </p:sp>
+      <p:sp>
+        <p:nvSpPr>
+          <p:cNvPr id="3" name="TextBox 2"/>
           <p:cNvSpPr txBox="1"/>
           <p:nvPr/>
         </p:nvSpPr>
         <p:spPr>
           <a:xfrm>
-            <a:off x="365760" y="6446520"/>
-            <a:ext cx="8412480" cy="320040"/>
+            <a:off x="457200" y="365760"/>
+            <a:ext cx="8229600" cy="640080"/>
           </a:xfrm>
           <a:prstGeom prst="rect">
             <a:avLst/>
@@ -3878,20 +3758,156 @@
           <a:noFill/>
         </p:spPr>
         <p:txBody>
-          <a:bodyPr wrap="none">
+          <a:bodyPr wrap="square">
             <a:spAutoFit/>
           </a:bodyPr>
           <a:lstStyle/>
           <a:p>
-            <a:pPr algn="ctr">
-              <a:defRPr sz="900">
-                <a:solidFill>
-                  <a:srgbClr val="404040"/>
-                </a:solidFill>
-              </a:defRPr>
-            </a:pPr>
-            <a:r>
-              <a:t>Cours TIC 10  •  Diapositive 3/10</a:t>
+            <a:pPr algn="l">
+              <a:defRPr sz="2200" b="1">
+                <a:solidFill>
+                  <a:srgbClr val="1A5C33"/>
+                </a:solidFill>
+              </a:defRPr>
+            </a:pPr>
+            <a:r>
+              <a:t>Identité numérique du chercheur : ORCID, IdHAL(10 min)</a:t>
+            </a:r>
+          </a:p>
+        </p:txBody>
+      </p:sp>
+      <p:sp>
+        <p:nvSpPr>
+          <p:cNvPr id="4" name="TextBox 3"/>
+          <p:cNvSpPr txBox="1"/>
+          <p:nvPr/>
+        </p:nvSpPr>
+        <p:spPr>
+          <a:xfrm>
+            <a:off x="457200" y="1371600"/>
+            <a:ext cx="7772400" cy="4572000"/>
+          </a:xfrm>
+          <a:prstGeom prst="rect">
+            <a:avLst/>
+          </a:prstGeom>
+          <a:noFill/>
+        </p:spPr>
+        <p:txBody>
+          <a:bodyPr wrap="square">
+            <a:spAutoFit/>
+          </a:bodyPr>
+          <a:lstStyle/>
+          <a:p>
+            <a:pPr>
+              <a:spcAft>
+                <a:spcPts val="600"/>
+              </a:spcAft>
+              <a:defRPr sz="1400">
+                <a:solidFill>
+                  <a:srgbClr val="222222"/>
+                </a:solidFill>
+              </a:defRPr>
+            </a:pPr>
+            <a:r>
+              <a:t>• ORCID(Open Researcher and Contributor ID) —orcid.org</a:t>
+            </a:r>
+          </a:p>
+          <a:p>
+            <a:pPr>
+              <a:spcAft>
+                <a:spcPts val="600"/>
+              </a:spcAft>
+              <a:defRPr sz="1400">
+                <a:solidFill>
+                  <a:srgbClr val="222222"/>
+                </a:solidFill>
+              </a:defRPr>
+            </a:pPr>
+            <a:r>
+              <a:t>• Identifiant unique et pérenne (16 chiffres) pour chaque chercheur</a:t>
+            </a:r>
+          </a:p>
+          <a:p>
+            <a:pPr>
+              <a:spcAft>
+                <a:spcPts val="600"/>
+              </a:spcAft>
+              <a:defRPr sz="1400">
+                <a:solidFill>
+                  <a:srgbClr val="222222"/>
+                </a:solidFill>
+              </a:defRPr>
+            </a:pPr>
+            <a:r>
+              <a:t>• Obligatoire dans la plupart des revues et appels d'offres internationaux</a:t>
+            </a:r>
+          </a:p>
+          <a:p>
+            <a:pPr>
+              <a:spcAft>
+                <a:spcPts val="600"/>
+              </a:spcAft>
+              <a:defRPr sz="1400">
+                <a:solidFill>
+                  <a:srgbClr val="222222"/>
+                </a:solidFill>
+              </a:defRPr>
+            </a:pPr>
+            <a:r>
+              <a:t>• Synchronisation avec HAL, Crossref, Scopus, WoS</a:t>
+            </a:r>
+          </a:p>
+          <a:p>
+            <a:pPr>
+              <a:spcAft>
+                <a:spcPts val="600"/>
+              </a:spcAft>
+              <a:defRPr sz="1400">
+                <a:solidFill>
+                  <a:srgbClr val="222222"/>
+                </a:solidFill>
+              </a:defRPr>
+            </a:pPr>
+            <a:r>
+              <a:t>• Configuration :1. Créer un compte ORCID (gratuit)</a:t>
+            </a:r>
+            <a:br/>
+            <a:r>
+              <a:t>2. Renseigner : affiliation, publications, formation</a:t>
+            </a:r>
+            <a:br/>
+            <a:r>
+              <a:t>3. Connecter à HAL (IdHAL) et Google Scholar</a:t>
+            </a:r>
+          </a:p>
+          <a:p>
+            <a:pPr>
+              <a:spcAft>
+                <a:spcPts val="600"/>
+              </a:spcAft>
+              <a:defRPr sz="1400">
+                <a:solidFill>
+                  <a:srgbClr val="222222"/>
+                </a:solidFill>
+              </a:defRPr>
+            </a:pPr>
+            <a:r>
+              <a:t>• IdHAL: identifiant dédié à la plateforme HAL. Format :prenom-nom. Permet de regrouper toutes vos productions.</a:t>
+            </a:r>
+          </a:p>
+          <a:p>
+            <a:pPr>
+              <a:spcAft>
+                <a:spcPts val="600"/>
+              </a:spcAft>
+              <a:defRPr sz="1400">
+                <a:solidFill>
+                  <a:srgbClr val="222222"/>
+                </a:solidFill>
+              </a:defRPr>
+            </a:pPr>
+            <a:r>
+              <a:t>• Pourquoi en Master ?Publier un mémoire ou un article de synthèse = attribution d'un ORCID dès le Master. C'est une pratique de plus en plus courante (recommandée par le MESRS algérien).</a:t>
             </a:r>
           </a:p>
         </p:txBody>
@@ -3901,15 +3917,20 @@
   <p:clrMapOvr>
     <a:masterClrMapping/>
   </p:clrMapOvr>
-  <p:transition spd="med">
-    <p:fade/>
-  </p:transition>
 </p:sld>
 </file>
 
-<file path=ppt/slides/slide4.xml><?xml version="1.0" encoding="utf-8"?>
+<file path=ppt/slides/slide13.xml><?xml version="1.0" encoding="utf-8"?>
 <p:sld xmlns:a="http://schemas.openxmlformats.org/drawingml/2006/main" xmlns:p="http://schemas.openxmlformats.org/presentationml/2006/main" xmlns:r="http://schemas.openxmlformats.org/officeDocument/2006/relationships">
   <p:cSld>
+    <p:bg>
+      <p:bgPr>
+        <a:solidFill>
+          <a:srgbClr val="E8F0E9"/>
+        </a:solidFill>
+        <a:effectLst/>
+      </p:bgPr>
+    </p:bg>
     <p:spTree>
       <p:nvGrpSpPr>
         <p:cNvPr id="1" name=""/>
@@ -3919,83 +3940,14 @@
       <p:grpSpPr/>
       <p:sp>
         <p:nvSpPr>
-          <p:cNvPr id="2" name="Title 1"/>
-          <p:cNvSpPr>
-            <a:spLocks noGrp="1"/>
-          </p:cNvSpPr>
-          <p:nvPr>
-            <p:ph type="title"/>
-          </p:nvPr>
-        </p:nvSpPr>
-        <p:spPr/>
-        <p:txBody>
-          <a:bodyPr/>
-          <a:lstStyle/>
-          <a:p>
-            <a:r>
-              <a:t>Panorama des services Internet</a:t>
-            </a:r>
-          </a:p>
-        </p:txBody>
-      </p:sp>
-      <p:sp>
-        <p:nvSpPr>
-          <p:cNvPr id="3" name="Content Placeholder 2"/>
-          <p:cNvSpPr>
-            <a:spLocks noGrp="1"/>
-          </p:cNvSpPr>
-          <p:nvPr>
-            <p:ph idx="1"/>
-          </p:nvPr>
-        </p:nvSpPr>
-        <p:spPr/>
-        <p:txBody>
-          <a:bodyPr/>
-          <a:lstStyle/>
-          <a:p>
-            <a:pPr>
-              <a:defRPr sz="2000"/>
-            </a:pPr>
-            <a:r>
-              <a:t>💡 Points clés polycopié</a:t>
-            </a:r>
-          </a:p>
-          <a:p>
-            <a:pPr>
-              <a:defRPr sz="2000"/>
-            </a:pPr>
-            <a:r>
-              <a:t>💡 Exemples universitaires</a:t>
-            </a:r>
-          </a:p>
-          <a:p>
-            <a:pPr>
-              <a:defRPr sz="2000"/>
-            </a:pPr>
-            <a:r>
-              <a:t>💡 Démonstration guidée</a:t>
-            </a:r>
-          </a:p>
-          <a:p>
-            <a:pPr>
-              <a:defRPr sz="2000"/>
-            </a:pPr>
-            <a:r>
-              <a:t>💡 Questions</a:t>
-            </a:r>
-          </a:p>
-        </p:txBody>
-      </p:sp>
-      <p:sp>
-        <p:nvSpPr>
-          <p:cNvPr id="4" name="TextBox 3"/>
+          <p:cNvPr id="2" name="TextBox 1"/>
           <p:cNvSpPr txBox="1"/>
           <p:nvPr/>
         </p:nvSpPr>
         <p:spPr>
           <a:xfrm>
-            <a:off x="365760" y="6446520"/>
-            <a:ext cx="8412480" cy="320040"/>
+            <a:off x="548640" y="365760"/>
+            <a:ext cx="7772400" cy="640080"/>
           </a:xfrm>
           <a:prstGeom prst="rect">
             <a:avLst/>
@@ -4003,20 +3955,126 @@
           <a:noFill/>
         </p:spPr>
         <p:txBody>
-          <a:bodyPr wrap="none">
+          <a:bodyPr wrap="square">
             <a:spAutoFit/>
           </a:bodyPr>
           <a:lstStyle/>
           <a:p>
             <a:pPr algn="ctr">
-              <a:defRPr sz="900">
-                <a:solidFill>
-                  <a:srgbClr val="404040"/>
-                </a:solidFill>
-              </a:defRPr>
-            </a:pPr>
-            <a:r>
-              <a:t>Cours TIC 10  •  Diapositive 4/10</a:t>
+              <a:defRPr sz="2600" b="1">
+                <a:solidFill>
+                  <a:srgbClr val="1A5C33"/>
+                </a:solidFill>
+              </a:defRPr>
+            </a:pPr>
+            <a:r>
+              <a:t>📝 Points clés à retenir</a:t>
+            </a:r>
+          </a:p>
+        </p:txBody>
+      </p:sp>
+      <p:sp>
+        <p:nvSpPr>
+          <p:cNvPr id="3" name="TextBox 2"/>
+          <p:cNvSpPr txBox="1"/>
+          <p:nvPr/>
+        </p:nvSpPr>
+        <p:spPr>
+          <a:xfrm>
+            <a:off x="548640" y="1828800"/>
+            <a:ext cx="7772400" cy="4572000"/>
+          </a:xfrm>
+          <a:prstGeom prst="rect">
+            <a:avLst/>
+          </a:prstGeom>
+          <a:noFill/>
+        </p:spPr>
+        <p:txBody>
+          <a:bodyPr wrap="square">
+            <a:spAutoFit/>
+          </a:bodyPr>
+          <a:lstStyle/>
+          <a:p>
+            <a:pPr>
+              <a:spcAft>
+                <a:spcPts val="600"/>
+              </a:spcAft>
+              <a:defRPr sz="1600">
+                <a:solidFill>
+                  <a:srgbClr val="222222"/>
+                </a:solidFill>
+              </a:defRPr>
+            </a:pPr>
+            <a:r>
+              <a:t>• Référentiel :titres et structure alignés sur Canvas Univ-Mosta (elearning.univ-usto.dz) ; bonnes pratiques benchmark 10 universités algériennes (voirBENCHMARK_10_UNIVERSITES_ELEARNING.md).</a:t>
+            </a:r>
+          </a:p>
+          <a:p>
+            <a:pPr>
+              <a:spcAft>
+                <a:spcPts val="600"/>
+              </a:spcAft>
+              <a:defRPr sz="1600">
+                <a:solidFill>
+                  <a:srgbClr val="222222"/>
+                </a:solidFill>
+              </a:defRPr>
+            </a:pPr>
+            <a:r>
+              <a:t>• En termes de savoir :- Identifier les services Internet essentiels à la recherche académique (HAL, ORCID, Zotero, Google Scholar)</a:t>
+            </a:r>
+            <a:br/>
+            <a:r>
+              <a:t>- Expliquer le mouvement Open Science et ses implications pour le chercheur</a:t>
+            </a:r>
+            <a:br/>
+            <a:r>
+              <a:t>- Distinguer les outils de gestion bibliographique et leurs protocoles</a:t>
+            </a:r>
+          </a:p>
+          <a:p>
+            <a:pPr>
+              <a:spcAft>
+                <a:spcPts val="600"/>
+              </a:spcAft>
+              <a:defRPr sz="1600">
+                <a:solidFill>
+                  <a:srgbClr val="222222"/>
+                </a:solidFill>
+              </a:defRPr>
+            </a:pPr>
+            <a:r>
+              <a:t>• Création d'un compte ORCID + dépôt d'un document fictif sur HAL</a:t>
+            </a:r>
+          </a:p>
+          <a:p>
+            <a:pPr>
+              <a:spcAft>
+                <a:spcPts val="600"/>
+              </a:spcAft>
+              <a:defRPr sz="1600">
+                <a:solidFill>
+                  <a:srgbClr val="222222"/>
+                </a:solidFill>
+              </a:defRPr>
+            </a:pPr>
+            <a:r>
+              <a:t>• Portfolio : profil ORCID, groupe Zotero partagé, document Overleaf exporté</a:t>
+            </a:r>
+          </a:p>
+          <a:p>
+            <a:pPr>
+              <a:spcAft>
+                <a:spcPts val="600"/>
+              </a:spcAft>
+              <a:defRPr sz="1600">
+                <a:solidFill>
+                  <a:srgbClr val="222222"/>
+                </a:solidFill>
+              </a:defRPr>
+            </a:pPr>
+            <a:r>
+              <a:t>• DigComp 2.2 (Union Européenne, 2022) — cadre de compétences numériques</a:t>
             </a:r>
           </a:p>
         </p:txBody>
@@ -4026,15 +4084,20 @@
   <p:clrMapOvr>
     <a:masterClrMapping/>
   </p:clrMapOvr>
-  <p:transition spd="med">
-    <p:fade/>
-  </p:transition>
 </p:sld>
 </file>
 
-<file path=ppt/slides/slide5.xml><?xml version="1.0" encoding="utf-8"?>
+<file path=ppt/slides/slide14.xml><?xml version="1.0" encoding="utf-8"?>
 <p:sld xmlns:a="http://schemas.openxmlformats.org/drawingml/2006/main" xmlns:p="http://schemas.openxmlformats.org/presentationml/2006/main" xmlns:r="http://schemas.openxmlformats.org/officeDocument/2006/relationships">
   <p:cSld>
+    <p:bg>
+      <p:bgPr>
+        <a:solidFill>
+          <a:srgbClr val="FFFFFF"/>
+        </a:solidFill>
+        <a:effectLst/>
+      </p:bgPr>
+    </p:bg>
     <p:spTree>
       <p:nvGrpSpPr>
         <p:cNvPr id="1" name=""/>
@@ -4044,83 +4107,14 @@
       <p:grpSpPr/>
       <p:sp>
         <p:nvSpPr>
-          <p:cNvPr id="2" name="Title 1"/>
-          <p:cNvSpPr>
-            <a:spLocks noGrp="1"/>
-          </p:cNvSpPr>
-          <p:nvPr>
-            <p:ph type="title"/>
-          </p:nvPr>
-        </p:nvSpPr>
-        <p:spPr/>
-        <p:txBody>
-          <a:bodyPr/>
-          <a:lstStyle/>
-          <a:p>
-            <a:r>
-              <a:t>Moteurs et métamoteurs de recherche</a:t>
-            </a:r>
-          </a:p>
-        </p:txBody>
-      </p:sp>
-      <p:sp>
-        <p:nvSpPr>
-          <p:cNvPr id="3" name="Content Placeholder 2"/>
-          <p:cNvSpPr>
-            <a:spLocks noGrp="1"/>
-          </p:cNvSpPr>
-          <p:nvPr>
-            <p:ph idx="1"/>
-          </p:nvPr>
-        </p:nvSpPr>
-        <p:spPr/>
-        <p:txBody>
-          <a:bodyPr/>
-          <a:lstStyle/>
-          <a:p>
-            <a:pPr>
-              <a:defRPr sz="2000"/>
-            </a:pPr>
-            <a:r>
-              <a:t>📖 Points clés polycopié</a:t>
-            </a:r>
-          </a:p>
-          <a:p>
-            <a:pPr>
-              <a:defRPr sz="2000"/>
-            </a:pPr>
-            <a:r>
-              <a:t>📖 Exemples universitaires</a:t>
-            </a:r>
-          </a:p>
-          <a:p>
-            <a:pPr>
-              <a:defRPr sz="2000"/>
-            </a:pPr>
-            <a:r>
-              <a:t>📖 Démonstration guidée</a:t>
-            </a:r>
-          </a:p>
-          <a:p>
-            <a:pPr>
-              <a:defRPr sz="2000"/>
-            </a:pPr>
-            <a:r>
-              <a:t>📖 Questions</a:t>
-            </a:r>
-          </a:p>
-        </p:txBody>
-      </p:sp>
-      <p:sp>
-        <p:nvSpPr>
-          <p:cNvPr id="4" name="TextBox 3"/>
+          <p:cNvPr id="2" name="TextBox 1"/>
           <p:cNvSpPr txBox="1"/>
           <p:nvPr/>
         </p:nvSpPr>
         <p:spPr>
           <a:xfrm>
-            <a:off x="365760" y="6446520"/>
-            <a:ext cx="8412480" cy="320040"/>
+            <a:off x="548640" y="365760"/>
+            <a:ext cx="7772400" cy="640080"/>
           </a:xfrm>
           <a:prstGeom prst="rect">
             <a:avLst/>
@@ -4128,20 +4122,118 @@
           <a:noFill/>
         </p:spPr>
         <p:txBody>
-          <a:bodyPr wrap="none">
+          <a:bodyPr wrap="square">
             <a:spAutoFit/>
           </a:bodyPr>
           <a:lstStyle/>
           <a:p>
             <a:pPr algn="ctr">
-              <a:defRPr sz="900">
-                <a:solidFill>
-                  <a:srgbClr val="404040"/>
-                </a:solidFill>
-              </a:defRPr>
-            </a:pPr>
-            <a:r>
-              <a:t>Cours TIC 10  •  Diapositive 5/10</a:t>
+              <a:defRPr sz="2600" b="1">
+                <a:solidFill>
+                  <a:srgbClr val="1A5C33"/>
+                </a:solidFill>
+              </a:defRPr>
+            </a:pPr>
+            <a:r>
+              <a:t>✏️ Exercices d'application</a:t>
+            </a:r>
+          </a:p>
+        </p:txBody>
+      </p:sp>
+      <p:sp>
+        <p:nvSpPr>
+          <p:cNvPr id="3" name="TextBox 2"/>
+          <p:cNvSpPr txBox="1"/>
+          <p:nvPr/>
+        </p:nvSpPr>
+        <p:spPr>
+          <a:xfrm>
+            <a:off x="548640" y="1828800"/>
+            <a:ext cx="7772400" cy="4572000"/>
+          </a:xfrm>
+          <a:prstGeom prst="rect">
+            <a:avLst/>
+          </a:prstGeom>
+          <a:noFill/>
+        </p:spPr>
+        <p:txBody>
+          <a:bodyPr wrap="square">
+            <a:spAutoFit/>
+          </a:bodyPr>
+          <a:lstStyle/>
+          <a:p>
+            <a:pPr>
+              <a:spcAft>
+                <a:spcPts val="600"/>
+              </a:spcAft>
+              <a:defRPr sz="1500">
+                <a:solidFill>
+                  <a:srgbClr val="222222"/>
+                </a:solidFill>
+              </a:defRPr>
+            </a:pPr>
+            <a:r>
+              <a:t>• Définir les concepts principaux du cours</a:t>
+            </a:r>
+          </a:p>
+          <a:p>
+            <a:pPr>
+              <a:spcAft>
+                <a:spcPts val="600"/>
+              </a:spcAft>
+              <a:defRPr sz="1500">
+                <a:solidFill>
+                  <a:srgbClr val="222222"/>
+                </a:solidFill>
+              </a:defRPr>
+            </a:pPr>
+            <a:r>
+              <a:t>• Identifier les applications pratiques</a:t>
+            </a:r>
+          </a:p>
+          <a:p>
+            <a:pPr>
+              <a:spcAft>
+                <a:spcPts val="600"/>
+              </a:spcAft>
+              <a:defRPr sz="1500">
+                <a:solidFill>
+                  <a:srgbClr val="222222"/>
+                </a:solidFill>
+              </a:defRPr>
+            </a:pPr>
+            <a:r>
+              <a:t>• Résoudre les exercices du TD</a:t>
+            </a:r>
+          </a:p>
+          <a:p>
+            <a:pPr>
+              <a:spcAft>
+                <a:spcPts val="600"/>
+              </a:spcAft>
+              <a:defRPr sz="1500">
+                <a:solidFill>
+                  <a:srgbClr val="222222"/>
+                </a:solidFill>
+              </a:defRPr>
+            </a:pPr>
+            <a:r>
+              <a:t>• Synthétiser les points clés en un paragraphe</a:t>
+            </a:r>
+          </a:p>
+          <a:p>
+            <a:pPr>
+              <a:spcAft>
+                <a:spcPts val="600"/>
+              </a:spcAft>
+              <a:defRPr sz="1500">
+                <a:solidFill>
+                  <a:srgbClr val="222222"/>
+                </a:solidFill>
+              </a:defRPr>
+            </a:pPr>
+            <a:r>
+              <a:t>• Préparer une courte présentation orale</a:t>
             </a:r>
           </a:p>
         </p:txBody>
@@ -4151,15 +4243,20 @@
   <p:clrMapOvr>
     <a:masterClrMapping/>
   </p:clrMapOvr>
-  <p:transition spd="med">
-    <p:fade/>
-  </p:transition>
 </p:sld>
 </file>
 
-<file path=ppt/slides/slide6.xml><?xml version="1.0" encoding="utf-8"?>
+<file path=ppt/slides/slide15.xml><?xml version="1.0" encoding="utf-8"?>
 <p:sld xmlns:a="http://schemas.openxmlformats.org/drawingml/2006/main" xmlns:p="http://schemas.openxmlformats.org/presentationml/2006/main" xmlns:r="http://schemas.openxmlformats.org/officeDocument/2006/relationships">
   <p:cSld>
+    <p:bg>
+      <p:bgPr>
+        <a:solidFill>
+          <a:srgbClr val="1A5C33"/>
+        </a:solidFill>
+        <a:effectLst/>
+      </p:bgPr>
+    </p:bg>
     <p:spTree>
       <p:nvGrpSpPr>
         <p:cNvPr id="1" name=""/>
@@ -4169,83 +4266,14 @@
       <p:grpSpPr/>
       <p:sp>
         <p:nvSpPr>
-          <p:cNvPr id="2" name="Title 1"/>
-          <p:cNvSpPr>
-            <a:spLocks noGrp="1"/>
-          </p:cNvSpPr>
-          <p:nvPr>
-            <p:ph type="title"/>
-          </p:nvPr>
-        </p:nvSpPr>
-        <p:spPr/>
-        <p:txBody>
-          <a:bodyPr/>
-          <a:lstStyle/>
-          <a:p>
-            <a:r>
-              <a:t>Messagerie électronique (SMTP, POP, IMAP)</a:t>
-            </a:r>
-          </a:p>
-        </p:txBody>
-      </p:sp>
-      <p:sp>
-        <p:nvSpPr>
-          <p:cNvPr id="3" name="Content Placeholder 2"/>
-          <p:cNvSpPr>
-            <a:spLocks noGrp="1"/>
-          </p:cNvSpPr>
-          <p:nvPr>
-            <p:ph idx="1"/>
-          </p:nvPr>
-        </p:nvSpPr>
-        <p:spPr/>
-        <p:txBody>
-          <a:bodyPr/>
-          <a:lstStyle/>
-          <a:p>
-            <a:pPr>
-              <a:defRPr sz="2000"/>
-            </a:pPr>
-            <a:r>
-              <a:t>🌐 Points clés polycopié</a:t>
-            </a:r>
-          </a:p>
-          <a:p>
-            <a:pPr>
-              <a:defRPr sz="2000"/>
-            </a:pPr>
-            <a:r>
-              <a:t>🌐 Exemples universitaires</a:t>
-            </a:r>
-          </a:p>
-          <a:p>
-            <a:pPr>
-              <a:defRPr sz="2000"/>
-            </a:pPr>
-            <a:r>
-              <a:t>🌐 Démonstration guidée</a:t>
-            </a:r>
-          </a:p>
-          <a:p>
-            <a:pPr>
-              <a:defRPr sz="2000"/>
-            </a:pPr>
-            <a:r>
-              <a:t>🌐 Questions</a:t>
-            </a:r>
-          </a:p>
-        </p:txBody>
-      </p:sp>
-      <p:sp>
-        <p:nvSpPr>
-          <p:cNvPr id="4" name="TextBox 3"/>
+          <p:cNvPr id="2" name="TextBox 1"/>
           <p:cNvSpPr txBox="1"/>
           <p:nvPr/>
         </p:nvSpPr>
         <p:spPr>
           <a:xfrm>
-            <a:off x="365760" y="6446520"/>
-            <a:ext cx="8412480" cy="320040"/>
+            <a:off x="731520" y="1371600"/>
+            <a:ext cx="7680960" cy="914400"/>
           </a:xfrm>
           <a:prstGeom prst="rect">
             <a:avLst/>
@@ -4253,20 +4281,67 @@
           <a:noFill/>
         </p:spPr>
         <p:txBody>
-          <a:bodyPr wrap="none">
+          <a:bodyPr wrap="square">
             <a:spAutoFit/>
           </a:bodyPr>
           <a:lstStyle/>
           <a:p>
             <a:pPr algn="ctr">
-              <a:defRPr sz="900">
-                <a:solidFill>
-                  <a:srgbClr val="404040"/>
-                </a:solidFill>
-              </a:defRPr>
-            </a:pPr>
-            <a:r>
-              <a:t>Cours TIC 10  •  Diapositive 6/10</a:t>
+              <a:defRPr sz="2800" b="1">
+                <a:solidFill>
+                  <a:srgbClr val="FFFFFF"/>
+                </a:solidFill>
+              </a:defRPr>
+            </a:pPr>
+            <a:r>
+              <a:t>🎓 Conclusion</a:t>
+            </a:r>
+          </a:p>
+        </p:txBody>
+      </p:sp>
+      <p:sp>
+        <p:nvSpPr>
+          <p:cNvPr id="3" name="TextBox 2"/>
+          <p:cNvSpPr txBox="1"/>
+          <p:nvPr/>
+        </p:nvSpPr>
+        <p:spPr>
+          <a:xfrm>
+            <a:off x="731520" y="2743200"/>
+            <a:ext cx="7680960" cy="1828800"/>
+          </a:xfrm>
+          <a:prstGeom prst="rect">
+            <a:avLst/>
+          </a:prstGeom>
+          <a:noFill/>
+        </p:spPr>
+        <p:txBody>
+          <a:bodyPr wrap="square">
+            <a:spAutoFit/>
+          </a:bodyPr>
+          <a:lstStyle/>
+          <a:p>
+            <a:pPr algn="ctr">
+              <a:defRPr sz="1800" b="0">
+                <a:solidFill>
+                  <a:srgbClr val="C5D9C7"/>
+                </a:solidFill>
+              </a:defRPr>
+            </a:pPr>
+            <a:r>
+              <a:t>Dr. BELACEL Madani</a:t>
+            </a:r>
+            <a:br/>
+            <a:r>
+              <a:t>Maître de Conférences B</a:t>
+            </a:r>
+            <a:br/>
+            <a:r>
+              <a:t>Université de Mostaganem</a:t>
+            </a:r>
+            <a:br/>
+            <a:r>
+              <a:t>madani.belacel@univ-mosta.dz</a:t>
             </a:r>
           </a:p>
         </p:txBody>
@@ -4276,15 +4351,20 @@
   <p:clrMapOvr>
     <a:masterClrMapping/>
   </p:clrMapOvr>
-  <p:transition spd="med">
-    <p:fade/>
-  </p:transition>
 </p:sld>
 </file>
 
-<file path=ppt/slides/slide7.xml><?xml version="1.0" encoding="utf-8"?>
+<file path=ppt/slides/slide2.xml><?xml version="1.0" encoding="utf-8"?>
 <p:sld xmlns:a="http://schemas.openxmlformats.org/drawingml/2006/main" xmlns:p="http://schemas.openxmlformats.org/presentationml/2006/main" xmlns:r="http://schemas.openxmlformats.org/officeDocument/2006/relationships">
   <p:cSld>
+    <p:bg>
+      <p:bgPr>
+        <a:solidFill>
+          <a:srgbClr val="FFFFFF"/>
+        </a:solidFill>
+        <a:effectLst/>
+      </p:bgPr>
+    </p:bg>
     <p:spTree>
       <p:nvGrpSpPr>
         <p:cNvPr id="1" name=""/>
@@ -4294,83 +4374,14 @@
       <p:grpSpPr/>
       <p:sp>
         <p:nvSpPr>
-          <p:cNvPr id="2" name="Title 1"/>
-          <p:cNvSpPr>
-            <a:spLocks noGrp="1"/>
-          </p:cNvSpPr>
-          <p:nvPr>
-            <p:ph type="title"/>
-          </p:nvPr>
-        </p:nvSpPr>
-        <p:spPr/>
-        <p:txBody>
-          <a:bodyPr/>
-          <a:lstStyle/>
-          <a:p>
-            <a:r>
-              <a:t>Transfert de fichiers (Drive, Dropbox)</a:t>
-            </a:r>
-          </a:p>
-        </p:txBody>
-      </p:sp>
-      <p:sp>
-        <p:nvSpPr>
-          <p:cNvPr id="3" name="Content Placeholder 2"/>
-          <p:cNvSpPr>
-            <a:spLocks noGrp="1"/>
-          </p:cNvSpPr>
-          <p:nvPr>
-            <p:ph idx="1"/>
-          </p:nvPr>
-        </p:nvSpPr>
-        <p:spPr/>
-        <p:txBody>
-          <a:bodyPr/>
-          <a:lstStyle/>
-          <a:p>
-            <a:pPr>
-              <a:defRPr sz="2000"/>
-            </a:pPr>
-            <a:r>
-              <a:t>🔗 Points clés polycopié</a:t>
-            </a:r>
-          </a:p>
-          <a:p>
-            <a:pPr>
-              <a:defRPr sz="2000"/>
-            </a:pPr>
-            <a:r>
-              <a:t>🔗 Exemples universitaires</a:t>
-            </a:r>
-          </a:p>
-          <a:p>
-            <a:pPr>
-              <a:defRPr sz="2000"/>
-            </a:pPr>
-            <a:r>
-              <a:t>🔗 Démonstration guidée</a:t>
-            </a:r>
-          </a:p>
-          <a:p>
-            <a:pPr>
-              <a:defRPr sz="2000"/>
-            </a:pPr>
-            <a:r>
-              <a:t>🔗 Questions</a:t>
-            </a:r>
-          </a:p>
-        </p:txBody>
-      </p:sp>
-      <p:sp>
-        <p:nvSpPr>
-          <p:cNvPr id="4" name="TextBox 3"/>
+          <p:cNvPr id="2" name="TextBox 1"/>
           <p:cNvSpPr txBox="1"/>
           <p:nvPr/>
         </p:nvSpPr>
         <p:spPr>
           <a:xfrm>
-            <a:off x="365760" y="6446520"/>
-            <a:ext cx="8412480" cy="320040"/>
+            <a:off x="548640" y="365760"/>
+            <a:ext cx="7772400" cy="640080"/>
           </a:xfrm>
           <a:prstGeom prst="rect">
             <a:avLst/>
@@ -4378,20 +4389,127 @@
           <a:noFill/>
         </p:spPr>
         <p:txBody>
-          <a:bodyPr wrap="none">
+          <a:bodyPr wrap="square">
             <a:spAutoFit/>
           </a:bodyPr>
           <a:lstStyle/>
           <a:p>
-            <a:pPr algn="ctr">
-              <a:defRPr sz="900">
-                <a:solidFill>
-                  <a:srgbClr val="404040"/>
-                </a:solidFill>
-              </a:defRPr>
-            </a:pPr>
-            <a:r>
-              <a:t>Cours TIC 10  •  Diapositive 7/10</a:t>
+            <a:pPr algn="l">
+              <a:defRPr sz="2600" b="1">
+                <a:solidFill>
+                  <a:srgbClr val="1A5C33"/>
+                </a:solidFill>
+              </a:defRPr>
+            </a:pPr>
+            <a:r>
+              <a:t>🎯 Objectifs pédagogiques</a:t>
+            </a:r>
+          </a:p>
+        </p:txBody>
+      </p:sp>
+      <p:sp>
+        <p:nvSpPr>
+          <p:cNvPr id="3" name="TextBox 2"/>
+          <p:cNvSpPr txBox="1"/>
+          <p:nvPr/>
+        </p:nvSpPr>
+        <p:spPr>
+          <a:xfrm>
+            <a:off x="548640" y="1828800"/>
+            <a:ext cx="7772400" cy="4572000"/>
+          </a:xfrm>
+          <a:prstGeom prst="rect">
+            <a:avLst/>
+          </a:prstGeom>
+          <a:noFill/>
+        </p:spPr>
+        <p:txBody>
+          <a:bodyPr wrap="square">
+            <a:spAutoFit/>
+          </a:bodyPr>
+          <a:lstStyle/>
+          <a:p>
+            <a:pPr>
+              <a:spcAft>
+                <a:spcPts val="600"/>
+              </a:spcAft>
+              <a:defRPr sz="1500">
+                <a:solidFill>
+                  <a:srgbClr val="222222"/>
+                </a:solidFill>
+              </a:defRPr>
+            </a:pPr>
+            <a:r>
+              <a:t>• En termes de savoir :- Identifier les services Internet essentiels à la recherche académique (HAL, ORCID, Zotero, Google Scholar)</a:t>
+            </a:r>
+            <a:br/>
+            <a:r>
+              <a:t>- Expliquer le mouvement Open Science et ses implications pour le chercheur</a:t>
+            </a:r>
+            <a:br/>
+            <a:r>
+              <a:t>- Distinguer les outils de gestion bibliographique et leurs protocoles</a:t>
+            </a:r>
+          </a:p>
+          <a:p>
+            <a:pPr>
+              <a:spcAft>
+                <a:spcPts val="600"/>
+              </a:spcAft>
+              <a:defRPr sz="1500">
+                <a:solidFill>
+                  <a:srgbClr val="222222"/>
+                </a:solidFill>
+              </a:defRPr>
+            </a:pPr>
+            <a:r>
+              <a:t>• En termes de savoir-faire :- Configurer Zotero et l'interopérabilité avec le traitement de texte</a:t>
+            </a:r>
+            <a:br/>
+            <a:r>
+              <a:t>- Déposer un document sur HAL avec les métadonnées complètes</a:t>
+            </a:r>
+            <a:br/>
+            <a:r>
+              <a:t>- Réaliser une veille bibliographique automatisée (alertes, flux RSS)</a:t>
+            </a:r>
+            <a:br/>
+            <a:r>
+              <a:t>- Utiliser Overleaf pour la rédaction collaborative</a:t>
+            </a:r>
+          </a:p>
+          <a:p>
+            <a:pPr>
+              <a:spcAft>
+                <a:spcPts val="600"/>
+              </a:spcAft>
+              <a:defRPr sz="1500">
+                <a:solidFill>
+                  <a:srgbClr val="222222"/>
+                </a:solidFill>
+              </a:defRPr>
+            </a:pPr>
+            <a:r>
+              <a:t>• En termes de savoir-être :- Culture de la science ouverte et du partage des données</a:t>
+            </a:r>
+            <a:br/>
+            <a:r>
+              <a:t>- Netiquette académique et identité numérique responsable</a:t>
+            </a:r>
+          </a:p>
+          <a:p>
+            <a:pPr>
+              <a:spcAft>
+                <a:spcPts val="600"/>
+              </a:spcAft>
+              <a:defRPr sz="1500">
+                <a:solidFill>
+                  <a:srgbClr val="222222"/>
+                </a:solidFill>
+              </a:defRPr>
+            </a:pPr>
+            <a:r>
+              <a:t>• Mode d'évaluation :TD 20 % + Portfolio numérique (HAL + Zotero + ORCID) 50 % + QCM final 30 %</a:t>
             </a:r>
           </a:p>
         </p:txBody>
@@ -4401,15 +4519,20 @@
   <p:clrMapOvr>
     <a:masterClrMapping/>
   </p:clrMapOvr>
-  <p:transition spd="med">
-    <p:fade/>
-  </p:transition>
 </p:sld>
 </file>
 
-<file path=ppt/slides/slide8.xml><?xml version="1.0" encoding="utf-8"?>
+<file path=ppt/slides/slide3.xml><?xml version="1.0" encoding="utf-8"?>
 <p:sld xmlns:a="http://schemas.openxmlformats.org/drawingml/2006/main" xmlns:p="http://schemas.openxmlformats.org/presentationml/2006/main" xmlns:r="http://schemas.openxmlformats.org/officeDocument/2006/relationships">
   <p:cSld>
+    <p:bg>
+      <p:bgPr>
+        <a:solidFill>
+          <a:srgbClr val="FFFFFF"/>
+        </a:solidFill>
+        <a:effectLst/>
+      </p:bgPr>
+    </p:bg>
     <p:spTree>
       <p:nvGrpSpPr>
         <p:cNvPr id="1" name=""/>
@@ -4419,83 +4542,14 @@
       <p:grpSpPr/>
       <p:sp>
         <p:nvSpPr>
-          <p:cNvPr id="2" name="Title 1"/>
-          <p:cNvSpPr>
-            <a:spLocks noGrp="1"/>
-          </p:cNvSpPr>
-          <p:nvPr>
-            <p:ph type="title"/>
-          </p:nvPr>
-        </p:nvSpPr>
-        <p:spPr/>
-        <p:txBody>
-          <a:bodyPr/>
-          <a:lstStyle/>
-          <a:p>
-            <a:r>
-              <a:t>Messagerie instantanée et visioconférence</a:t>
-            </a:r>
-          </a:p>
-        </p:txBody>
-      </p:sp>
-      <p:sp>
-        <p:nvSpPr>
-          <p:cNvPr id="3" name="Content Placeholder 2"/>
-          <p:cNvSpPr>
-            <a:spLocks noGrp="1"/>
-          </p:cNvSpPr>
-          <p:nvPr>
-            <p:ph idx="1"/>
-          </p:nvPr>
-        </p:nvSpPr>
-        <p:spPr/>
-        <p:txBody>
-          <a:bodyPr/>
-          <a:lstStyle/>
-          <a:p>
-            <a:pPr>
-              <a:defRPr sz="2000"/>
-            </a:pPr>
-            <a:r>
-              <a:t>📡 Points clés polycopié</a:t>
-            </a:r>
-          </a:p>
-          <a:p>
-            <a:pPr>
-              <a:defRPr sz="2000"/>
-            </a:pPr>
-            <a:r>
-              <a:t>📡 Exemples universitaires</a:t>
-            </a:r>
-          </a:p>
-          <a:p>
-            <a:pPr>
-              <a:defRPr sz="2000"/>
-            </a:pPr>
-            <a:r>
-              <a:t>📡 Démonstration guidée</a:t>
-            </a:r>
-          </a:p>
-          <a:p>
-            <a:pPr>
-              <a:defRPr sz="2000"/>
-            </a:pPr>
-            <a:r>
-              <a:t>📡 Questions</a:t>
-            </a:r>
-          </a:p>
-        </p:txBody>
-      </p:sp>
-      <p:sp>
-        <p:nvSpPr>
-          <p:cNvPr id="4" name="TextBox 3"/>
+          <p:cNvPr id="2" name="TextBox 1"/>
           <p:cNvSpPr txBox="1"/>
           <p:nvPr/>
         </p:nvSpPr>
         <p:spPr>
           <a:xfrm>
-            <a:off x="365760" y="6446520"/>
-            <a:ext cx="8412480" cy="320040"/>
+            <a:off x="548640" y="365760"/>
+            <a:ext cx="7772400" cy="640080"/>
           </a:xfrm>
           <a:prstGeom prst="rect">
             <a:avLst/>
@@ -4503,20 +4557,193 @@
           <a:noFill/>
         </p:spPr>
         <p:txBody>
-          <a:bodyPr wrap="none">
+          <a:bodyPr wrap="square">
             <a:spAutoFit/>
           </a:bodyPr>
           <a:lstStyle/>
           <a:p>
-            <a:pPr algn="ctr">
-              <a:defRPr sz="900">
-                <a:solidFill>
-                  <a:srgbClr val="404040"/>
-                </a:solidFill>
-              </a:defRPr>
-            </a:pPr>
-            <a:r>
-              <a:t>Cours TIC 10  •  Diapositive 8/10</a:t>
+            <a:pPr algn="l">
+              <a:defRPr sz="2600" b="1">
+                <a:solidFill>
+                  <a:srgbClr val="1A5C33"/>
+                </a:solidFill>
+              </a:defRPr>
+            </a:pPr>
+            <a:r>
+              <a:t>📋 Plan du cours</a:t>
+            </a:r>
+          </a:p>
+        </p:txBody>
+      </p:sp>
+      <p:sp>
+        <p:nvSpPr>
+          <p:cNvPr id="3" name="TextBox 2"/>
+          <p:cNvSpPr txBox="1"/>
+          <p:nvPr/>
+        </p:nvSpPr>
+        <p:spPr>
+          <a:xfrm>
+            <a:off x="548640" y="1828800"/>
+            <a:ext cx="7772400" cy="4572000"/>
+          </a:xfrm>
+          <a:prstGeom prst="rect">
+            <a:avLst/>
+          </a:prstGeom>
+          <a:noFill/>
+        </p:spPr>
+        <p:txBody>
+          <a:bodyPr wrap="square">
+            <a:spAutoFit/>
+          </a:bodyPr>
+          <a:lstStyle/>
+          <a:p>
+            <a:pPr>
+              <a:spcAft>
+                <a:spcPts val="600"/>
+              </a:spcAft>
+              <a:defRPr sz="1600">
+                <a:solidFill>
+                  <a:srgbClr val="222222"/>
+                </a:solidFill>
+              </a:defRPr>
+            </a:pPr>
+            <a:r>
+              <a:t>• Fiche cours — Plateforme e-learning (Moodle)</a:t>
+            </a:r>
+          </a:p>
+          <a:p>
+            <a:pPr>
+              <a:spcAft>
+                <a:spcPts val="600"/>
+              </a:spcAft>
+              <a:defRPr sz="1600">
+                <a:solidFill>
+                  <a:srgbClr val="222222"/>
+                </a:solidFill>
+              </a:defRPr>
+            </a:pPr>
+            <a:r>
+              <a:t>• Objectifs de l'enseignement</a:t>
+            </a:r>
+          </a:p>
+          <a:p>
+            <a:pPr>
+              <a:spcAft>
+                <a:spcPts val="600"/>
+              </a:spcAft>
+              <a:defRPr sz="1600">
+                <a:solidFill>
+                  <a:srgbClr val="222222"/>
+                </a:solidFill>
+              </a:defRPr>
+            </a:pPr>
+            <a:r>
+              <a:t>• Activités d'apprentissage</a:t>
+            </a:r>
+          </a:p>
+          <a:p>
+            <a:pPr>
+              <a:spcAft>
+                <a:spcPts val="600"/>
+              </a:spcAft>
+              <a:defRPr sz="1600">
+                <a:solidFill>
+                  <a:srgbClr val="222222"/>
+                </a:solidFill>
+              </a:defRPr>
+            </a:pPr>
+            <a:r>
+              <a:t>• Activités d'évaluation</a:t>
+            </a:r>
+          </a:p>
+          <a:p>
+            <a:pPr>
+              <a:spcAft>
+                <a:spcPts val="600"/>
+              </a:spcAft>
+              <a:defRPr sz="1600">
+                <a:solidFill>
+                  <a:srgbClr val="222222"/>
+                </a:solidFill>
+              </a:defRPr>
+            </a:pPr>
+            <a:r>
+              <a:t>• Bibliographie et ressources externes</a:t>
+            </a:r>
+          </a:p>
+          <a:p>
+            <a:pPr>
+              <a:spcAft>
+                <a:spcPts val="600"/>
+              </a:spcAft>
+              <a:defRPr sz="1600">
+                <a:solidFill>
+                  <a:srgbClr val="222222"/>
+                </a:solidFill>
+              </a:defRPr>
+            </a:pPr>
+            <a:r>
+              <a:t>• Contexte réglementaire algérien</a:t>
+            </a:r>
+          </a:p>
+          <a:p>
+            <a:pPr>
+              <a:spcAft>
+                <a:spcPts val="600"/>
+              </a:spcAft>
+              <a:defRPr sz="1600">
+                <a:solidFill>
+                  <a:srgbClr val="222222"/>
+                </a:solidFill>
+              </a:defRPr>
+            </a:pPr>
+            <a:r>
+              <a:t>• Plan du cours</a:t>
+            </a:r>
+          </a:p>
+          <a:p>
+            <a:pPr>
+              <a:spcAft>
+                <a:spcPts val="600"/>
+              </a:spcAft>
+              <a:defRPr sz="1600">
+                <a:solidFill>
+                  <a:srgbClr val="222222"/>
+                </a:solidFill>
+              </a:defRPr>
+            </a:pPr>
+            <a:r>
+              <a:t>• Introduction — Panorama des services Internet pour la recherche(10 min)</a:t>
+            </a:r>
+          </a:p>
+          <a:p>
+            <a:pPr>
+              <a:spcAft>
+                <a:spcPts val="600"/>
+              </a:spcAft>
+              <a:defRPr sz="1600">
+                <a:solidFill>
+                  <a:srgbClr val="222222"/>
+                </a:solidFill>
+              </a:defRPr>
+            </a:pPr>
+            <a:r>
+              <a:t>• Identité numérique du chercheur : ORCID, IdHAL(10 min)</a:t>
+            </a:r>
+          </a:p>
+          <a:p>
+            <a:pPr>
+              <a:spcAft>
+                <a:spcPts val="600"/>
+              </a:spcAft>
+              <a:defRPr sz="1600">
+                <a:solidFill>
+                  <a:srgbClr val="222222"/>
+                </a:solidFill>
+              </a:defRPr>
+            </a:pPr>
+            <a:r>
+              <a:t>• Google Scholar avancé et Google Alerts(10 min)</a:t>
             </a:r>
           </a:p>
         </p:txBody>
@@ -4526,15 +4753,20 @@
   <p:clrMapOvr>
     <a:masterClrMapping/>
   </p:clrMapOvr>
-  <p:transition spd="med">
-    <p:fade/>
-  </p:transition>
 </p:sld>
 </file>
 
-<file path=ppt/slides/slide9.xml><?xml version="1.0" encoding="utf-8"?>
+<file path=ppt/slides/slide4.xml><?xml version="1.0" encoding="utf-8"?>
 <p:sld xmlns:a="http://schemas.openxmlformats.org/drawingml/2006/main" xmlns:p="http://schemas.openxmlformats.org/presentationml/2006/main" xmlns:r="http://schemas.openxmlformats.org/officeDocument/2006/relationships">
   <p:cSld>
+    <p:bg>
+      <p:bgPr>
+        <a:solidFill>
+          <a:srgbClr val="FFFFFF"/>
+        </a:solidFill>
+        <a:effectLst/>
+      </p:bgPr>
+    </p:bg>
     <p:spTree>
       <p:nvGrpSpPr>
         <p:cNvPr id="1" name=""/>
@@ -4544,83 +4776,57 @@
       <p:grpSpPr/>
       <p:sp>
         <p:nvSpPr>
-          <p:cNvPr id="2" name="Title 1"/>
-          <p:cNvSpPr>
-            <a:spLocks noGrp="1"/>
-          </p:cNvSpPr>
-          <p:nvPr>
-            <p:ph type="title"/>
-          </p:nvPr>
-        </p:nvSpPr>
-        <p:spPr/>
-        <p:txBody>
-          <a:bodyPr/>
-          <a:lstStyle/>
-          <a:p>
-            <a:r>
-              <a:t>Atelier et évaluation</a:t>
-            </a:r>
-          </a:p>
-        </p:txBody>
-      </p:sp>
-      <p:sp>
-        <p:nvSpPr>
-          <p:cNvPr id="3" name="Content Placeholder 2"/>
-          <p:cNvSpPr>
-            <a:spLocks noGrp="1"/>
-          </p:cNvSpPr>
-          <p:nvPr>
-            <p:ph idx="1"/>
-          </p:nvPr>
-        </p:nvSpPr>
-        <p:spPr/>
-        <p:txBody>
-          <a:bodyPr/>
-          <a:lstStyle/>
-          <a:p>
-            <a:pPr>
-              <a:defRPr sz="2000"/>
-            </a:pPr>
-            <a:r>
-              <a:t>🛠️ Travaux sur poste</a:t>
-            </a:r>
-          </a:p>
-          <a:p>
-            <a:pPr>
-              <a:defRPr sz="2000"/>
-            </a:pPr>
-            <a:r>
-              <a:t>🛠️ Fiche TD 1h30</a:t>
-            </a:r>
-          </a:p>
-          <a:p>
-            <a:pPr>
-              <a:defRPr sz="2000"/>
-            </a:pPr>
-            <a:r>
-              <a:t>🛠️ Auto-évaluation</a:t>
-            </a:r>
-          </a:p>
-          <a:p>
-            <a:pPr>
-              <a:defRPr sz="2000"/>
-            </a:pPr>
-            <a:r>
-              <a:t>🛠️ Support PDF officiel</a:t>
-            </a:r>
-          </a:p>
-        </p:txBody>
-      </p:sp>
-      <p:sp>
-        <p:nvSpPr>
-          <p:cNvPr id="4" name="TextBox 3"/>
+          <p:cNvPr id="2" name="Rectangle 1"/>
+          <p:cNvSpPr/>
+          <p:nvPr/>
+        </p:nvSpPr>
+        <p:spPr>
+          <a:xfrm>
+            <a:off x="0" y="0"/>
+            <a:ext cx="109728" cy="6858000"/>
+          </a:xfrm>
+          <a:prstGeom prst="rect">
+            <a:avLst/>
+          </a:prstGeom>
+          <a:solidFill>
+            <a:srgbClr val="2C6E49"/>
+          </a:solidFill>
+          <a:ln>
+            <a:noFill/>
+          </a:ln>
+        </p:spPr>
+        <p:style>
+          <a:lnRef idx="1">
+            <a:schemeClr val="accent1"/>
+          </a:lnRef>
+          <a:fillRef idx="3">
+            <a:schemeClr val="accent1"/>
+          </a:fillRef>
+          <a:effectRef idx="2">
+            <a:schemeClr val="accent1"/>
+          </a:effectRef>
+          <a:fontRef idx="minor">
+            <a:schemeClr val="lt1"/>
+          </a:fontRef>
+        </p:style>
+        <p:txBody>
+          <a:bodyPr rtlCol="0" anchor="ctr"/>
+          <a:lstStyle/>
+          <a:p>
+            <a:pPr algn="ctr"/>
+          </a:p>
+        </p:txBody>
+      </p:sp>
+      <p:sp>
+        <p:nvSpPr>
+          <p:cNvPr id="3" name="TextBox 2"/>
           <p:cNvSpPr txBox="1"/>
           <p:nvPr/>
         </p:nvSpPr>
         <p:spPr>
           <a:xfrm>
-            <a:off x="365760" y="6446520"/>
-            <a:ext cx="8412480" cy="320040"/>
+            <a:off x="457200" y="365760"/>
+            <a:ext cx="8229600" cy="640080"/>
           </a:xfrm>
           <a:prstGeom prst="rect">
             <a:avLst/>
@@ -4628,20 +4834,88 @@
           <a:noFill/>
         </p:spPr>
         <p:txBody>
-          <a:bodyPr wrap="none">
+          <a:bodyPr wrap="square">
             <a:spAutoFit/>
           </a:bodyPr>
           <a:lstStyle/>
           <a:p>
-            <a:pPr algn="ctr">
-              <a:defRPr sz="900">
-                <a:solidFill>
-                  <a:srgbClr val="404040"/>
-                </a:solidFill>
-              </a:defRPr>
-            </a:pPr>
-            <a:r>
-              <a:t>Cours TIC 10  •  Diapositive 9/10</a:t>
+            <a:pPr algn="l">
+              <a:defRPr sz="2200" b="1">
+                <a:solidFill>
+                  <a:srgbClr val="1A5C33"/>
+                </a:solidFill>
+              </a:defRPr>
+            </a:pPr>
+            <a:r>
+              <a:t>Fiche cours — Plateforme e-learning (Moodle)</a:t>
+            </a:r>
+          </a:p>
+        </p:txBody>
+      </p:sp>
+      <p:sp>
+        <p:nvSpPr>
+          <p:cNvPr id="4" name="TextBox 3"/>
+          <p:cNvSpPr txBox="1"/>
+          <p:nvPr/>
+        </p:nvSpPr>
+        <p:spPr>
+          <a:xfrm>
+            <a:off x="457200" y="1371600"/>
+            <a:ext cx="7772400" cy="4572000"/>
+          </a:xfrm>
+          <a:prstGeom prst="rect">
+            <a:avLst/>
+          </a:prstGeom>
+          <a:noFill/>
+        </p:spPr>
+        <p:txBody>
+          <a:bodyPr wrap="square">
+            <a:spAutoFit/>
+          </a:bodyPr>
+          <a:lstStyle/>
+          <a:p>
+            <a:pPr>
+              <a:spcAft>
+                <a:spcPts val="600"/>
+              </a:spcAft>
+              <a:defRPr sz="1400">
+                <a:solidFill>
+                  <a:srgbClr val="222222"/>
+                </a:solidFill>
+              </a:defRPr>
+            </a:pPr>
+            <a:r>
+              <a:t>• Référentiel :titres et structure alignés sur Canvas Univ-Mosta (elearning.univ-usto.dz) ; bonnes pratiques benchmark 10 universités algériennes (voirBENCHMARK_10_UNIVERSITES_ELEARNING.md).</a:t>
+            </a:r>
+          </a:p>
+          <a:p>
+            <a:pPr>
+              <a:spcAft>
+                <a:spcPts val="600"/>
+              </a:spcAft>
+              <a:defRPr sz="1400">
+                <a:solidFill>
+                  <a:srgbClr val="222222"/>
+                </a:solidFill>
+              </a:defRPr>
+            </a:pPr>
+            <a:r>
+              <a:t>• Public visé :Master 1 Langue et Culture</a:t>
+            </a:r>
+          </a:p>
+          <a:p>
+            <a:pPr>
+              <a:spcAft>
+                <a:spcPts val="600"/>
+              </a:spcAft>
+              <a:defRPr sz="1400">
+                <a:solidFill>
+                  <a:srgbClr val="222222"/>
+                </a:solidFill>
+              </a:defRPr>
+            </a:pPr>
+            <a:r>
+              <a:t>• Compétences pré-requises :TIC 01–09 ; maîtrise de la navigation Web et de la recherche documentaire</a:t>
             </a:r>
           </a:p>
         </p:txBody>
@@ -4651,9 +4925,920 @@
   <p:clrMapOvr>
     <a:masterClrMapping/>
   </p:clrMapOvr>
-  <p:transition spd="med">
-    <p:fade/>
-  </p:transition>
+</p:sld>
+</file>
+
+<file path=ppt/slides/slide5.xml><?xml version="1.0" encoding="utf-8"?>
+<p:sld xmlns:a="http://schemas.openxmlformats.org/drawingml/2006/main" xmlns:p="http://schemas.openxmlformats.org/presentationml/2006/main" xmlns:r="http://schemas.openxmlformats.org/officeDocument/2006/relationships">
+  <p:cSld>
+    <p:bg>
+      <p:bgPr>
+        <a:solidFill>
+          <a:srgbClr val="FFFFFF"/>
+        </a:solidFill>
+        <a:effectLst/>
+      </p:bgPr>
+    </p:bg>
+    <p:spTree>
+      <p:nvGrpSpPr>
+        <p:cNvPr id="1" name=""/>
+        <p:cNvGrpSpPr/>
+        <p:nvPr/>
+      </p:nvGrpSpPr>
+      <p:grpSpPr/>
+      <p:sp>
+        <p:nvSpPr>
+          <p:cNvPr id="2" name="Rectangle 1"/>
+          <p:cNvSpPr/>
+          <p:nvPr/>
+        </p:nvSpPr>
+        <p:spPr>
+          <a:xfrm>
+            <a:off x="0" y="0"/>
+            <a:ext cx="109728" cy="6858000"/>
+          </a:xfrm>
+          <a:prstGeom prst="rect">
+            <a:avLst/>
+          </a:prstGeom>
+          <a:solidFill>
+            <a:srgbClr val="2C6E49"/>
+          </a:solidFill>
+          <a:ln>
+            <a:noFill/>
+          </a:ln>
+        </p:spPr>
+        <p:style>
+          <a:lnRef idx="1">
+            <a:schemeClr val="accent1"/>
+          </a:lnRef>
+          <a:fillRef idx="3">
+            <a:schemeClr val="accent1"/>
+          </a:fillRef>
+          <a:effectRef idx="2">
+            <a:schemeClr val="accent1"/>
+          </a:effectRef>
+          <a:fontRef idx="minor">
+            <a:schemeClr val="lt1"/>
+          </a:fontRef>
+        </p:style>
+        <p:txBody>
+          <a:bodyPr rtlCol="0" anchor="ctr"/>
+          <a:lstStyle/>
+          <a:p>
+            <a:pPr algn="ctr"/>
+          </a:p>
+        </p:txBody>
+      </p:sp>
+      <p:sp>
+        <p:nvSpPr>
+          <p:cNvPr id="3" name="TextBox 2"/>
+          <p:cNvSpPr txBox="1"/>
+          <p:nvPr/>
+        </p:nvSpPr>
+        <p:spPr>
+          <a:xfrm>
+            <a:off x="457200" y="365760"/>
+            <a:ext cx="8229600" cy="640080"/>
+          </a:xfrm>
+          <a:prstGeom prst="rect">
+            <a:avLst/>
+          </a:prstGeom>
+          <a:noFill/>
+        </p:spPr>
+        <p:txBody>
+          <a:bodyPr wrap="square">
+            <a:spAutoFit/>
+          </a:bodyPr>
+          <a:lstStyle/>
+          <a:p>
+            <a:pPr algn="l">
+              <a:defRPr sz="2200" b="1">
+                <a:solidFill>
+                  <a:srgbClr val="1A5C33"/>
+                </a:solidFill>
+              </a:defRPr>
+            </a:pPr>
+            <a:r>
+              <a:t>Objectifs de l'enseignement</a:t>
+            </a:r>
+          </a:p>
+        </p:txBody>
+      </p:sp>
+      <p:sp>
+        <p:nvSpPr>
+          <p:cNvPr id="4" name="TextBox 3"/>
+          <p:cNvSpPr txBox="1"/>
+          <p:nvPr/>
+        </p:nvSpPr>
+        <p:spPr>
+          <a:xfrm>
+            <a:off x="457200" y="1371600"/>
+            <a:ext cx="7772400" cy="4572000"/>
+          </a:xfrm>
+          <a:prstGeom prst="rect">
+            <a:avLst/>
+          </a:prstGeom>
+          <a:noFill/>
+        </p:spPr>
+        <p:txBody>
+          <a:bodyPr wrap="square">
+            <a:spAutoFit/>
+          </a:bodyPr>
+          <a:lstStyle/>
+          <a:p>
+            <a:pPr>
+              <a:spcAft>
+                <a:spcPts val="600"/>
+              </a:spcAft>
+              <a:defRPr sz="1400">
+                <a:solidFill>
+                  <a:srgbClr val="222222"/>
+                </a:solidFill>
+              </a:defRPr>
+            </a:pPr>
+            <a:r>
+              <a:t>• En termes de savoir :- Identifier les services Internet essentiels à la recherche académique (HAL, ORCID, Zotero, Google Scholar)</a:t>
+            </a:r>
+            <a:br/>
+            <a:r>
+              <a:t>- Expliquer le mouvement Open Science et ses implications pour le chercheur</a:t>
+            </a:r>
+            <a:br/>
+            <a:r>
+              <a:t>- Distinguer les outils de gestion bibliographique et leurs protocoles</a:t>
+            </a:r>
+          </a:p>
+          <a:p>
+            <a:pPr>
+              <a:spcAft>
+                <a:spcPts val="600"/>
+              </a:spcAft>
+              <a:defRPr sz="1400">
+                <a:solidFill>
+                  <a:srgbClr val="222222"/>
+                </a:solidFill>
+              </a:defRPr>
+            </a:pPr>
+            <a:r>
+              <a:t>• En termes de savoir-faire :- Configurer Zotero et l'interopérabilité avec le traitement de texte</a:t>
+            </a:r>
+            <a:br/>
+            <a:r>
+              <a:t>- Déposer un document sur HAL avec les métadonnées complètes</a:t>
+            </a:r>
+            <a:br/>
+            <a:r>
+              <a:t>- Réaliser une veille bibliographique automatisée (alertes, flux RSS)</a:t>
+            </a:r>
+            <a:br/>
+            <a:r>
+              <a:t>- Utiliser Overleaf pour la rédaction collaborative</a:t>
+            </a:r>
+          </a:p>
+          <a:p>
+            <a:pPr>
+              <a:spcAft>
+                <a:spcPts val="600"/>
+              </a:spcAft>
+              <a:defRPr sz="1400">
+                <a:solidFill>
+                  <a:srgbClr val="222222"/>
+                </a:solidFill>
+              </a:defRPr>
+            </a:pPr>
+            <a:r>
+              <a:t>• En termes de savoir-être :- Culture de la science ouverte et du partage des données</a:t>
+            </a:r>
+            <a:br/>
+            <a:r>
+              <a:t>- Netiquette académique et identité numérique responsable</a:t>
+            </a:r>
+          </a:p>
+          <a:p>
+            <a:pPr>
+              <a:spcAft>
+                <a:spcPts val="600"/>
+              </a:spcAft>
+              <a:defRPr sz="1400">
+                <a:solidFill>
+                  <a:srgbClr val="222222"/>
+                </a:solidFill>
+              </a:defRPr>
+            </a:pPr>
+            <a:r>
+              <a:t>• Mode d'évaluation :TD 20 % + Portfolio numérique (HAL + Zotero + ORCID) 50 % + QCM final 30 %</a:t>
+            </a:r>
+          </a:p>
+        </p:txBody>
+      </p:sp>
+    </p:spTree>
+  </p:cSld>
+  <p:clrMapOvr>
+    <a:masterClrMapping/>
+  </p:clrMapOvr>
+</p:sld>
+</file>
+
+<file path=ppt/slides/slide6.xml><?xml version="1.0" encoding="utf-8"?>
+<p:sld xmlns:a="http://schemas.openxmlformats.org/drawingml/2006/main" xmlns:p="http://schemas.openxmlformats.org/presentationml/2006/main" xmlns:r="http://schemas.openxmlformats.org/officeDocument/2006/relationships">
+  <p:cSld>
+    <p:bg>
+      <p:bgPr>
+        <a:solidFill>
+          <a:srgbClr val="FFFFFF"/>
+        </a:solidFill>
+        <a:effectLst/>
+      </p:bgPr>
+    </p:bg>
+    <p:spTree>
+      <p:nvGrpSpPr>
+        <p:cNvPr id="1" name=""/>
+        <p:cNvGrpSpPr/>
+        <p:nvPr/>
+      </p:nvGrpSpPr>
+      <p:grpSpPr/>
+      <p:sp>
+        <p:nvSpPr>
+          <p:cNvPr id="2" name="Rectangle 1"/>
+          <p:cNvSpPr/>
+          <p:nvPr/>
+        </p:nvSpPr>
+        <p:spPr>
+          <a:xfrm>
+            <a:off x="0" y="0"/>
+            <a:ext cx="109728" cy="6858000"/>
+          </a:xfrm>
+          <a:prstGeom prst="rect">
+            <a:avLst/>
+          </a:prstGeom>
+          <a:solidFill>
+            <a:srgbClr val="2C6E49"/>
+          </a:solidFill>
+          <a:ln>
+            <a:noFill/>
+          </a:ln>
+        </p:spPr>
+        <p:style>
+          <a:lnRef idx="1">
+            <a:schemeClr val="accent1"/>
+          </a:lnRef>
+          <a:fillRef idx="3">
+            <a:schemeClr val="accent1"/>
+          </a:fillRef>
+          <a:effectRef idx="2">
+            <a:schemeClr val="accent1"/>
+          </a:effectRef>
+          <a:fontRef idx="minor">
+            <a:schemeClr val="lt1"/>
+          </a:fontRef>
+        </p:style>
+        <p:txBody>
+          <a:bodyPr rtlCol="0" anchor="ctr"/>
+          <a:lstStyle/>
+          <a:p>
+            <a:pPr algn="ctr"/>
+          </a:p>
+        </p:txBody>
+      </p:sp>
+      <p:sp>
+        <p:nvSpPr>
+          <p:cNvPr id="3" name="TextBox 2"/>
+          <p:cNvSpPr txBox="1"/>
+          <p:nvPr/>
+        </p:nvSpPr>
+        <p:spPr>
+          <a:xfrm>
+            <a:off x="457200" y="365760"/>
+            <a:ext cx="8229600" cy="640080"/>
+          </a:xfrm>
+          <a:prstGeom prst="rect">
+            <a:avLst/>
+          </a:prstGeom>
+          <a:noFill/>
+        </p:spPr>
+        <p:txBody>
+          <a:bodyPr wrap="square">
+            <a:spAutoFit/>
+          </a:bodyPr>
+          <a:lstStyle/>
+          <a:p>
+            <a:pPr algn="l">
+              <a:defRPr sz="2200" b="1">
+                <a:solidFill>
+                  <a:srgbClr val="1A5C33"/>
+                </a:solidFill>
+              </a:defRPr>
+            </a:pPr>
+            <a:r>
+              <a:t>Activités d'apprentissage</a:t>
+            </a:r>
+          </a:p>
+        </p:txBody>
+      </p:sp>
+      <p:sp>
+        <p:nvSpPr>
+          <p:cNvPr id="4" name="TextBox 3"/>
+          <p:cNvSpPr txBox="1"/>
+          <p:nvPr/>
+        </p:nvSpPr>
+        <p:spPr>
+          <a:xfrm>
+            <a:off x="457200" y="1371600"/>
+            <a:ext cx="7772400" cy="4572000"/>
+          </a:xfrm>
+          <a:prstGeom prst="rect">
+            <a:avLst/>
+          </a:prstGeom>
+          <a:noFill/>
+        </p:spPr>
+        <p:txBody>
+          <a:bodyPr wrap="square">
+            <a:spAutoFit/>
+          </a:bodyPr>
+          <a:lstStyle/>
+          <a:p>
+            <a:pPr>
+              <a:spcAft>
+                <a:spcPts val="600"/>
+              </a:spcAft>
+              <a:defRPr sz="1400">
+                <a:solidFill>
+                  <a:srgbClr val="222222"/>
+                </a:solidFill>
+              </a:defRPr>
+            </a:pPr>
+            <a:r>
+              <a:t>• Création d'un compte ORCID + dépôt d'un document fictif sur HAL</a:t>
+            </a:r>
+          </a:p>
+          <a:p>
+            <a:pPr>
+              <a:spcAft>
+                <a:spcPts val="600"/>
+              </a:spcAft>
+              <a:defRPr sz="1400">
+                <a:solidFill>
+                  <a:srgbClr val="222222"/>
+                </a:solidFill>
+              </a:defRPr>
+            </a:pPr>
+            <a:r>
+              <a:t>• Configuration Zotero : bibliographie collaborative sur un thème commun</a:t>
+            </a:r>
+          </a:p>
+          <a:p>
+            <a:pPr>
+              <a:spcAft>
+                <a:spcPts val="600"/>
+              </a:spcAft>
+              <a:defRPr sz="1400">
+                <a:solidFill>
+                  <a:srgbClr val="222222"/>
+                </a:solidFill>
+              </a:defRPr>
+            </a:pPr>
+            <a:r>
+              <a:t>• Rédaction d'un court article sur Overleaf (modèle template)</a:t>
+            </a:r>
+          </a:p>
+        </p:txBody>
+      </p:sp>
+    </p:spTree>
+  </p:cSld>
+  <p:clrMapOvr>
+    <a:masterClrMapping/>
+  </p:clrMapOvr>
+</p:sld>
+</file>
+
+<file path=ppt/slides/slide7.xml><?xml version="1.0" encoding="utf-8"?>
+<p:sld xmlns:a="http://schemas.openxmlformats.org/drawingml/2006/main" xmlns:p="http://schemas.openxmlformats.org/presentationml/2006/main" xmlns:r="http://schemas.openxmlformats.org/officeDocument/2006/relationships">
+  <p:cSld>
+    <p:bg>
+      <p:bgPr>
+        <a:solidFill>
+          <a:srgbClr val="FFFFFF"/>
+        </a:solidFill>
+        <a:effectLst/>
+      </p:bgPr>
+    </p:bg>
+    <p:spTree>
+      <p:nvGrpSpPr>
+        <p:cNvPr id="1" name=""/>
+        <p:cNvGrpSpPr/>
+        <p:nvPr/>
+      </p:nvGrpSpPr>
+      <p:grpSpPr/>
+      <p:sp>
+        <p:nvSpPr>
+          <p:cNvPr id="2" name="Rectangle 1"/>
+          <p:cNvSpPr/>
+          <p:nvPr/>
+        </p:nvSpPr>
+        <p:spPr>
+          <a:xfrm>
+            <a:off x="0" y="0"/>
+            <a:ext cx="109728" cy="6858000"/>
+          </a:xfrm>
+          <a:prstGeom prst="rect">
+            <a:avLst/>
+          </a:prstGeom>
+          <a:solidFill>
+            <a:srgbClr val="2C6E49"/>
+          </a:solidFill>
+          <a:ln>
+            <a:noFill/>
+          </a:ln>
+        </p:spPr>
+        <p:style>
+          <a:lnRef idx="1">
+            <a:schemeClr val="accent1"/>
+          </a:lnRef>
+          <a:fillRef idx="3">
+            <a:schemeClr val="accent1"/>
+          </a:fillRef>
+          <a:effectRef idx="2">
+            <a:schemeClr val="accent1"/>
+          </a:effectRef>
+          <a:fontRef idx="minor">
+            <a:schemeClr val="lt1"/>
+          </a:fontRef>
+        </p:style>
+        <p:txBody>
+          <a:bodyPr rtlCol="0" anchor="ctr"/>
+          <a:lstStyle/>
+          <a:p>
+            <a:pPr algn="ctr"/>
+          </a:p>
+        </p:txBody>
+      </p:sp>
+      <p:sp>
+        <p:nvSpPr>
+          <p:cNvPr id="3" name="TextBox 2"/>
+          <p:cNvSpPr txBox="1"/>
+          <p:nvPr/>
+        </p:nvSpPr>
+        <p:spPr>
+          <a:xfrm>
+            <a:off x="457200" y="365760"/>
+            <a:ext cx="8229600" cy="640080"/>
+          </a:xfrm>
+          <a:prstGeom prst="rect">
+            <a:avLst/>
+          </a:prstGeom>
+          <a:noFill/>
+        </p:spPr>
+        <p:txBody>
+          <a:bodyPr wrap="square">
+            <a:spAutoFit/>
+          </a:bodyPr>
+          <a:lstStyle/>
+          <a:p>
+            <a:pPr algn="l">
+              <a:defRPr sz="2200" b="1">
+                <a:solidFill>
+                  <a:srgbClr val="1A5C33"/>
+                </a:solidFill>
+              </a:defRPr>
+            </a:pPr>
+            <a:r>
+              <a:t>Activités d'évaluation</a:t>
+            </a:r>
+          </a:p>
+        </p:txBody>
+      </p:sp>
+      <p:sp>
+        <p:nvSpPr>
+          <p:cNvPr id="4" name="TextBox 3"/>
+          <p:cNvSpPr txBox="1"/>
+          <p:nvPr/>
+        </p:nvSpPr>
+        <p:spPr>
+          <a:xfrm>
+            <a:off x="457200" y="1371600"/>
+            <a:ext cx="7772400" cy="4572000"/>
+          </a:xfrm>
+          <a:prstGeom prst="rect">
+            <a:avLst/>
+          </a:prstGeom>
+          <a:noFill/>
+        </p:spPr>
+        <p:txBody>
+          <a:bodyPr wrap="square">
+            <a:spAutoFit/>
+          </a:bodyPr>
+          <a:lstStyle/>
+          <a:p>
+            <a:pPr>
+              <a:spcAft>
+                <a:spcPts val="600"/>
+              </a:spcAft>
+              <a:defRPr sz="1400">
+                <a:solidFill>
+                  <a:srgbClr val="222222"/>
+                </a:solidFill>
+              </a:defRPr>
+            </a:pPr>
+            <a:r>
+              <a:t>• Portfolio : profil ORCID, groupe Zotero partagé, document Overleaf exporté</a:t>
+            </a:r>
+          </a:p>
+          <a:p>
+            <a:pPr>
+              <a:spcAft>
+                <a:spcPts val="600"/>
+              </a:spcAft>
+              <a:defRPr sz="1400">
+                <a:solidFill>
+                  <a:srgbClr val="222222"/>
+                </a:solidFill>
+              </a:defRPr>
+            </a:pPr>
+            <a:r>
+              <a:t>• QCM final récapitulatif du module TIC (20 questions)</a:t>
+            </a:r>
+          </a:p>
+        </p:txBody>
+      </p:sp>
+    </p:spTree>
+  </p:cSld>
+  <p:clrMapOvr>
+    <a:masterClrMapping/>
+  </p:clrMapOvr>
+</p:sld>
+</file>
+
+<file path=ppt/slides/slide8.xml><?xml version="1.0" encoding="utf-8"?>
+<p:sld xmlns:a="http://schemas.openxmlformats.org/drawingml/2006/main" xmlns:p="http://schemas.openxmlformats.org/presentationml/2006/main" xmlns:r="http://schemas.openxmlformats.org/officeDocument/2006/relationships">
+  <p:cSld>
+    <p:bg>
+      <p:bgPr>
+        <a:solidFill>
+          <a:srgbClr val="FFFFFF"/>
+        </a:solidFill>
+        <a:effectLst/>
+      </p:bgPr>
+    </p:bg>
+    <p:spTree>
+      <p:nvGrpSpPr>
+        <p:cNvPr id="1" name=""/>
+        <p:cNvGrpSpPr/>
+        <p:nvPr/>
+      </p:nvGrpSpPr>
+      <p:grpSpPr/>
+      <p:sp>
+        <p:nvSpPr>
+          <p:cNvPr id="2" name="Rectangle 1"/>
+          <p:cNvSpPr/>
+          <p:nvPr/>
+        </p:nvSpPr>
+        <p:spPr>
+          <a:xfrm>
+            <a:off x="0" y="0"/>
+            <a:ext cx="109728" cy="6858000"/>
+          </a:xfrm>
+          <a:prstGeom prst="rect">
+            <a:avLst/>
+          </a:prstGeom>
+          <a:solidFill>
+            <a:srgbClr val="2C6E49"/>
+          </a:solidFill>
+          <a:ln>
+            <a:noFill/>
+          </a:ln>
+        </p:spPr>
+        <p:style>
+          <a:lnRef idx="1">
+            <a:schemeClr val="accent1"/>
+          </a:lnRef>
+          <a:fillRef idx="3">
+            <a:schemeClr val="accent1"/>
+          </a:fillRef>
+          <a:effectRef idx="2">
+            <a:schemeClr val="accent1"/>
+          </a:effectRef>
+          <a:fontRef idx="minor">
+            <a:schemeClr val="lt1"/>
+          </a:fontRef>
+        </p:style>
+        <p:txBody>
+          <a:bodyPr rtlCol="0" anchor="ctr"/>
+          <a:lstStyle/>
+          <a:p>
+            <a:pPr algn="ctr"/>
+          </a:p>
+        </p:txBody>
+      </p:sp>
+      <p:sp>
+        <p:nvSpPr>
+          <p:cNvPr id="3" name="TextBox 2"/>
+          <p:cNvSpPr txBox="1"/>
+          <p:nvPr/>
+        </p:nvSpPr>
+        <p:spPr>
+          <a:xfrm>
+            <a:off x="457200" y="365760"/>
+            <a:ext cx="8229600" cy="640080"/>
+          </a:xfrm>
+          <a:prstGeom prst="rect">
+            <a:avLst/>
+          </a:prstGeom>
+          <a:noFill/>
+        </p:spPr>
+        <p:txBody>
+          <a:bodyPr wrap="square">
+            <a:spAutoFit/>
+          </a:bodyPr>
+          <a:lstStyle/>
+          <a:p>
+            <a:pPr algn="l">
+              <a:defRPr sz="2200" b="1">
+                <a:solidFill>
+                  <a:srgbClr val="1A5C33"/>
+                </a:solidFill>
+              </a:defRPr>
+            </a:pPr>
+            <a:r>
+              <a:t>Bibliographie et ressources externes</a:t>
+            </a:r>
+          </a:p>
+        </p:txBody>
+      </p:sp>
+      <p:sp>
+        <p:nvSpPr>
+          <p:cNvPr id="4" name="TextBox 3"/>
+          <p:cNvSpPr txBox="1"/>
+          <p:nvPr/>
+        </p:nvSpPr>
+        <p:spPr>
+          <a:xfrm>
+            <a:off x="457200" y="1371600"/>
+            <a:ext cx="7772400" cy="4572000"/>
+          </a:xfrm>
+          <a:prstGeom prst="rect">
+            <a:avLst/>
+          </a:prstGeom>
+          <a:noFill/>
+        </p:spPr>
+        <p:txBody>
+          <a:bodyPr wrap="square">
+            <a:spAutoFit/>
+          </a:bodyPr>
+          <a:lstStyle/>
+          <a:p>
+            <a:pPr>
+              <a:spcAft>
+                <a:spcPts val="600"/>
+              </a:spcAft>
+              <a:defRPr sz="1400">
+                <a:solidFill>
+                  <a:srgbClr val="222222"/>
+                </a:solidFill>
+              </a:defRPr>
+            </a:pPr>
+            <a:r>
+              <a:t>• DigComp 2.2 (Union Européenne, 2022) — cadre de compétences numériques</a:t>
+            </a:r>
+          </a:p>
+          <a:p>
+            <a:pPr>
+              <a:spcAft>
+                <a:spcPts val="600"/>
+              </a:spcAft>
+              <a:defRPr sz="1400">
+                <a:solidFill>
+                  <a:srgbClr val="222222"/>
+                </a:solidFill>
+              </a:defRPr>
+            </a:pPr>
+            <a:r>
+              <a:t>• Guides étudiant Moodle (Univ-Mosta, Boumerdès, Béjaïa)</a:t>
+            </a:r>
+          </a:p>
+          <a:p>
+            <a:pPr>
+              <a:spcAft>
+                <a:spcPts val="600"/>
+              </a:spcAft>
+              <a:defRPr sz="1400">
+                <a:solidFill>
+                  <a:srgbClr val="222222"/>
+                </a:solidFill>
+              </a:defRPr>
+            </a:pPr>
+            <a:r>
+              <a:t>• HAL — https://hal.science ; Zotero — https://zotero.org ; Overleaf — https://overleaf.com</a:t>
+            </a:r>
+          </a:p>
+          <a:p>
+            <a:pPr>
+              <a:spcAft>
+                <a:spcPts val="600"/>
+              </a:spcAft>
+              <a:defRPr sz="1400">
+                <a:solidFill>
+                  <a:srgbClr val="222222"/>
+                </a:solidFill>
+              </a:defRPr>
+            </a:pPr>
+            <a:r>
+              <a:t>• ORCID — https://orcid.org</a:t>
+            </a:r>
+          </a:p>
+          <a:p>
+            <a:pPr>
+              <a:spcAft>
+                <a:spcPts val="600"/>
+              </a:spcAft>
+              <a:defRPr sz="1400">
+                <a:solidFill>
+                  <a:srgbClr val="222222"/>
+                </a:solidFill>
+              </a:defRPr>
+            </a:pPr>
+            <a:r>
+              <a:t>• Contact enseignant :BELACEL Madani —madani.belacel@univ-mosta.dz</a:t>
+            </a:r>
+          </a:p>
+        </p:txBody>
+      </p:sp>
+    </p:spTree>
+  </p:cSld>
+  <p:clrMapOvr>
+    <a:masterClrMapping/>
+  </p:clrMapOvr>
+</p:sld>
+</file>
+
+<file path=ppt/slides/slide9.xml><?xml version="1.0" encoding="utf-8"?>
+<p:sld xmlns:a="http://schemas.openxmlformats.org/drawingml/2006/main" xmlns:p="http://schemas.openxmlformats.org/presentationml/2006/main" xmlns:r="http://schemas.openxmlformats.org/officeDocument/2006/relationships">
+  <p:cSld>
+    <p:bg>
+      <p:bgPr>
+        <a:solidFill>
+          <a:srgbClr val="FFFFFF"/>
+        </a:solidFill>
+        <a:effectLst/>
+      </p:bgPr>
+    </p:bg>
+    <p:spTree>
+      <p:nvGrpSpPr>
+        <p:cNvPr id="1" name=""/>
+        <p:cNvGrpSpPr/>
+        <p:nvPr/>
+      </p:nvGrpSpPr>
+      <p:grpSpPr/>
+      <p:sp>
+        <p:nvSpPr>
+          <p:cNvPr id="2" name="Rectangle 1"/>
+          <p:cNvSpPr/>
+          <p:nvPr/>
+        </p:nvSpPr>
+        <p:spPr>
+          <a:xfrm>
+            <a:off x="0" y="0"/>
+            <a:ext cx="109728" cy="6858000"/>
+          </a:xfrm>
+          <a:prstGeom prst="rect">
+            <a:avLst/>
+          </a:prstGeom>
+          <a:solidFill>
+            <a:srgbClr val="2C6E49"/>
+          </a:solidFill>
+          <a:ln>
+            <a:noFill/>
+          </a:ln>
+        </p:spPr>
+        <p:style>
+          <a:lnRef idx="1">
+            <a:schemeClr val="accent1"/>
+          </a:lnRef>
+          <a:fillRef idx="3">
+            <a:schemeClr val="accent1"/>
+          </a:fillRef>
+          <a:effectRef idx="2">
+            <a:schemeClr val="accent1"/>
+          </a:effectRef>
+          <a:fontRef idx="minor">
+            <a:schemeClr val="lt1"/>
+          </a:fontRef>
+        </p:style>
+        <p:txBody>
+          <a:bodyPr rtlCol="0" anchor="ctr"/>
+          <a:lstStyle/>
+          <a:p>
+            <a:pPr algn="ctr"/>
+          </a:p>
+        </p:txBody>
+      </p:sp>
+      <p:sp>
+        <p:nvSpPr>
+          <p:cNvPr id="3" name="TextBox 2"/>
+          <p:cNvSpPr txBox="1"/>
+          <p:nvPr/>
+        </p:nvSpPr>
+        <p:spPr>
+          <a:xfrm>
+            <a:off x="457200" y="365760"/>
+            <a:ext cx="8229600" cy="640080"/>
+          </a:xfrm>
+          <a:prstGeom prst="rect">
+            <a:avLst/>
+          </a:prstGeom>
+          <a:noFill/>
+        </p:spPr>
+        <p:txBody>
+          <a:bodyPr wrap="square">
+            <a:spAutoFit/>
+          </a:bodyPr>
+          <a:lstStyle/>
+          <a:p>
+            <a:pPr algn="l">
+              <a:defRPr sz="2200" b="1">
+                <a:solidFill>
+                  <a:srgbClr val="1A5C33"/>
+                </a:solidFill>
+              </a:defRPr>
+            </a:pPr>
+            <a:r>
+              <a:t>Contexte réglementaire algérien</a:t>
+            </a:r>
+          </a:p>
+        </p:txBody>
+      </p:sp>
+      <p:sp>
+        <p:nvSpPr>
+          <p:cNvPr id="4" name="TextBox 3"/>
+          <p:cNvSpPr txBox="1"/>
+          <p:nvPr/>
+        </p:nvSpPr>
+        <p:spPr>
+          <a:xfrm>
+            <a:off x="457200" y="1371600"/>
+            <a:ext cx="7772400" cy="4572000"/>
+          </a:xfrm>
+          <a:prstGeom prst="rect">
+            <a:avLst/>
+          </a:prstGeom>
+          <a:noFill/>
+        </p:spPr>
+        <p:txBody>
+          <a:bodyPr wrap="square">
+            <a:spAutoFit/>
+          </a:bodyPr>
+          <a:lstStyle/>
+          <a:p>
+            <a:pPr>
+              <a:spcAft>
+                <a:spcPts val="600"/>
+              </a:spcAft>
+              <a:defRPr sz="1400">
+                <a:solidFill>
+                  <a:srgbClr val="222222"/>
+                </a:solidFill>
+              </a:defRPr>
+            </a:pPr>
+            <a:r>
+              <a:t>• Arrêté 933 (2016): Le Master Langue et Culture intègre l'UE « Méthodologie de la recherche et TIC ». La maîtrise des outils bibliographiques et des archives ouvertes est une compétence évaluée.Arrêté 129 (2019): Diffusion en accès ouvert des mémoires de Master via les plateformes institutionnelles.</a:t>
+            </a:r>
+          </a:p>
+          <a:p>
+            <a:pPr>
+              <a:spcAft>
+                <a:spcPts val="600"/>
+              </a:spcAft>
+              <a:defRPr sz="1400">
+                <a:solidFill>
+                  <a:srgbClr val="222222"/>
+                </a:solidFill>
+              </a:defRPr>
+            </a:pPr>
+            <a:r>
+              <a:t>• Loi 18-07 (2018)sur la protection des données personnelles : les plateformes académiques (ORCID, HAL) collectent des données d'identification ; le chercheur doit être informé de leurs usages.</a:t>
+            </a:r>
+          </a:p>
+          <a:p>
+            <a:pPr>
+              <a:spcAft>
+                <a:spcPts val="600"/>
+              </a:spcAft>
+              <a:defRPr sz="1400">
+                <a:solidFill>
+                  <a:srgbClr val="222222"/>
+                </a:solidFill>
+              </a:defRPr>
+            </a:pPr>
+            <a:r>
+              <a:t>• PNDES 2025-2030: L'Algérie s'engage dans laScience Ouvertevia le portail national des revues (SJD) et le dépôt systématique des thèses. La bibliothèque numérique du CERIST (biblio.cerist.dz) donne accès aux ressources souscrites.</a:t>
+            </a:r>
+          </a:p>
+        </p:txBody>
+      </p:sp>
+    </p:spTree>
+  </p:cSld>
+  <p:clrMapOvr>
+    <a:masterClrMapping/>
+  </p:clrMapOvr>
 </p:sld>
 </file>
 
@@ -4975,319 +6160,4 @@
   </a:objectDefaults>
   <a:extraClrSchemeLst/>
 </a:theme>
-</file>
-
-<file path=ppt/theme/theme2.xml><?xml version="1.0" encoding="utf-8"?>
-<a:theme xmlns:a="http://schemas.openxmlformats.org/drawingml/2006/main" name="Thème Office">
-  <a:themeElements>
-    <a:clrScheme name="Office">
-      <a:dk1>
-        <a:sysClr val="windowText" lastClr="000000"/>
-      </a:dk1>
-      <a:lt1>
-        <a:sysClr val="window" lastClr="FFFFFF"/>
-      </a:lt1>
-      <a:dk2>
-        <a:srgbClr val="0E2841"/>
-      </a:dk2>
-      <a:lt2>
-        <a:srgbClr val="E8E8E8"/>
-      </a:lt2>
-      <a:accent1>
-        <a:srgbClr val="156082"/>
-      </a:accent1>
-      <a:accent2>
-        <a:srgbClr val="E97132"/>
-      </a:accent2>
-      <a:accent3>
-        <a:srgbClr val="196B24"/>
-      </a:accent3>
-      <a:accent4>
-        <a:srgbClr val="0F9ED5"/>
-      </a:accent4>
-      <a:accent5>
-        <a:srgbClr val="A02B93"/>
-      </a:accent5>
-      <a:accent6>
-        <a:srgbClr val="4EA72E"/>
-      </a:accent6>
-      <a:hlink>
-        <a:srgbClr val="467886"/>
-      </a:hlink>
-      <a:folHlink>
-        <a:srgbClr val="96607D"/>
-      </a:folHlink>
-    </a:clrScheme>
-    <a:fontScheme name="Office">
-      <a:majorFont>
-        <a:latin typeface="Aptos Display" panose="02110004020202020204"/>
-        <a:ea typeface=""/>
-        <a:cs typeface=""/>
-        <a:font script="Jpan" typeface="游ゴシック Light"/>
-        <a:font script="Hang" typeface="맑은 고딕"/>
-        <a:font script="Hans" typeface="等线 Light"/>
-        <a:font script="Hant" typeface="新細明體"/>
-        <a:font script="Arab" typeface="Times New Roman"/>
-        <a:font script="Hebr" typeface="Times New Roman"/>
-        <a:font script="Thai" typeface="Angsana New"/>
-        <a:font script="Ethi" typeface="Nyala"/>
-        <a:font script="Beng" typeface="Vrinda"/>
-        <a:font script="Gujr" typeface="Shruti"/>
-        <a:font script="Khmr" typeface="MoolBoran"/>
-        <a:font script="Knda" typeface="Tunga"/>
-        <a:font script="Guru" typeface="Raavi"/>
-        <a:font script="Cans" typeface="Euphemia"/>
-        <a:font script="Cher" typeface="Plantagenet Cherokee"/>
-        <a:font script="Yiii" typeface="Microsoft Yi Baiti"/>
-        <a:font script="Tibt" typeface="Microsoft Himalaya"/>
-        <a:font script="Thaa" typeface="MV Boli"/>
-        <a:font script="Deva" typeface="Mangal"/>
-        <a:font script="Telu" typeface="Gautami"/>
-        <a:font script="Taml" typeface="Latha"/>
-        <a:font script="Syrc" typeface="Estrangelo Edessa"/>
-        <a:font script="Orya" typeface="Kalinga"/>
-        <a:font script="Mlym" typeface="Kartika"/>
-        <a:font script="Laoo" typeface="DokChampa"/>
-        <a:font script="Sinh" typeface="Iskoola Pota"/>
-        <a:font script="Mong" typeface="Mongolian Baiti"/>
-        <a:font script="Viet" typeface="Times New Roman"/>
-        <a:font script="Uigh" typeface="Microsoft Uighur"/>
-        <a:font script="Geor" typeface="Sylfaen"/>
-        <a:font script="Armn" typeface="Arial"/>
-        <a:font script="Bugi" typeface="Leelawadee UI"/>
-        <a:font script="Bopo" typeface="Microsoft JhengHei"/>
-        <a:font script="Java" typeface="Javanese Text"/>
-        <a:font script="Lisu" typeface="Segoe UI"/>
-        <a:font script="Mymr" typeface="Myanmar Text"/>
-        <a:font script="Nkoo" typeface="Ebrima"/>
-        <a:font script="Olck" typeface="Nirmala UI"/>
-        <a:font script="Osma" typeface="Ebrima"/>
-        <a:font script="Phag" typeface="Phagspa"/>
-        <a:font script="Syrn" typeface="Estrangelo Edessa"/>
-        <a:font script="Syrj" typeface="Estrangelo Edessa"/>
-        <a:font script="Syre" typeface="Estrangelo Edessa"/>
-        <a:font script="Sora" typeface="Nirmala UI"/>
-        <a:font script="Tale" typeface="Microsoft Tai Le"/>
-        <a:font script="Talu" typeface="Microsoft New Tai Lue"/>
-        <a:font script="Tfng" typeface="Ebrima"/>
-      </a:majorFont>
-      <a:minorFont>
-        <a:latin typeface="Aptos" panose="02110004020202020204"/>
-        <a:ea typeface=""/>
-        <a:cs typeface=""/>
-        <a:font script="Jpan" typeface="游ゴシック"/>
-        <a:font script="Hang" typeface="맑은 고딕"/>
-        <a:font script="Hans" typeface="等线"/>
-        <a:font script="Hant" typeface="新細明體"/>
-        <a:font script="Arab" typeface="Arial"/>
-        <a:font script="Hebr" typeface="Arial"/>
-        <a:font script="Thai" typeface="Cordia New"/>
-        <a:font script="Ethi" typeface="Nyala"/>
-        <a:font script="Beng" typeface="Vrinda"/>
-        <a:font script="Gujr" typeface="Shruti"/>
-        <a:font script="Khmr" typeface="DaunPenh"/>
-        <a:font script="Knda" typeface="Tunga"/>
-        <a:font script="Guru" typeface="Raavi"/>
-        <a:font script="Cans" typeface="Euphemia"/>
-        <a:font script="Cher" typeface="Plantagenet Cherokee"/>
-        <a:font script="Yiii" typeface="Microsoft Yi Baiti"/>
-        <a:font script="Tibt" typeface="Microsoft Himalaya"/>
-        <a:font script="Thaa" typeface="MV Boli"/>
-        <a:font script="Deva" typeface="Mangal"/>
-        <a:font script="Telu" typeface="Gautami"/>
-        <a:font script="Taml" typeface="Latha"/>
-        <a:font script="Syrc" typeface="Estrangelo Edessa"/>
-        <a:font script="Orya" typeface="Kalinga"/>
-        <a:font script="Mlym" typeface="Kartika"/>
-        <a:font script="Laoo" typeface="DokChampa"/>
-        <a:font script="Sinh" typeface="Iskoola Pota"/>
-        <a:font script="Mong" typeface="Mongolian Baiti"/>
-        <a:font script="Viet" typeface="Arial"/>
-        <a:font script="Uigh" typeface="Microsoft Uighur"/>
-        <a:font script="Geor" typeface="Sylfaen"/>
-        <a:font script="Armn" typeface="Arial"/>
-        <a:font script="Bugi" typeface="Leelawadee UI"/>
-        <a:font script="Bopo" typeface="Microsoft JhengHei"/>
-        <a:font script="Java" typeface="Javanese Text"/>
-        <a:font script="Lisu" typeface="Segoe UI"/>
-        <a:font script="Mymr" typeface="Myanmar Text"/>
-        <a:font script="Nkoo" typeface="Ebrima"/>
-        <a:font script="Olck" typeface="Nirmala UI"/>
-        <a:font script="Osma" typeface="Ebrima"/>
-        <a:font script="Phag" typeface="Phagspa"/>
-        <a:font script="Syrn" typeface="Estrangelo Edessa"/>
-        <a:font script="Syrj" typeface="Estrangelo Edessa"/>
-        <a:font script="Syre" typeface="Estrangelo Edessa"/>
-        <a:font script="Sora" typeface="Nirmala UI"/>
-        <a:font script="Tale" typeface="Microsoft Tai Le"/>
-        <a:font script="Talu" typeface="Microsoft New Tai Lue"/>
-        <a:font script="Tfng" typeface="Ebrima"/>
-      </a:minorFont>
-    </a:fontScheme>
-    <a:fmtScheme name="Office">
-      <a:fillStyleLst>
-        <a:solidFill>
-          <a:schemeClr val="phClr"/>
-        </a:solidFill>
-        <a:gradFill rotWithShape="1">
-          <a:gsLst>
-            <a:gs pos="0">
-              <a:schemeClr val="phClr">
-                <a:lumMod val="110000"/>
-                <a:satMod val="105000"/>
-                <a:tint val="67000"/>
-              </a:schemeClr>
-            </a:gs>
-            <a:gs pos="50000">
-              <a:schemeClr val="phClr">
-                <a:lumMod val="105000"/>
-                <a:satMod val="103000"/>
-                <a:tint val="73000"/>
-              </a:schemeClr>
-            </a:gs>
-            <a:gs pos="100000">
-              <a:schemeClr val="phClr">
-                <a:lumMod val="105000"/>
-                <a:satMod val="109000"/>
-                <a:tint val="81000"/>
-              </a:schemeClr>
-            </a:gs>
-          </a:gsLst>
-          <a:lin ang="5400000" scaled="0"/>
-        </a:gradFill>
-        <a:gradFill rotWithShape="1">
-          <a:gsLst>
-            <a:gs pos="0">
-              <a:schemeClr val="phClr">
-                <a:satMod val="103000"/>
-                <a:lumMod val="102000"/>
-                <a:tint val="94000"/>
-              </a:schemeClr>
-            </a:gs>
-            <a:gs pos="50000">
-              <a:schemeClr val="phClr">
-                <a:satMod val="110000"/>
-                <a:lumMod val="100000"/>
-                <a:shade val="100000"/>
-              </a:schemeClr>
-            </a:gs>
-            <a:gs pos="100000">
-              <a:schemeClr val="phClr">
-                <a:lumMod val="99000"/>
-                <a:satMod val="120000"/>
-                <a:shade val="78000"/>
-              </a:schemeClr>
-            </a:gs>
-          </a:gsLst>
-          <a:lin ang="5400000" scaled="0"/>
-        </a:gradFill>
-      </a:fillStyleLst>
-      <a:lnStyleLst>
-        <a:ln w="12700" cap="flat" cmpd="sng" algn="ctr">
-          <a:solidFill>
-            <a:schemeClr val="phClr"/>
-          </a:solidFill>
-          <a:prstDash val="solid"/>
-          <a:miter lim="800000"/>
-        </a:ln>
-        <a:ln w="19050" cap="flat" cmpd="sng" algn="ctr">
-          <a:solidFill>
-            <a:schemeClr val="phClr"/>
-          </a:solidFill>
-          <a:prstDash val="solid"/>
-          <a:miter lim="800000"/>
-        </a:ln>
-        <a:ln w="25400" cap="flat" cmpd="sng" algn="ctr">
-          <a:solidFill>
-            <a:schemeClr val="phClr"/>
-          </a:solidFill>
-          <a:prstDash val="solid"/>
-          <a:miter lim="800000"/>
-        </a:ln>
-      </a:lnStyleLst>
-      <a:effectStyleLst>
-        <a:effectStyle>
-          <a:effectLst/>
-        </a:effectStyle>
-        <a:effectStyle>
-          <a:effectLst/>
-        </a:effectStyle>
-        <a:effectStyle>
-          <a:effectLst>
-            <a:outerShdw blurRad="57150" dist="19050" dir="5400000" algn="ctr" rotWithShape="0">
-              <a:srgbClr val="000000">
-                <a:alpha val="63000"/>
-              </a:srgbClr>
-            </a:outerShdw>
-          </a:effectLst>
-        </a:effectStyle>
-      </a:effectStyleLst>
-      <a:bgFillStyleLst>
-        <a:solidFill>
-          <a:schemeClr val="phClr"/>
-        </a:solidFill>
-        <a:solidFill>
-          <a:schemeClr val="phClr">
-            <a:tint val="95000"/>
-            <a:satMod val="170000"/>
-          </a:schemeClr>
-        </a:solidFill>
-        <a:gradFill rotWithShape="1">
-          <a:gsLst>
-            <a:gs pos="0">
-              <a:schemeClr val="phClr">
-                <a:tint val="93000"/>
-                <a:satMod val="150000"/>
-                <a:shade val="98000"/>
-                <a:lumMod val="102000"/>
-              </a:schemeClr>
-            </a:gs>
-            <a:gs pos="50000">
-              <a:schemeClr val="phClr">
-                <a:tint val="98000"/>
-                <a:satMod val="130000"/>
-                <a:shade val="90000"/>
-                <a:lumMod val="103000"/>
-              </a:schemeClr>
-            </a:gs>
-            <a:gs pos="100000">
-              <a:schemeClr val="phClr">
-                <a:shade val="63000"/>
-                <a:satMod val="120000"/>
-              </a:schemeClr>
-            </a:gs>
-          </a:gsLst>
-          <a:lin ang="5400000" scaled="0"/>
-        </a:gradFill>
-      </a:bgFillStyleLst>
-    </a:fmtScheme>
-  </a:themeElements>
-  <a:objectDefaults>
-    <a:lnDef>
-      <a:spPr/>
-      <a:bodyPr/>
-      <a:lstStyle/>
-      <a:style>
-        <a:lnRef idx="2">
-          <a:schemeClr val="accent1"/>
-        </a:lnRef>
-        <a:fillRef idx="0">
-          <a:schemeClr val="accent1"/>
-        </a:fillRef>
-        <a:effectRef idx="1">
-          <a:schemeClr val="accent1"/>
-        </a:effectRef>
-        <a:fontRef idx="minor">
-          <a:schemeClr val="tx1"/>
-        </a:fontRef>
-      </a:style>
-    </a:lnDef>
-  </a:objectDefaults>
-  <a:extraClrSchemeLst/>
-  <a:extLst>
-    <a:ext uri="{05A4C25C-085E-4340-85A3-A5531E510DB2}">
-      <thm15:themeFamily xmlns:thm15="http://schemas.microsoft.com/office/thememl/2012/main" name="Office Theme" id="{2E142A2C-CD16-42D6-873A-C26D2A0506FA}" vid="{1BDDFF52-6CD6-40A5-AB3C-68EB2F1E4D0A}"/>
-    </a:ext>
-  </a:extLst>
-</a:theme>
 </file>
--- a/cours/Module TIC/Département Français/Master 1 - Langue et Culture/Cours_TIC_10_Services_Internet_FR.pptx
+++ b/cours/Module TIC/Département Français/Master 1 - Langue et Culture/Cours_TIC_10_Services_Internet_FR.pptx
@@ -2850,7 +2850,7 @@
           <a:solidFill>
             <a:schemeClr val="tx1"/>
           </a:solidFill>
-          <a:latin typeface="+mj-lt"/>
+          <a:latin typeface="Poppins"/>
           <a:ea typeface="+mj-ea"/>
           <a:cs typeface="+mj-cs"/>
         </a:defRPr>
@@ -2867,7 +2867,7 @@
           <a:solidFill>
             <a:schemeClr val="tx1"/>
           </a:solidFill>
-          <a:latin typeface="+mn-lt"/>
+          <a:latin typeface="Poppins"/>
           <a:ea typeface="+mn-ea"/>
           <a:cs typeface="+mn-cs"/>
         </a:defRPr>
@@ -2882,7 +2882,7 @@
           <a:solidFill>
             <a:schemeClr val="tx1"/>
           </a:solidFill>
-          <a:latin typeface="+mn-lt"/>
+          <a:latin typeface="Poppins"/>
           <a:ea typeface="+mn-ea"/>
           <a:cs typeface="+mn-cs"/>
         </a:defRPr>
@@ -2897,7 +2897,7 @@
           <a:solidFill>
             <a:schemeClr val="tx1"/>
           </a:solidFill>
-          <a:latin typeface="+mn-lt"/>
+          <a:latin typeface="Poppins"/>
           <a:ea typeface="+mn-ea"/>
           <a:cs typeface="+mn-cs"/>
         </a:defRPr>
@@ -2912,7 +2912,7 @@
           <a:solidFill>
             <a:schemeClr val="tx1"/>
           </a:solidFill>
-          <a:latin typeface="+mn-lt"/>
+          <a:latin typeface="Poppins"/>
           <a:ea typeface="+mn-ea"/>
           <a:cs typeface="+mn-cs"/>
         </a:defRPr>
@@ -2927,7 +2927,7 @@
           <a:solidFill>
             <a:schemeClr val="tx1"/>
           </a:solidFill>
-          <a:latin typeface="+mn-lt"/>
+          <a:latin typeface="Poppins"/>
           <a:ea typeface="+mn-ea"/>
           <a:cs typeface="+mn-cs"/>
         </a:defRPr>
@@ -2942,7 +2942,7 @@
           <a:solidFill>
             <a:schemeClr val="tx1"/>
           </a:solidFill>
-          <a:latin typeface="+mn-lt"/>
+          <a:latin typeface="Poppins"/>
           <a:ea typeface="+mn-ea"/>
           <a:cs typeface="+mn-cs"/>
         </a:defRPr>
@@ -2957,7 +2957,7 @@
           <a:solidFill>
             <a:schemeClr val="tx1"/>
           </a:solidFill>
-          <a:latin typeface="+mn-lt"/>
+          <a:latin typeface="Poppins"/>
           <a:ea typeface="+mn-ea"/>
           <a:cs typeface="+mn-cs"/>
         </a:defRPr>
@@ -2972,7 +2972,7 @@
           <a:solidFill>
             <a:schemeClr val="tx1"/>
           </a:solidFill>
-          <a:latin typeface="+mn-lt"/>
+          <a:latin typeface="Poppins"/>
           <a:ea typeface="+mn-ea"/>
           <a:cs typeface="+mn-cs"/>
         </a:defRPr>
@@ -2987,7 +2987,7 @@
           <a:solidFill>
             <a:schemeClr val="tx1"/>
           </a:solidFill>
-          <a:latin typeface="+mn-lt"/>
+          <a:latin typeface="Poppins"/>
           <a:ea typeface="+mn-ea"/>
           <a:cs typeface="+mn-cs"/>
         </a:defRPr>
@@ -3002,7 +3002,7 @@
           <a:solidFill>
             <a:schemeClr val="tx1"/>
           </a:solidFill>
-          <a:latin typeface="+mn-lt"/>
+          <a:latin typeface="Poppins"/>
           <a:ea typeface="+mn-ea"/>
           <a:cs typeface="+mn-cs"/>
         </a:defRPr>
@@ -3012,7 +3012,7 @@
           <a:solidFill>
             <a:schemeClr val="tx1"/>
           </a:solidFill>
-          <a:latin typeface="+mn-lt"/>
+          <a:latin typeface="Poppins"/>
           <a:ea typeface="+mn-ea"/>
           <a:cs typeface="+mn-cs"/>
         </a:defRPr>
@@ -3022,7 +3022,7 @@
           <a:solidFill>
             <a:schemeClr val="tx1"/>
           </a:solidFill>
-          <a:latin typeface="+mn-lt"/>
+          <a:latin typeface="Poppins"/>
           <a:ea typeface="+mn-ea"/>
           <a:cs typeface="+mn-cs"/>
         </a:defRPr>
@@ -3032,7 +3032,7 @@
           <a:solidFill>
             <a:schemeClr val="tx1"/>
           </a:solidFill>
-          <a:latin typeface="+mn-lt"/>
+          <a:latin typeface="Poppins"/>
           <a:ea typeface="+mn-ea"/>
           <a:cs typeface="+mn-cs"/>
         </a:defRPr>
@@ -3042,7 +3042,7 @@
           <a:solidFill>
             <a:schemeClr val="tx1"/>
           </a:solidFill>
-          <a:latin typeface="+mn-lt"/>
+          <a:latin typeface="Poppins"/>
           <a:ea typeface="+mn-ea"/>
           <a:cs typeface="+mn-cs"/>
         </a:defRPr>
@@ -3052,7 +3052,7 @@
           <a:solidFill>
             <a:schemeClr val="tx1"/>
           </a:solidFill>
-          <a:latin typeface="+mn-lt"/>
+          <a:latin typeface="Poppins"/>
           <a:ea typeface="+mn-ea"/>
           <a:cs typeface="+mn-cs"/>
         </a:defRPr>
@@ -3062,7 +3062,7 @@
           <a:solidFill>
             <a:schemeClr val="tx1"/>
           </a:solidFill>
-          <a:latin typeface="+mn-lt"/>
+          <a:latin typeface="Poppins"/>
           <a:ea typeface="+mn-ea"/>
           <a:cs typeface="+mn-cs"/>
         </a:defRPr>
@@ -3072,7 +3072,7 @@
           <a:solidFill>
             <a:schemeClr val="tx1"/>
           </a:solidFill>
-          <a:latin typeface="+mn-lt"/>
+          <a:latin typeface="Poppins"/>
           <a:ea typeface="+mn-ea"/>
           <a:cs typeface="+mn-cs"/>
         </a:defRPr>
@@ -3082,7 +3082,7 @@
           <a:solidFill>
             <a:schemeClr val="tx1"/>
           </a:solidFill>
-          <a:latin typeface="+mn-lt"/>
+          <a:latin typeface="Poppins"/>
           <a:ea typeface="+mn-ea"/>
           <a:cs typeface="+mn-cs"/>
         </a:defRPr>
@@ -3097,9 +3097,7 @@
   <p:cSld>
     <p:bg>
       <p:bgPr>
-        <a:solidFill>
-          <a:srgbClr val="1A5C33"/>
-        </a:solidFill>
+        <a:solidFill>val="006847"/&gt;</a:solidFill>
         <a:effectLst/>
       </p:bgPr>
     </p:bg>
@@ -3134,9 +3132,7 @@
           <a:p>
             <a:pPr algn="ctr">
               <a:defRPr sz="3200" b="1">
-                <a:solidFill>
-                  <a:srgbClr val="FFFFFF"/>
-                </a:solidFill>
+                <a:solidFill>val="FFFFFF"/&gt;</a:solidFill>
               </a:defRPr>
             </a:pPr>
             <a:r>
@@ -3169,9 +3165,7 @@
           <a:p>
             <a:pPr algn="ctr">
               <a:defRPr sz="2000" b="0">
-                <a:solidFill>
-                  <a:srgbClr val="C5D9C7"/>
-                </a:solidFill>
+                <a:solidFill>val="DFE5EA"/&gt;</a:solidFill>
               </a:defRPr>
             </a:pPr>
             <a:r>
@@ -3204,13 +3198,52 @@
           <a:p>
             <a:pPr algn="ctr">
               <a:defRPr sz="1600" b="0">
+                <a:solidFill>val="B7C9BE"/&gt;</a:solidFill>
+              </a:defRPr>
+            </a:pPr>
+            <a:r>
+              <a:t>Université de Mostaganem — MCB</a:t>
+            </a:r>
+          </a:p>
+        </p:txBody>
+      </p:sp>
+      <p:sp>
+        <p:nvSpPr>
+          <p:cNvPr id="990001" name="Pied de page FLE"/>
+          <p:cNvSpPr>
+            <a:spLocks noGrp="1"/>
+          </p:cNvSpPr>
+          <p:nvPr/>
+        </p:nvSpPr>
+        <p:spPr>
+          <a:xfrm>
+            <a:off x="2880360" y="914400"/>
+            <a:ext cx="4572000" cy="274320"/>
+          </a:xfrm>
+          <a:prstGeom prst="rect">
+            <a:avLst/>
+          </a:prstGeom>
+        </p:spPr>
+        <p:txBody>
+          <a:bodyPr anchor="b"/>
+          <a:lstStyle/>
+          <a:p>
+            <a:pPr algn="r">
+              <a:defRPr sz="900">
                 <a:solidFill>
-                  <a:srgbClr val="A0CFA0"/>
+                  <a:srgbClr val="9AA7B6"/>
                 </a:solidFill>
-              </a:defRPr>
-            </a:pPr>
-            <a:r>
-              <a:t>Université de Mostaganem — MCB</a:t>
+                <a:latin typeface="Poppins"/>
+              </a:defRPr>
+            </a:pPr>
+            <a:r>
+              <a:rPr lang="fr-FR" sz="900">
+                <a:solidFill>
+                  <a:srgbClr val="9AA7B6"/>
+                </a:solidFill>
+                <a:latin typeface="Poppins"/>
+              </a:rPr>
+              <a:t>Université de Mostaganem — Dr. Madani BELACEL</a:t>
             </a:r>
           </a:p>
         </p:txBody>
@@ -3228,9 +3261,7 @@
   <p:cSld>
     <p:bg>
       <p:bgPr>
-        <a:solidFill>
-          <a:srgbClr val="FFFFFF"/>
-        </a:solidFill>
+        <a:solidFill>val="FFFFFF"/&gt;</a:solidFill>
         <a:effectLst/>
       </p:bgPr>
     </p:bg>
@@ -3255,9 +3286,7 @@
           <a:prstGeom prst="rect">
             <a:avLst/>
           </a:prstGeom>
-          <a:solidFill>
-            <a:srgbClr val="2C6E49"/>
-          </a:solidFill>
+          <a:solidFill>val="00875B"/&gt;</a:solidFill>
           <a:ln>
             <a:noFill/>
           </a:ln>
@@ -3308,9 +3337,7 @@
           <a:p>
             <a:pPr algn="l">
               <a:defRPr sz="2200" b="1">
-                <a:solidFill>
-                  <a:srgbClr val="1A5C33"/>
-                </a:solidFill>
+                <a:solidFill>val="006847"/&gt;</a:solidFill>
               </a:defRPr>
             </a:pPr>
             <a:r>
@@ -3346,9 +3373,7 @@
                 <a:spcPts val="600"/>
               </a:spcAft>
               <a:defRPr sz="1400">
-                <a:solidFill>
-                  <a:srgbClr val="222222"/>
-                </a:solidFill>
+                <a:solidFill>val="22344A"/&gt;</a:solidFill>
               </a:defRPr>
             </a:pPr>
             <a:r>
@@ -3361,9 +3386,7 @@
                 <a:spcPts val="600"/>
               </a:spcAft>
               <a:defRPr sz="1400">
-                <a:solidFill>
-                  <a:srgbClr val="222222"/>
-                </a:solidFill>
+                <a:solidFill>val="22344A"/&gt;</a:solidFill>
               </a:defRPr>
             </a:pPr>
             <a:r>
@@ -3376,9 +3399,7 @@
                 <a:spcPts val="600"/>
               </a:spcAft>
               <a:defRPr sz="1400">
-                <a:solidFill>
-                  <a:srgbClr val="222222"/>
-                </a:solidFill>
+                <a:solidFill>val="22344A"/&gt;</a:solidFill>
               </a:defRPr>
             </a:pPr>
             <a:r>
@@ -3391,9 +3412,7 @@
                 <a:spcPts val="600"/>
               </a:spcAft>
               <a:defRPr sz="1400">
-                <a:solidFill>
-                  <a:srgbClr val="222222"/>
-                </a:solidFill>
+                <a:solidFill>val="22344A"/&gt;</a:solidFill>
               </a:defRPr>
             </a:pPr>
             <a:r>
@@ -3406,9 +3425,7 @@
                 <a:spcPts val="600"/>
               </a:spcAft>
               <a:defRPr sz="1400">
-                <a:solidFill>
-                  <a:srgbClr val="222222"/>
-                </a:solidFill>
+                <a:solidFill>val="22344A"/&gt;</a:solidFill>
               </a:defRPr>
             </a:pPr>
             <a:r>
@@ -3421,9 +3438,7 @@
                 <a:spcPts val="600"/>
               </a:spcAft>
               <a:defRPr sz="1400">
-                <a:solidFill>
-                  <a:srgbClr val="222222"/>
-                </a:solidFill>
+                <a:solidFill>val="22344A"/&gt;</a:solidFill>
               </a:defRPr>
             </a:pPr>
             <a:r>
@@ -3436,9 +3451,7 @@
                 <a:spcPts val="600"/>
               </a:spcAft>
               <a:defRPr sz="1400">
-                <a:solidFill>
-                  <a:srgbClr val="222222"/>
-                </a:solidFill>
+                <a:solidFill>val="22344A"/&gt;</a:solidFill>
               </a:defRPr>
             </a:pPr>
             <a:r>
@@ -3451,9 +3464,7 @@
                 <a:spcPts val="600"/>
               </a:spcAft>
               <a:defRPr sz="1400">
-                <a:solidFill>
-                  <a:srgbClr val="222222"/>
-                </a:solidFill>
+                <a:solidFill>val="22344A"/&gt;</a:solidFill>
               </a:defRPr>
             </a:pPr>
             <a:r>
@@ -3466,9 +3477,7 @@
                 <a:spcPts val="600"/>
               </a:spcAft>
               <a:defRPr sz="1400">
-                <a:solidFill>
-                  <a:srgbClr val="222222"/>
-                </a:solidFill>
+                <a:solidFill>val="22344A"/&gt;</a:solidFill>
               </a:defRPr>
             </a:pPr>
             <a:r>
@@ -3481,13 +3490,52 @@
                 <a:spcPts val="600"/>
               </a:spcAft>
               <a:defRPr sz="1400">
+                <a:solidFill>val="22344A"/&gt;</a:solidFill>
+              </a:defRPr>
+            </a:pPr>
+            <a:r>
+              <a:t>• Synthèse module TIC 01–10</a:t>
+            </a:r>
+          </a:p>
+        </p:txBody>
+      </p:sp>
+      <p:sp>
+        <p:nvSpPr>
+          <p:cNvPr id="990001" name="Pied de page FLE"/>
+          <p:cNvSpPr>
+            <a:spLocks noGrp="1"/>
+          </p:cNvSpPr>
+          <p:nvPr/>
+        </p:nvSpPr>
+        <p:spPr>
+          <a:xfrm>
+            <a:off x="-228600" y="6400800"/>
+            <a:ext cx="109728" cy="274320"/>
+          </a:xfrm>
+          <a:prstGeom prst="rect">
+            <a:avLst/>
+          </a:prstGeom>
+        </p:spPr>
+        <p:txBody>
+          <a:bodyPr anchor="b"/>
+          <a:lstStyle/>
+          <a:p>
+            <a:pPr algn="r">
+              <a:defRPr sz="900">
                 <a:solidFill>
-                  <a:srgbClr val="222222"/>
+                  <a:srgbClr val="9AA7B6"/>
                 </a:solidFill>
-              </a:defRPr>
-            </a:pPr>
-            <a:r>
-              <a:t>• Synthèse module TIC 01–10</a:t>
+                <a:latin typeface="Poppins"/>
+              </a:defRPr>
+            </a:pPr>
+            <a:r>
+              <a:rPr lang="fr-FR" sz="900">
+                <a:solidFill>
+                  <a:srgbClr val="9AA7B6"/>
+                </a:solidFill>
+                <a:latin typeface="Poppins"/>
+              </a:rPr>
+              <a:t>Université de Mostaganem — Dr. Madani BELACEL</a:t>
             </a:r>
           </a:p>
         </p:txBody>
@@ -3505,9 +3553,7 @@
   <p:cSld>
     <p:bg>
       <p:bgPr>
-        <a:solidFill>
-          <a:srgbClr val="FFFFFF"/>
-        </a:solidFill>
+        <a:solidFill>val="FFFFFF"/&gt;</a:solidFill>
         <a:effectLst/>
       </p:bgPr>
     </p:bg>
@@ -3532,9 +3578,7 @@
           <a:prstGeom prst="rect">
             <a:avLst/>
           </a:prstGeom>
-          <a:solidFill>
-            <a:srgbClr val="2C6E49"/>
-          </a:solidFill>
+          <a:solidFill>val="00875B"/&gt;</a:solidFill>
           <a:ln>
             <a:noFill/>
           </a:ln>
@@ -3585,9 +3629,7 @@
           <a:p>
             <a:pPr algn="l">
               <a:defRPr sz="2200" b="1">
-                <a:solidFill>
-                  <a:srgbClr val="1A5C33"/>
-                </a:solidFill>
+                <a:solidFill>val="006847"/&gt;</a:solidFill>
               </a:defRPr>
             </a:pPr>
             <a:r>
@@ -3623,9 +3665,7 @@
                 <a:spcPts val="600"/>
               </a:spcAft>
               <a:defRPr sz="1400">
-                <a:solidFill>
-                  <a:srgbClr val="222222"/>
-                </a:solidFill>
+                <a:solidFill>val="22344A"/&gt;</a:solidFill>
               </a:defRPr>
             </a:pPr>
             <a:r>
@@ -3638,9 +3678,7 @@
                 <a:spcPts val="600"/>
               </a:spcAft>
               <a:defRPr sz="1400">
-                <a:solidFill>
-                  <a:srgbClr val="222222"/>
-                </a:solidFill>
+                <a:solidFill>val="22344A"/&gt;</a:solidFill>
               </a:defRPr>
             </a:pPr>
             <a:r>
@@ -3661,13 +3699,52 @@
                 <a:spcPts val="600"/>
               </a:spcAft>
               <a:defRPr sz="1400">
+                <a:solidFill>val="22344A"/&gt;</a:solidFill>
+              </a:defRPr>
+            </a:pPr>
+            <a:r>
+              <a:t>• Contexte algérien: la généralisation des plateformes académiques (HAL Mostaganem, SJD) et l'obligation de dépôt des mémoires de Master dans les bibliothèques numériques institutionnelles imposent une maîtrise minimale de ces outils.</a:t>
+            </a:r>
+          </a:p>
+        </p:txBody>
+      </p:sp>
+      <p:sp>
+        <p:nvSpPr>
+          <p:cNvPr id="990001" name="Pied de page FLE"/>
+          <p:cNvSpPr>
+            <a:spLocks noGrp="1"/>
+          </p:cNvSpPr>
+          <p:nvPr/>
+        </p:nvSpPr>
+        <p:spPr>
+          <a:xfrm>
+            <a:off x="-228600" y="6400800"/>
+            <a:ext cx="109728" cy="274320"/>
+          </a:xfrm>
+          <a:prstGeom prst="rect">
+            <a:avLst/>
+          </a:prstGeom>
+        </p:spPr>
+        <p:txBody>
+          <a:bodyPr anchor="b"/>
+          <a:lstStyle/>
+          <a:p>
+            <a:pPr algn="r">
+              <a:defRPr sz="900">
                 <a:solidFill>
-                  <a:srgbClr val="222222"/>
+                  <a:srgbClr val="9AA7B6"/>
                 </a:solidFill>
-              </a:defRPr>
-            </a:pPr>
-            <a:r>
-              <a:t>• Contexte algérien: la généralisation des plateformes académiques (HAL Mostaganem, SJD) et l'obligation de dépôt des mémoires de Master dans les bibliothèques numériques institutionnelles imposent une maîtrise minimale de ces outils.</a:t>
+                <a:latin typeface="Poppins"/>
+              </a:defRPr>
+            </a:pPr>
+            <a:r>
+              <a:rPr lang="fr-FR" sz="900">
+                <a:solidFill>
+                  <a:srgbClr val="9AA7B6"/>
+                </a:solidFill>
+                <a:latin typeface="Poppins"/>
+              </a:rPr>
+              <a:t>Université de Mostaganem — Dr. Madani BELACEL</a:t>
             </a:r>
           </a:p>
         </p:txBody>
@@ -3685,9 +3762,7 @@
   <p:cSld>
     <p:bg>
       <p:bgPr>
-        <a:solidFill>
-          <a:srgbClr val="FFFFFF"/>
-        </a:solidFill>
+        <a:solidFill>val="FFFFFF"/&gt;</a:solidFill>
         <a:effectLst/>
       </p:bgPr>
     </p:bg>
@@ -3712,9 +3787,7 @@
           <a:prstGeom prst="rect">
             <a:avLst/>
           </a:prstGeom>
-          <a:solidFill>
-            <a:srgbClr val="2C6E49"/>
-          </a:solidFill>
+          <a:solidFill>val="00875B"/&gt;</a:solidFill>
           <a:ln>
             <a:noFill/>
           </a:ln>
@@ -3765,9 +3838,7 @@
           <a:p>
             <a:pPr algn="l">
               <a:defRPr sz="2200" b="1">
-                <a:solidFill>
-                  <a:srgbClr val="1A5C33"/>
-                </a:solidFill>
+                <a:solidFill>val="006847"/&gt;</a:solidFill>
               </a:defRPr>
             </a:pPr>
             <a:r>
@@ -3803,9 +3874,7 @@
                 <a:spcPts val="600"/>
               </a:spcAft>
               <a:defRPr sz="1400">
-                <a:solidFill>
-                  <a:srgbClr val="222222"/>
-                </a:solidFill>
+                <a:solidFill>val="22344A"/&gt;</a:solidFill>
               </a:defRPr>
             </a:pPr>
             <a:r>
@@ -3818,9 +3887,7 @@
                 <a:spcPts val="600"/>
               </a:spcAft>
               <a:defRPr sz="1400">
-                <a:solidFill>
-                  <a:srgbClr val="222222"/>
-                </a:solidFill>
+                <a:solidFill>val="22344A"/&gt;</a:solidFill>
               </a:defRPr>
             </a:pPr>
             <a:r>
@@ -3833,9 +3900,7 @@
                 <a:spcPts val="600"/>
               </a:spcAft>
               <a:defRPr sz="1400">
-                <a:solidFill>
-                  <a:srgbClr val="222222"/>
-                </a:solidFill>
+                <a:solidFill>val="22344A"/&gt;</a:solidFill>
               </a:defRPr>
             </a:pPr>
             <a:r>
@@ -3848,9 +3913,7 @@
                 <a:spcPts val="600"/>
               </a:spcAft>
               <a:defRPr sz="1400">
-                <a:solidFill>
-                  <a:srgbClr val="222222"/>
-                </a:solidFill>
+                <a:solidFill>val="22344A"/&gt;</a:solidFill>
               </a:defRPr>
             </a:pPr>
             <a:r>
@@ -3863,9 +3926,7 @@
                 <a:spcPts val="600"/>
               </a:spcAft>
               <a:defRPr sz="1400">
-                <a:solidFill>
-                  <a:srgbClr val="222222"/>
-                </a:solidFill>
+                <a:solidFill>val="22344A"/&gt;</a:solidFill>
               </a:defRPr>
             </a:pPr>
             <a:r>
@@ -3886,9 +3947,7 @@
                 <a:spcPts val="600"/>
               </a:spcAft>
               <a:defRPr sz="1400">
-                <a:solidFill>
-                  <a:srgbClr val="222222"/>
-                </a:solidFill>
+                <a:solidFill>val="22344A"/&gt;</a:solidFill>
               </a:defRPr>
             </a:pPr>
             <a:r>
@@ -3901,13 +3960,52 @@
                 <a:spcPts val="600"/>
               </a:spcAft>
               <a:defRPr sz="1400">
+                <a:solidFill>val="22344A"/&gt;</a:solidFill>
+              </a:defRPr>
+            </a:pPr>
+            <a:r>
+              <a:t>• Pourquoi en Master ?Publier un mémoire ou un article de synthèse = attribution d'un ORCID dès le Master. C'est une pratique de plus en plus courante (recommandée par le MESRS algérien).</a:t>
+            </a:r>
+          </a:p>
+        </p:txBody>
+      </p:sp>
+      <p:sp>
+        <p:nvSpPr>
+          <p:cNvPr id="990001" name="Pied de page FLE"/>
+          <p:cNvSpPr>
+            <a:spLocks noGrp="1"/>
+          </p:cNvSpPr>
+          <p:nvPr/>
+        </p:nvSpPr>
+        <p:spPr>
+          <a:xfrm>
+            <a:off x="-228600" y="6400800"/>
+            <a:ext cx="109728" cy="274320"/>
+          </a:xfrm>
+          <a:prstGeom prst="rect">
+            <a:avLst/>
+          </a:prstGeom>
+        </p:spPr>
+        <p:txBody>
+          <a:bodyPr anchor="b"/>
+          <a:lstStyle/>
+          <a:p>
+            <a:pPr algn="r">
+              <a:defRPr sz="900">
                 <a:solidFill>
-                  <a:srgbClr val="222222"/>
+                  <a:srgbClr val="9AA7B6"/>
                 </a:solidFill>
-              </a:defRPr>
-            </a:pPr>
-            <a:r>
-              <a:t>• Pourquoi en Master ?Publier un mémoire ou un article de synthèse = attribution d'un ORCID dès le Master. C'est une pratique de plus en plus courante (recommandée par le MESRS algérien).</a:t>
+                <a:latin typeface="Poppins"/>
+              </a:defRPr>
+            </a:pPr>
+            <a:r>
+              <a:rPr lang="fr-FR" sz="900">
+                <a:solidFill>
+                  <a:srgbClr val="9AA7B6"/>
+                </a:solidFill>
+                <a:latin typeface="Poppins"/>
+              </a:rPr>
+              <a:t>Université de Mostaganem — Dr. Madani BELACEL</a:t>
             </a:r>
           </a:p>
         </p:txBody>
@@ -3925,9 +4023,7 @@
   <p:cSld>
     <p:bg>
       <p:bgPr>
-        <a:solidFill>
-          <a:srgbClr val="E8F0E9"/>
-        </a:solidFill>
+        <a:solidFill>val="F4F6F8"/&gt;</a:solidFill>
         <a:effectLst/>
       </p:bgPr>
     </p:bg>
@@ -3962,9 +4058,7 @@
           <a:p>
             <a:pPr algn="ctr">
               <a:defRPr sz="2600" b="1">
-                <a:solidFill>
-                  <a:srgbClr val="1A5C33"/>
-                </a:solidFill>
+                <a:solidFill>val="006847"/&gt;</a:solidFill>
               </a:defRPr>
             </a:pPr>
             <a:r>
@@ -4000,9 +4094,7 @@
                 <a:spcPts val="600"/>
               </a:spcAft>
               <a:defRPr sz="1600">
-                <a:solidFill>
-                  <a:srgbClr val="222222"/>
-                </a:solidFill>
+                <a:solidFill>val="22344A"/&gt;</a:solidFill>
               </a:defRPr>
             </a:pPr>
             <a:r>
@@ -4015,9 +4107,7 @@
                 <a:spcPts val="600"/>
               </a:spcAft>
               <a:defRPr sz="1600">
-                <a:solidFill>
-                  <a:srgbClr val="222222"/>
-                </a:solidFill>
+                <a:solidFill>val="22344A"/&gt;</a:solidFill>
               </a:defRPr>
             </a:pPr>
             <a:r>
@@ -4038,9 +4128,7 @@
                 <a:spcPts val="600"/>
               </a:spcAft>
               <a:defRPr sz="1600">
-                <a:solidFill>
-                  <a:srgbClr val="222222"/>
-                </a:solidFill>
+                <a:solidFill>val="22344A"/&gt;</a:solidFill>
               </a:defRPr>
             </a:pPr>
             <a:r>
@@ -4053,9 +4141,7 @@
                 <a:spcPts val="600"/>
               </a:spcAft>
               <a:defRPr sz="1600">
-                <a:solidFill>
-                  <a:srgbClr val="222222"/>
-                </a:solidFill>
+                <a:solidFill>val="22344A"/&gt;</a:solidFill>
               </a:defRPr>
             </a:pPr>
             <a:r>
@@ -4068,13 +4154,52 @@
                 <a:spcPts val="600"/>
               </a:spcAft>
               <a:defRPr sz="1600">
+                <a:solidFill>val="22344A"/&gt;</a:solidFill>
+              </a:defRPr>
+            </a:pPr>
+            <a:r>
+              <a:t>• DigComp 2.2 (Union Européenne, 2022) — cadre de compétences numériques</a:t>
+            </a:r>
+          </a:p>
+        </p:txBody>
+      </p:sp>
+      <p:sp>
+        <p:nvSpPr>
+          <p:cNvPr id="990001" name="Pied de page FLE"/>
+          <p:cNvSpPr>
+            <a:spLocks noGrp="1"/>
+          </p:cNvSpPr>
+          <p:nvPr/>
+        </p:nvSpPr>
+        <p:spPr>
+          <a:xfrm>
+            <a:off x="2971800" y="182880"/>
+            <a:ext cx="4572000" cy="274320"/>
+          </a:xfrm>
+          <a:prstGeom prst="rect">
+            <a:avLst/>
+          </a:prstGeom>
+        </p:spPr>
+        <p:txBody>
+          <a:bodyPr anchor="b"/>
+          <a:lstStyle/>
+          <a:p>
+            <a:pPr algn="r">
+              <a:defRPr sz="900">
                 <a:solidFill>
-                  <a:srgbClr val="222222"/>
+                  <a:srgbClr val="9AA7B6"/>
                 </a:solidFill>
-              </a:defRPr>
-            </a:pPr>
-            <a:r>
-              <a:t>• DigComp 2.2 (Union Européenne, 2022) — cadre de compétences numériques</a:t>
+                <a:latin typeface="Poppins"/>
+              </a:defRPr>
+            </a:pPr>
+            <a:r>
+              <a:rPr lang="fr-FR" sz="900">
+                <a:solidFill>
+                  <a:srgbClr val="9AA7B6"/>
+                </a:solidFill>
+                <a:latin typeface="Poppins"/>
+              </a:rPr>
+              <a:t>Université de Mostaganem — Dr. Madani BELACEL</a:t>
             </a:r>
           </a:p>
         </p:txBody>
@@ -4092,9 +4217,7 @@
   <p:cSld>
     <p:bg>
       <p:bgPr>
-        <a:solidFill>
-          <a:srgbClr val="FFFFFF"/>
-        </a:solidFill>
+        <a:solidFill>val="FFFFFF"/&gt;</a:solidFill>
         <a:effectLst/>
       </p:bgPr>
     </p:bg>
@@ -4129,9 +4252,7 @@
           <a:p>
             <a:pPr algn="ctr">
               <a:defRPr sz="2600" b="1">
-                <a:solidFill>
-                  <a:srgbClr val="1A5C33"/>
-                </a:solidFill>
+                <a:solidFill>val="006847"/&gt;</a:solidFill>
               </a:defRPr>
             </a:pPr>
             <a:r>
@@ -4167,9 +4288,7 @@
                 <a:spcPts val="600"/>
               </a:spcAft>
               <a:defRPr sz="1500">
-                <a:solidFill>
-                  <a:srgbClr val="222222"/>
-                </a:solidFill>
+                <a:solidFill>val="22344A"/&gt;</a:solidFill>
               </a:defRPr>
             </a:pPr>
             <a:r>
@@ -4182,9 +4301,7 @@
                 <a:spcPts val="600"/>
               </a:spcAft>
               <a:defRPr sz="1500">
-                <a:solidFill>
-                  <a:srgbClr val="222222"/>
-                </a:solidFill>
+                <a:solidFill>val="22344A"/&gt;</a:solidFill>
               </a:defRPr>
             </a:pPr>
             <a:r>
@@ -4197,9 +4314,7 @@
                 <a:spcPts val="600"/>
               </a:spcAft>
               <a:defRPr sz="1500">
-                <a:solidFill>
-                  <a:srgbClr val="222222"/>
-                </a:solidFill>
+                <a:solidFill>val="22344A"/&gt;</a:solidFill>
               </a:defRPr>
             </a:pPr>
             <a:r>
@@ -4212,9 +4327,7 @@
                 <a:spcPts val="600"/>
               </a:spcAft>
               <a:defRPr sz="1500">
-                <a:solidFill>
-                  <a:srgbClr val="222222"/>
-                </a:solidFill>
+                <a:solidFill>val="22344A"/&gt;</a:solidFill>
               </a:defRPr>
             </a:pPr>
             <a:r>
@@ -4227,13 +4340,52 @@
                 <a:spcPts val="600"/>
               </a:spcAft>
               <a:defRPr sz="1500">
+                <a:solidFill>val="22344A"/&gt;</a:solidFill>
+              </a:defRPr>
+            </a:pPr>
+            <a:r>
+              <a:t>• Préparer une courte présentation orale</a:t>
+            </a:r>
+          </a:p>
+        </p:txBody>
+      </p:sp>
+      <p:sp>
+        <p:nvSpPr>
+          <p:cNvPr id="990001" name="Pied de page FLE"/>
+          <p:cNvSpPr>
+            <a:spLocks noGrp="1"/>
+          </p:cNvSpPr>
+          <p:nvPr/>
+        </p:nvSpPr>
+        <p:spPr>
+          <a:xfrm>
+            <a:off x="2971800" y="182880"/>
+            <a:ext cx="4572000" cy="274320"/>
+          </a:xfrm>
+          <a:prstGeom prst="rect">
+            <a:avLst/>
+          </a:prstGeom>
+        </p:spPr>
+        <p:txBody>
+          <a:bodyPr anchor="b"/>
+          <a:lstStyle/>
+          <a:p>
+            <a:pPr algn="r">
+              <a:defRPr sz="900">
                 <a:solidFill>
-                  <a:srgbClr val="222222"/>
+                  <a:srgbClr val="9AA7B6"/>
                 </a:solidFill>
-              </a:defRPr>
-            </a:pPr>
-            <a:r>
-              <a:t>• Préparer une courte présentation orale</a:t>
+                <a:latin typeface="Poppins"/>
+              </a:defRPr>
+            </a:pPr>
+            <a:r>
+              <a:rPr lang="fr-FR" sz="900">
+                <a:solidFill>
+                  <a:srgbClr val="9AA7B6"/>
+                </a:solidFill>
+                <a:latin typeface="Poppins"/>
+              </a:rPr>
+              <a:t>Université de Mostaganem — Dr. Madani BELACEL</a:t>
             </a:r>
           </a:p>
         </p:txBody>
@@ -4251,9 +4403,7 @@
   <p:cSld>
     <p:bg>
       <p:bgPr>
-        <a:solidFill>
-          <a:srgbClr val="1A5C33"/>
-        </a:solidFill>
+        <a:solidFill>val="006847"/&gt;</a:solidFill>
         <a:effectLst/>
       </p:bgPr>
     </p:bg>
@@ -4288,9 +4438,7 @@
           <a:p>
             <a:pPr algn="ctr">
               <a:defRPr sz="2800" b="1">
-                <a:solidFill>
-                  <a:srgbClr val="FFFFFF"/>
-                </a:solidFill>
+                <a:solidFill>val="FFFFFF"/&gt;</a:solidFill>
               </a:defRPr>
             </a:pPr>
             <a:r>
@@ -4323,25 +4471,64 @@
           <a:p>
             <a:pPr algn="ctr">
               <a:defRPr sz="1800" b="0">
+                <a:solidFill>val="DFE5EA"/&gt;</a:solidFill>
+              </a:defRPr>
+            </a:pPr>
+            <a:r>
+              <a:t>Dr. BELACEL Madani</a:t>
+            </a:r>
+            <a:br/>
+            <a:r>
+              <a:t>Maître de Conférences B</a:t>
+            </a:r>
+            <a:br/>
+            <a:r>
+              <a:t>Université de Mostaganem</a:t>
+            </a:r>
+            <a:br/>
+            <a:r>
+              <a:t>madani.belacel@univ-mosta.dz</a:t>
+            </a:r>
+          </a:p>
+        </p:txBody>
+      </p:sp>
+      <p:sp>
+        <p:nvSpPr>
+          <p:cNvPr id="990001" name="Pied de page FLE"/>
+          <p:cNvSpPr>
+            <a:spLocks noGrp="1"/>
+          </p:cNvSpPr>
+          <p:nvPr/>
+        </p:nvSpPr>
+        <p:spPr>
+          <a:xfrm>
+            <a:off x="2880360" y="457200"/>
+            <a:ext cx="4572000" cy="274320"/>
+          </a:xfrm>
+          <a:prstGeom prst="rect">
+            <a:avLst/>
+          </a:prstGeom>
+        </p:spPr>
+        <p:txBody>
+          <a:bodyPr anchor="b"/>
+          <a:lstStyle/>
+          <a:p>
+            <a:pPr algn="r">
+              <a:defRPr sz="900">
                 <a:solidFill>
-                  <a:srgbClr val="C5D9C7"/>
+                  <a:srgbClr val="9AA7B6"/>
                 </a:solidFill>
-              </a:defRPr>
-            </a:pPr>
-            <a:r>
-              <a:t>Dr. BELACEL Madani</a:t>
-            </a:r>
-            <a:br/>
-            <a:r>
-              <a:t>Maître de Conférences B</a:t>
-            </a:r>
-            <a:br/>
-            <a:r>
-              <a:t>Université de Mostaganem</a:t>
-            </a:r>
-            <a:br/>
-            <a:r>
-              <a:t>madani.belacel@univ-mosta.dz</a:t>
+                <a:latin typeface="Poppins"/>
+              </a:defRPr>
+            </a:pPr>
+            <a:r>
+              <a:rPr lang="fr-FR" sz="900">
+                <a:solidFill>
+                  <a:srgbClr val="9AA7B6"/>
+                </a:solidFill>
+                <a:latin typeface="Poppins"/>
+              </a:rPr>
+              <a:t>Université de Mostaganem — Dr. Madani BELACEL</a:t>
             </a:r>
           </a:p>
         </p:txBody>
@@ -4359,9 +4546,7 @@
   <p:cSld>
     <p:bg>
       <p:bgPr>
-        <a:solidFill>
-          <a:srgbClr val="FFFFFF"/>
-        </a:solidFill>
+        <a:solidFill>val="FFFFFF"/&gt;</a:solidFill>
         <a:effectLst/>
       </p:bgPr>
     </p:bg>
@@ -4396,9 +4581,7 @@
           <a:p>
             <a:pPr algn="l">
               <a:defRPr sz="2600" b="1">
-                <a:solidFill>
-                  <a:srgbClr val="1A5C33"/>
-                </a:solidFill>
+                <a:solidFill>val="006847"/&gt;</a:solidFill>
               </a:defRPr>
             </a:pPr>
             <a:r>
@@ -4434,9 +4617,7 @@
                 <a:spcPts val="600"/>
               </a:spcAft>
               <a:defRPr sz="1500">
-                <a:solidFill>
-                  <a:srgbClr val="222222"/>
-                </a:solidFill>
+                <a:solidFill>val="22344A"/&gt;</a:solidFill>
               </a:defRPr>
             </a:pPr>
             <a:r>
@@ -4457,9 +4638,7 @@
                 <a:spcPts val="600"/>
               </a:spcAft>
               <a:defRPr sz="1500">
-                <a:solidFill>
-                  <a:srgbClr val="222222"/>
-                </a:solidFill>
+                <a:solidFill>val="22344A"/&gt;</a:solidFill>
               </a:defRPr>
             </a:pPr>
             <a:r>
@@ -4484,9 +4663,7 @@
                 <a:spcPts val="600"/>
               </a:spcAft>
               <a:defRPr sz="1500">
-                <a:solidFill>
-                  <a:srgbClr val="222222"/>
-                </a:solidFill>
+                <a:solidFill>val="22344A"/&gt;</a:solidFill>
               </a:defRPr>
             </a:pPr>
             <a:r>
@@ -4503,13 +4680,52 @@
                 <a:spcPts val="600"/>
               </a:spcAft>
               <a:defRPr sz="1500">
+                <a:solidFill>val="22344A"/&gt;</a:solidFill>
+              </a:defRPr>
+            </a:pPr>
+            <a:r>
+              <a:t>• Mode d'évaluation :TD 20 % + Portfolio numérique (HAL + Zotero + ORCID) 50 % + QCM final 30 %</a:t>
+            </a:r>
+          </a:p>
+        </p:txBody>
+      </p:sp>
+      <p:sp>
+        <p:nvSpPr>
+          <p:cNvPr id="990001" name="Pied de page FLE"/>
+          <p:cNvSpPr>
+            <a:spLocks noGrp="1"/>
+          </p:cNvSpPr>
+          <p:nvPr/>
+        </p:nvSpPr>
+        <p:spPr>
+          <a:xfrm>
+            <a:off x="2971800" y="182880"/>
+            <a:ext cx="4572000" cy="274320"/>
+          </a:xfrm>
+          <a:prstGeom prst="rect">
+            <a:avLst/>
+          </a:prstGeom>
+        </p:spPr>
+        <p:txBody>
+          <a:bodyPr anchor="b"/>
+          <a:lstStyle/>
+          <a:p>
+            <a:pPr algn="r">
+              <a:defRPr sz="900">
                 <a:solidFill>
-                  <a:srgbClr val="222222"/>
+                  <a:srgbClr val="9AA7B6"/>
                 </a:solidFill>
-              </a:defRPr>
-            </a:pPr>
-            <a:r>
-              <a:t>• Mode d'évaluation :TD 20 % + Portfolio numérique (HAL + Zotero + ORCID) 50 % + QCM final 30 %</a:t>
+                <a:latin typeface="Poppins"/>
+              </a:defRPr>
+            </a:pPr>
+            <a:r>
+              <a:rPr lang="fr-FR" sz="900">
+                <a:solidFill>
+                  <a:srgbClr val="9AA7B6"/>
+                </a:solidFill>
+                <a:latin typeface="Poppins"/>
+              </a:rPr>
+              <a:t>Université de Mostaganem — Dr. Madani BELACEL</a:t>
             </a:r>
           </a:p>
         </p:txBody>
@@ -4527,9 +4743,7 @@
   <p:cSld>
     <p:bg>
       <p:bgPr>
-        <a:solidFill>
-          <a:srgbClr val="FFFFFF"/>
-        </a:solidFill>
+        <a:solidFill>val="FFFFFF"/&gt;</a:solidFill>
         <a:effectLst/>
       </p:bgPr>
     </p:bg>
@@ -4564,9 +4778,7 @@
           <a:p>
             <a:pPr algn="l">
               <a:defRPr sz="2600" b="1">
-                <a:solidFill>
-                  <a:srgbClr val="1A5C33"/>
-                </a:solidFill>
+                <a:solidFill>val="006847"/&gt;</a:solidFill>
               </a:defRPr>
             </a:pPr>
             <a:r>
@@ -4602,9 +4814,7 @@
                 <a:spcPts val="600"/>
               </a:spcAft>
               <a:defRPr sz="1600">
-                <a:solidFill>
-                  <a:srgbClr val="222222"/>
-                </a:solidFill>
+                <a:solidFill>val="22344A"/&gt;</a:solidFill>
               </a:defRPr>
             </a:pPr>
             <a:r>
@@ -4617,9 +4827,7 @@
                 <a:spcPts val="600"/>
               </a:spcAft>
               <a:defRPr sz="1600">
-                <a:solidFill>
-                  <a:srgbClr val="222222"/>
-                </a:solidFill>
+                <a:solidFill>val="22344A"/&gt;</a:solidFill>
               </a:defRPr>
             </a:pPr>
             <a:r>
@@ -4632,9 +4840,7 @@
                 <a:spcPts val="600"/>
               </a:spcAft>
               <a:defRPr sz="1600">
-                <a:solidFill>
-                  <a:srgbClr val="222222"/>
-                </a:solidFill>
+                <a:solidFill>val="22344A"/&gt;</a:solidFill>
               </a:defRPr>
             </a:pPr>
             <a:r>
@@ -4647,9 +4853,7 @@
                 <a:spcPts val="600"/>
               </a:spcAft>
               <a:defRPr sz="1600">
-                <a:solidFill>
-                  <a:srgbClr val="222222"/>
-                </a:solidFill>
+                <a:solidFill>val="22344A"/&gt;</a:solidFill>
               </a:defRPr>
             </a:pPr>
             <a:r>
@@ -4662,9 +4866,7 @@
                 <a:spcPts val="600"/>
               </a:spcAft>
               <a:defRPr sz="1600">
-                <a:solidFill>
-                  <a:srgbClr val="222222"/>
-                </a:solidFill>
+                <a:solidFill>val="22344A"/&gt;</a:solidFill>
               </a:defRPr>
             </a:pPr>
             <a:r>
@@ -4677,9 +4879,7 @@
                 <a:spcPts val="600"/>
               </a:spcAft>
               <a:defRPr sz="1600">
-                <a:solidFill>
-                  <a:srgbClr val="222222"/>
-                </a:solidFill>
+                <a:solidFill>val="22344A"/&gt;</a:solidFill>
               </a:defRPr>
             </a:pPr>
             <a:r>
@@ -4692,9 +4892,7 @@
                 <a:spcPts val="600"/>
               </a:spcAft>
               <a:defRPr sz="1600">
-                <a:solidFill>
-                  <a:srgbClr val="222222"/>
-                </a:solidFill>
+                <a:solidFill>val="22344A"/&gt;</a:solidFill>
               </a:defRPr>
             </a:pPr>
             <a:r>
@@ -4707,9 +4905,7 @@
                 <a:spcPts val="600"/>
               </a:spcAft>
               <a:defRPr sz="1600">
-                <a:solidFill>
-                  <a:srgbClr val="222222"/>
-                </a:solidFill>
+                <a:solidFill>val="22344A"/&gt;</a:solidFill>
               </a:defRPr>
             </a:pPr>
             <a:r>
@@ -4722,9 +4918,7 @@
                 <a:spcPts val="600"/>
               </a:spcAft>
               <a:defRPr sz="1600">
-                <a:solidFill>
-                  <a:srgbClr val="222222"/>
-                </a:solidFill>
+                <a:solidFill>val="22344A"/&gt;</a:solidFill>
               </a:defRPr>
             </a:pPr>
             <a:r>
@@ -4737,13 +4931,52 @@
                 <a:spcPts val="600"/>
               </a:spcAft>
               <a:defRPr sz="1600">
+                <a:solidFill>val="22344A"/&gt;</a:solidFill>
+              </a:defRPr>
+            </a:pPr>
+            <a:r>
+              <a:t>• Google Scholar avancé et Google Alerts(10 min)</a:t>
+            </a:r>
+          </a:p>
+        </p:txBody>
+      </p:sp>
+      <p:sp>
+        <p:nvSpPr>
+          <p:cNvPr id="990001" name="Pied de page FLE"/>
+          <p:cNvSpPr>
+            <a:spLocks noGrp="1"/>
+          </p:cNvSpPr>
+          <p:nvPr/>
+        </p:nvSpPr>
+        <p:spPr>
+          <a:xfrm>
+            <a:off x="2971800" y="182880"/>
+            <a:ext cx="4572000" cy="274320"/>
+          </a:xfrm>
+          <a:prstGeom prst="rect">
+            <a:avLst/>
+          </a:prstGeom>
+        </p:spPr>
+        <p:txBody>
+          <a:bodyPr anchor="b"/>
+          <a:lstStyle/>
+          <a:p>
+            <a:pPr algn="r">
+              <a:defRPr sz="900">
                 <a:solidFill>
-                  <a:srgbClr val="222222"/>
+                  <a:srgbClr val="9AA7B6"/>
                 </a:solidFill>
-              </a:defRPr>
-            </a:pPr>
-            <a:r>
-              <a:t>• Google Scholar avancé et Google Alerts(10 min)</a:t>
+                <a:latin typeface="Poppins"/>
+              </a:defRPr>
+            </a:pPr>
+            <a:r>
+              <a:rPr lang="fr-FR" sz="900">
+                <a:solidFill>
+                  <a:srgbClr val="9AA7B6"/>
+                </a:solidFill>
+                <a:latin typeface="Poppins"/>
+              </a:rPr>
+              <a:t>Université de Mostaganem — Dr. Madani BELACEL</a:t>
             </a:r>
           </a:p>
         </p:txBody>
@@ -4761,9 +4994,7 @@
   <p:cSld>
     <p:bg>
       <p:bgPr>
-        <a:solidFill>
-          <a:srgbClr val="FFFFFF"/>
-        </a:solidFill>
+        <a:solidFill>val="FFFFFF"/&gt;</a:solidFill>
         <a:effectLst/>
       </p:bgPr>
     </p:bg>
@@ -4788,9 +5019,7 @@
           <a:prstGeom prst="rect">
             <a:avLst/>
           </a:prstGeom>
-          <a:solidFill>
-            <a:srgbClr val="2C6E49"/>
-          </a:solidFill>
+          <a:solidFill>val="00875B"/&gt;</a:solidFill>
           <a:ln>
             <a:noFill/>
           </a:ln>
@@ -4841,9 +5070,7 @@
           <a:p>
             <a:pPr algn="l">
               <a:defRPr sz="2200" b="1">
-                <a:solidFill>
-                  <a:srgbClr val="1A5C33"/>
-                </a:solidFill>
+                <a:solidFill>val="006847"/&gt;</a:solidFill>
               </a:defRPr>
             </a:pPr>
             <a:r>
@@ -4879,9 +5106,7 @@
                 <a:spcPts val="600"/>
               </a:spcAft>
               <a:defRPr sz="1400">
-                <a:solidFill>
-                  <a:srgbClr val="222222"/>
-                </a:solidFill>
+                <a:solidFill>val="22344A"/&gt;</a:solidFill>
               </a:defRPr>
             </a:pPr>
             <a:r>
@@ -4894,9 +5119,7 @@
                 <a:spcPts val="600"/>
               </a:spcAft>
               <a:defRPr sz="1400">
-                <a:solidFill>
-                  <a:srgbClr val="222222"/>
-                </a:solidFill>
+                <a:solidFill>val="22344A"/&gt;</a:solidFill>
               </a:defRPr>
             </a:pPr>
             <a:r>
@@ -4909,13 +5132,52 @@
                 <a:spcPts val="600"/>
               </a:spcAft>
               <a:defRPr sz="1400">
+                <a:solidFill>val="22344A"/&gt;</a:solidFill>
+              </a:defRPr>
+            </a:pPr>
+            <a:r>
+              <a:t>• Compétences pré-requises :TIC 01–09 ; maîtrise de la navigation Web et de la recherche documentaire</a:t>
+            </a:r>
+          </a:p>
+        </p:txBody>
+      </p:sp>
+      <p:sp>
+        <p:nvSpPr>
+          <p:cNvPr id="990001" name="Pied de page FLE"/>
+          <p:cNvSpPr>
+            <a:spLocks noGrp="1"/>
+          </p:cNvSpPr>
+          <p:nvPr/>
+        </p:nvSpPr>
+        <p:spPr>
+          <a:xfrm>
+            <a:off x="-228600" y="6400800"/>
+            <a:ext cx="109728" cy="274320"/>
+          </a:xfrm>
+          <a:prstGeom prst="rect">
+            <a:avLst/>
+          </a:prstGeom>
+        </p:spPr>
+        <p:txBody>
+          <a:bodyPr anchor="b"/>
+          <a:lstStyle/>
+          <a:p>
+            <a:pPr algn="r">
+              <a:defRPr sz="900">
                 <a:solidFill>
-                  <a:srgbClr val="222222"/>
+                  <a:srgbClr val="9AA7B6"/>
                 </a:solidFill>
-              </a:defRPr>
-            </a:pPr>
-            <a:r>
-              <a:t>• Compétences pré-requises :TIC 01–09 ; maîtrise de la navigation Web et de la recherche documentaire</a:t>
+                <a:latin typeface="Poppins"/>
+              </a:defRPr>
+            </a:pPr>
+            <a:r>
+              <a:rPr lang="fr-FR" sz="900">
+                <a:solidFill>
+                  <a:srgbClr val="9AA7B6"/>
+                </a:solidFill>
+                <a:latin typeface="Poppins"/>
+              </a:rPr>
+              <a:t>Université de Mostaganem — Dr. Madani BELACEL</a:t>
             </a:r>
           </a:p>
         </p:txBody>
@@ -4933,9 +5195,7 @@
   <p:cSld>
     <p:bg>
       <p:bgPr>
-        <a:solidFill>
-          <a:srgbClr val="FFFFFF"/>
-        </a:solidFill>
+        <a:solidFill>val="FFFFFF"/&gt;</a:solidFill>
         <a:effectLst/>
       </p:bgPr>
     </p:bg>
@@ -4960,9 +5220,7 @@
           <a:prstGeom prst="rect">
             <a:avLst/>
           </a:prstGeom>
-          <a:solidFill>
-            <a:srgbClr val="2C6E49"/>
-          </a:solidFill>
+          <a:solidFill>val="00875B"/&gt;</a:solidFill>
           <a:ln>
             <a:noFill/>
           </a:ln>
@@ -5013,9 +5271,7 @@
           <a:p>
             <a:pPr algn="l">
               <a:defRPr sz="2200" b="1">
-                <a:solidFill>
-                  <a:srgbClr val="1A5C33"/>
-                </a:solidFill>
+                <a:solidFill>val="006847"/&gt;</a:solidFill>
               </a:defRPr>
             </a:pPr>
             <a:r>
@@ -5051,9 +5307,7 @@
                 <a:spcPts val="600"/>
               </a:spcAft>
               <a:defRPr sz="1400">
-                <a:solidFill>
-                  <a:srgbClr val="222222"/>
-                </a:solidFill>
+                <a:solidFill>val="22344A"/&gt;</a:solidFill>
               </a:defRPr>
             </a:pPr>
             <a:r>
@@ -5074,9 +5328,7 @@
                 <a:spcPts val="600"/>
               </a:spcAft>
               <a:defRPr sz="1400">
-                <a:solidFill>
-                  <a:srgbClr val="222222"/>
-                </a:solidFill>
+                <a:solidFill>val="22344A"/&gt;</a:solidFill>
               </a:defRPr>
             </a:pPr>
             <a:r>
@@ -5101,9 +5353,7 @@
                 <a:spcPts val="600"/>
               </a:spcAft>
               <a:defRPr sz="1400">
-                <a:solidFill>
-                  <a:srgbClr val="222222"/>
-                </a:solidFill>
+                <a:solidFill>val="22344A"/&gt;</a:solidFill>
               </a:defRPr>
             </a:pPr>
             <a:r>
@@ -5120,13 +5370,52 @@
                 <a:spcPts val="600"/>
               </a:spcAft>
               <a:defRPr sz="1400">
+                <a:solidFill>val="22344A"/&gt;</a:solidFill>
+              </a:defRPr>
+            </a:pPr>
+            <a:r>
+              <a:t>• Mode d'évaluation :TD 20 % + Portfolio numérique (HAL + Zotero + ORCID) 50 % + QCM final 30 %</a:t>
+            </a:r>
+          </a:p>
+        </p:txBody>
+      </p:sp>
+      <p:sp>
+        <p:nvSpPr>
+          <p:cNvPr id="990001" name="Pied de page FLE"/>
+          <p:cNvSpPr>
+            <a:spLocks noGrp="1"/>
+          </p:cNvSpPr>
+          <p:nvPr/>
+        </p:nvSpPr>
+        <p:spPr>
+          <a:xfrm>
+            <a:off x="-228600" y="6400800"/>
+            <a:ext cx="109728" cy="274320"/>
+          </a:xfrm>
+          <a:prstGeom prst="rect">
+            <a:avLst/>
+          </a:prstGeom>
+        </p:spPr>
+        <p:txBody>
+          <a:bodyPr anchor="b"/>
+          <a:lstStyle/>
+          <a:p>
+            <a:pPr algn="r">
+              <a:defRPr sz="900">
                 <a:solidFill>
-                  <a:srgbClr val="222222"/>
+                  <a:srgbClr val="9AA7B6"/>
                 </a:solidFill>
-              </a:defRPr>
-            </a:pPr>
-            <a:r>
-              <a:t>• Mode d'évaluation :TD 20 % + Portfolio numérique (HAL + Zotero + ORCID) 50 % + QCM final 30 %</a:t>
+                <a:latin typeface="Poppins"/>
+              </a:defRPr>
+            </a:pPr>
+            <a:r>
+              <a:rPr lang="fr-FR" sz="900">
+                <a:solidFill>
+                  <a:srgbClr val="9AA7B6"/>
+                </a:solidFill>
+                <a:latin typeface="Poppins"/>
+              </a:rPr>
+              <a:t>Université de Mostaganem — Dr. Madani BELACEL</a:t>
             </a:r>
           </a:p>
         </p:txBody>
@@ -5144,9 +5433,7 @@
   <p:cSld>
     <p:bg>
       <p:bgPr>
-        <a:solidFill>
-          <a:srgbClr val="FFFFFF"/>
-        </a:solidFill>
+        <a:solidFill>val="FFFFFF"/&gt;</a:solidFill>
         <a:effectLst/>
       </p:bgPr>
     </p:bg>
@@ -5171,9 +5458,7 @@
           <a:prstGeom prst="rect">
             <a:avLst/>
           </a:prstGeom>
-          <a:solidFill>
-            <a:srgbClr val="2C6E49"/>
-          </a:solidFill>
+          <a:solidFill>val="00875B"/&gt;</a:solidFill>
           <a:ln>
             <a:noFill/>
           </a:ln>
@@ -5224,9 +5509,7 @@
           <a:p>
             <a:pPr algn="l">
               <a:defRPr sz="2200" b="1">
-                <a:solidFill>
-                  <a:srgbClr val="1A5C33"/>
-                </a:solidFill>
+                <a:solidFill>val="006847"/&gt;</a:solidFill>
               </a:defRPr>
             </a:pPr>
             <a:r>
@@ -5262,9 +5545,7 @@
                 <a:spcPts val="600"/>
               </a:spcAft>
               <a:defRPr sz="1400">
-                <a:solidFill>
-                  <a:srgbClr val="222222"/>
-                </a:solidFill>
+                <a:solidFill>val="22344A"/&gt;</a:solidFill>
               </a:defRPr>
             </a:pPr>
             <a:r>
@@ -5277,9 +5558,7 @@
                 <a:spcPts val="600"/>
               </a:spcAft>
               <a:defRPr sz="1400">
-                <a:solidFill>
-                  <a:srgbClr val="222222"/>
-                </a:solidFill>
+                <a:solidFill>val="22344A"/&gt;</a:solidFill>
               </a:defRPr>
             </a:pPr>
             <a:r>
@@ -5292,13 +5571,52 @@
                 <a:spcPts val="600"/>
               </a:spcAft>
               <a:defRPr sz="1400">
+                <a:solidFill>val="22344A"/&gt;</a:solidFill>
+              </a:defRPr>
+            </a:pPr>
+            <a:r>
+              <a:t>• Rédaction d'un court article sur Overleaf (modèle template)</a:t>
+            </a:r>
+          </a:p>
+        </p:txBody>
+      </p:sp>
+      <p:sp>
+        <p:nvSpPr>
+          <p:cNvPr id="990001" name="Pied de page FLE"/>
+          <p:cNvSpPr>
+            <a:spLocks noGrp="1"/>
+          </p:cNvSpPr>
+          <p:nvPr/>
+        </p:nvSpPr>
+        <p:spPr>
+          <a:xfrm>
+            <a:off x="-228600" y="6400800"/>
+            <a:ext cx="109728" cy="274320"/>
+          </a:xfrm>
+          <a:prstGeom prst="rect">
+            <a:avLst/>
+          </a:prstGeom>
+        </p:spPr>
+        <p:txBody>
+          <a:bodyPr anchor="b"/>
+          <a:lstStyle/>
+          <a:p>
+            <a:pPr algn="r">
+              <a:defRPr sz="900">
                 <a:solidFill>
-                  <a:srgbClr val="222222"/>
+                  <a:srgbClr val="9AA7B6"/>
                 </a:solidFill>
-              </a:defRPr>
-            </a:pPr>
-            <a:r>
-              <a:t>• Rédaction d'un court article sur Overleaf (modèle template)</a:t>
+                <a:latin typeface="Poppins"/>
+              </a:defRPr>
+            </a:pPr>
+            <a:r>
+              <a:rPr lang="fr-FR" sz="900">
+                <a:solidFill>
+                  <a:srgbClr val="9AA7B6"/>
+                </a:solidFill>
+                <a:latin typeface="Poppins"/>
+              </a:rPr>
+              <a:t>Université de Mostaganem — Dr. Madani BELACEL</a:t>
             </a:r>
           </a:p>
         </p:txBody>
@@ -5316,9 +5634,7 @@
   <p:cSld>
     <p:bg>
       <p:bgPr>
-        <a:solidFill>
-          <a:srgbClr val="FFFFFF"/>
-        </a:solidFill>
+        <a:solidFill>val="FFFFFF"/&gt;</a:solidFill>
         <a:effectLst/>
       </p:bgPr>
     </p:bg>
@@ -5343,9 +5659,7 @@
           <a:prstGeom prst="rect">
             <a:avLst/>
           </a:prstGeom>
-          <a:solidFill>
-            <a:srgbClr val="2C6E49"/>
-          </a:solidFill>
+          <a:solidFill>val="00875B"/&gt;</a:solidFill>
           <a:ln>
             <a:noFill/>
           </a:ln>
@@ -5396,9 +5710,7 @@
           <a:p>
             <a:pPr algn="l">
               <a:defRPr sz="2200" b="1">
-                <a:solidFill>
-                  <a:srgbClr val="1A5C33"/>
-                </a:solidFill>
+                <a:solidFill>val="006847"/&gt;</a:solidFill>
               </a:defRPr>
             </a:pPr>
             <a:r>
@@ -5434,9 +5746,7 @@
                 <a:spcPts val="600"/>
               </a:spcAft>
               <a:defRPr sz="1400">
-                <a:solidFill>
-                  <a:srgbClr val="222222"/>
-                </a:solidFill>
+                <a:solidFill>val="22344A"/&gt;</a:solidFill>
               </a:defRPr>
             </a:pPr>
             <a:r>
@@ -5449,13 +5759,52 @@
                 <a:spcPts val="600"/>
               </a:spcAft>
               <a:defRPr sz="1400">
+                <a:solidFill>val="22344A"/&gt;</a:solidFill>
+              </a:defRPr>
+            </a:pPr>
+            <a:r>
+              <a:t>• QCM final récapitulatif du module TIC (20 questions)</a:t>
+            </a:r>
+          </a:p>
+        </p:txBody>
+      </p:sp>
+      <p:sp>
+        <p:nvSpPr>
+          <p:cNvPr id="990001" name="Pied de page FLE"/>
+          <p:cNvSpPr>
+            <a:spLocks noGrp="1"/>
+          </p:cNvSpPr>
+          <p:nvPr/>
+        </p:nvSpPr>
+        <p:spPr>
+          <a:xfrm>
+            <a:off x="-228600" y="6400800"/>
+            <a:ext cx="109728" cy="274320"/>
+          </a:xfrm>
+          <a:prstGeom prst="rect">
+            <a:avLst/>
+          </a:prstGeom>
+        </p:spPr>
+        <p:txBody>
+          <a:bodyPr anchor="b"/>
+          <a:lstStyle/>
+          <a:p>
+            <a:pPr algn="r">
+              <a:defRPr sz="900">
                 <a:solidFill>
-                  <a:srgbClr val="222222"/>
+                  <a:srgbClr val="9AA7B6"/>
                 </a:solidFill>
-              </a:defRPr>
-            </a:pPr>
-            <a:r>
-              <a:t>• QCM final récapitulatif du module TIC (20 questions)</a:t>
+                <a:latin typeface="Poppins"/>
+              </a:defRPr>
+            </a:pPr>
+            <a:r>
+              <a:rPr lang="fr-FR" sz="900">
+                <a:solidFill>
+                  <a:srgbClr val="9AA7B6"/>
+                </a:solidFill>
+                <a:latin typeface="Poppins"/>
+              </a:rPr>
+              <a:t>Université de Mostaganem — Dr. Madani BELACEL</a:t>
             </a:r>
           </a:p>
         </p:txBody>
@@ -5473,9 +5822,7 @@
   <p:cSld>
     <p:bg>
       <p:bgPr>
-        <a:solidFill>
-          <a:srgbClr val="FFFFFF"/>
-        </a:solidFill>
+        <a:solidFill>val="FFFFFF"/&gt;</a:solidFill>
         <a:effectLst/>
       </p:bgPr>
     </p:bg>
@@ -5500,9 +5847,7 @@
           <a:prstGeom prst="rect">
             <a:avLst/>
           </a:prstGeom>
-          <a:solidFill>
-            <a:srgbClr val="2C6E49"/>
-          </a:solidFill>
+          <a:solidFill>val="00875B"/&gt;</a:solidFill>
           <a:ln>
             <a:noFill/>
           </a:ln>
@@ -5553,9 +5898,7 @@
           <a:p>
             <a:pPr algn="l">
               <a:defRPr sz="2200" b="1">
-                <a:solidFill>
-                  <a:srgbClr val="1A5C33"/>
-                </a:solidFill>
+                <a:solidFill>val="006847"/&gt;</a:solidFill>
               </a:defRPr>
             </a:pPr>
             <a:r>
@@ -5591,9 +5934,7 @@
                 <a:spcPts val="600"/>
               </a:spcAft>
               <a:defRPr sz="1400">
-                <a:solidFill>
-                  <a:srgbClr val="222222"/>
-                </a:solidFill>
+                <a:solidFill>val="22344A"/&gt;</a:solidFill>
               </a:defRPr>
             </a:pPr>
             <a:r>
@@ -5606,9 +5947,7 @@
                 <a:spcPts val="600"/>
               </a:spcAft>
               <a:defRPr sz="1400">
-                <a:solidFill>
-                  <a:srgbClr val="222222"/>
-                </a:solidFill>
+                <a:solidFill>val="22344A"/&gt;</a:solidFill>
               </a:defRPr>
             </a:pPr>
             <a:r>
@@ -5621,9 +5960,7 @@
                 <a:spcPts val="600"/>
               </a:spcAft>
               <a:defRPr sz="1400">
-                <a:solidFill>
-                  <a:srgbClr val="222222"/>
-                </a:solidFill>
+                <a:solidFill>val="22344A"/&gt;</a:solidFill>
               </a:defRPr>
             </a:pPr>
             <a:r>
@@ -5636,9 +5973,7 @@
                 <a:spcPts val="600"/>
               </a:spcAft>
               <a:defRPr sz="1400">
-                <a:solidFill>
-                  <a:srgbClr val="222222"/>
-                </a:solidFill>
+                <a:solidFill>val="22344A"/&gt;</a:solidFill>
               </a:defRPr>
             </a:pPr>
             <a:r>
@@ -5651,13 +5986,52 @@
                 <a:spcPts val="600"/>
               </a:spcAft>
               <a:defRPr sz="1400">
+                <a:solidFill>val="22344A"/&gt;</a:solidFill>
+              </a:defRPr>
+            </a:pPr>
+            <a:r>
+              <a:t>• Contact enseignant :BELACEL Madani —madani.belacel@univ-mosta.dz</a:t>
+            </a:r>
+          </a:p>
+        </p:txBody>
+      </p:sp>
+      <p:sp>
+        <p:nvSpPr>
+          <p:cNvPr id="990001" name="Pied de page FLE"/>
+          <p:cNvSpPr>
+            <a:spLocks noGrp="1"/>
+          </p:cNvSpPr>
+          <p:nvPr/>
+        </p:nvSpPr>
+        <p:spPr>
+          <a:xfrm>
+            <a:off x="-228600" y="6400800"/>
+            <a:ext cx="109728" cy="274320"/>
+          </a:xfrm>
+          <a:prstGeom prst="rect">
+            <a:avLst/>
+          </a:prstGeom>
+        </p:spPr>
+        <p:txBody>
+          <a:bodyPr anchor="b"/>
+          <a:lstStyle/>
+          <a:p>
+            <a:pPr algn="r">
+              <a:defRPr sz="900">
                 <a:solidFill>
-                  <a:srgbClr val="222222"/>
+                  <a:srgbClr val="9AA7B6"/>
                 </a:solidFill>
-              </a:defRPr>
-            </a:pPr>
-            <a:r>
-              <a:t>• Contact enseignant :BELACEL Madani —madani.belacel@univ-mosta.dz</a:t>
+                <a:latin typeface="Poppins"/>
+              </a:defRPr>
+            </a:pPr>
+            <a:r>
+              <a:rPr lang="fr-FR" sz="900">
+                <a:solidFill>
+                  <a:srgbClr val="9AA7B6"/>
+                </a:solidFill>
+                <a:latin typeface="Poppins"/>
+              </a:rPr>
+              <a:t>Université de Mostaganem — Dr. Madani BELACEL</a:t>
             </a:r>
           </a:p>
         </p:txBody>
@@ -5675,9 +6049,7 @@
   <p:cSld>
     <p:bg>
       <p:bgPr>
-        <a:solidFill>
-          <a:srgbClr val="FFFFFF"/>
-        </a:solidFill>
+        <a:solidFill>val="FFFFFF"/&gt;</a:solidFill>
         <a:effectLst/>
       </p:bgPr>
     </p:bg>
@@ -5702,9 +6074,7 @@
           <a:prstGeom prst="rect">
             <a:avLst/>
           </a:prstGeom>
-          <a:solidFill>
-            <a:srgbClr val="2C6E49"/>
-          </a:solidFill>
+          <a:solidFill>val="00875B"/&gt;</a:solidFill>
           <a:ln>
             <a:noFill/>
           </a:ln>
@@ -5755,9 +6125,7 @@
           <a:p>
             <a:pPr algn="l">
               <a:defRPr sz="2200" b="1">
-                <a:solidFill>
-                  <a:srgbClr val="1A5C33"/>
-                </a:solidFill>
+                <a:solidFill>val="006847"/&gt;</a:solidFill>
               </a:defRPr>
             </a:pPr>
             <a:r>
@@ -5793,9 +6161,7 @@
                 <a:spcPts val="600"/>
               </a:spcAft>
               <a:defRPr sz="1400">
-                <a:solidFill>
-                  <a:srgbClr val="222222"/>
-                </a:solidFill>
+                <a:solidFill>val="22344A"/&gt;</a:solidFill>
               </a:defRPr>
             </a:pPr>
             <a:r>
@@ -5808,9 +6174,7 @@
                 <a:spcPts val="600"/>
               </a:spcAft>
               <a:defRPr sz="1400">
-                <a:solidFill>
-                  <a:srgbClr val="222222"/>
-                </a:solidFill>
+                <a:solidFill>val="22344A"/&gt;</a:solidFill>
               </a:defRPr>
             </a:pPr>
             <a:r>
@@ -5823,13 +6187,52 @@
                 <a:spcPts val="600"/>
               </a:spcAft>
               <a:defRPr sz="1400">
+                <a:solidFill>val="22344A"/&gt;</a:solidFill>
+              </a:defRPr>
+            </a:pPr>
+            <a:r>
+              <a:t>• PNDES 2025-2030: L'Algérie s'engage dans laScience Ouvertevia le portail national des revues (SJD) et le dépôt systématique des thèses. La bibliothèque numérique du CERIST (biblio.cerist.dz) donne accès aux ressources souscrites.</a:t>
+            </a:r>
+          </a:p>
+        </p:txBody>
+      </p:sp>
+      <p:sp>
+        <p:nvSpPr>
+          <p:cNvPr id="990001" name="Pied de page FLE"/>
+          <p:cNvSpPr>
+            <a:spLocks noGrp="1"/>
+          </p:cNvSpPr>
+          <p:nvPr/>
+        </p:nvSpPr>
+        <p:spPr>
+          <a:xfrm>
+            <a:off x="-228600" y="6400800"/>
+            <a:ext cx="109728" cy="274320"/>
+          </a:xfrm>
+          <a:prstGeom prst="rect">
+            <a:avLst/>
+          </a:prstGeom>
+        </p:spPr>
+        <p:txBody>
+          <a:bodyPr anchor="b"/>
+          <a:lstStyle/>
+          <a:p>
+            <a:pPr algn="r">
+              <a:defRPr sz="900">
                 <a:solidFill>
-                  <a:srgbClr val="222222"/>
+                  <a:srgbClr val="9AA7B6"/>
                 </a:solidFill>
-              </a:defRPr>
-            </a:pPr>
-            <a:r>
-              <a:t>• PNDES 2025-2030: L'Algérie s'engage dans laScience Ouvertevia le portail national des revues (SJD) et le dépôt systématique des thèses. La bibliothèque numérique du CERIST (biblio.cerist.dz) donne accès aux ressources souscrites.</a:t>
+                <a:latin typeface="Poppins"/>
+              </a:defRPr>
+            </a:pPr>
+            <a:r>
+              <a:rPr lang="fr-FR" sz="900">
+                <a:solidFill>
+                  <a:srgbClr val="9AA7B6"/>
+                </a:solidFill>
+                <a:latin typeface="Poppins"/>
+              </a:rPr>
+              <a:t>Université de Mostaganem — Dr. Madani BELACEL</a:t>
             </a:r>
           </a:p>
         </p:txBody>
@@ -5885,7 +6288,7 @@
     </a:clrScheme>
     <a:fontScheme name="Office">
       <a:majorFont>
-        <a:latin typeface="Calibri"/>
+        <a:latin typeface="Poppins"/>
         <a:ea typeface=""/>
         <a:cs typeface=""/>
         <a:font script="Jpan" typeface="ＭＳ Ｐゴシック"/>
@@ -5920,7 +6323,7 @@
         <a:font script="Geor" typeface="Sylfaen"/>
       </a:majorFont>
       <a:minorFont>
-        <a:latin typeface="Calibri"/>
+        <a:latin typeface="Poppins"/>
         <a:ea typeface=""/>
         <a:cs typeface=""/>
         <a:font script="Jpan" typeface="ＭＳ Ｐゴシック"/>
